--- a/kubernetes/12_helm.pptx
+++ b/kubernetes/12_helm.pptx
@@ -5,26 +5,24 @@
     <p:sldMasterId id="2147483733" r:id="rId1"/>
   </p:sldMasterIdLst>
   <p:notesMasterIdLst>
-    <p:notesMasterId r:id="rId16"/>
+    <p:notesMasterId r:id="rId14"/>
   </p:notesMasterIdLst>
   <p:handoutMasterIdLst>
-    <p:handoutMasterId r:id="rId17"/>
+    <p:handoutMasterId r:id="rId15"/>
   </p:handoutMasterIdLst>
   <p:sldIdLst>
     <p:sldId id="433" r:id="rId2"/>
-    <p:sldId id="442" r:id="rId3"/>
-    <p:sldId id="445" r:id="rId4"/>
-    <p:sldId id="470" r:id="rId5"/>
-    <p:sldId id="447" r:id="rId6"/>
-    <p:sldId id="467" r:id="rId7"/>
-    <p:sldId id="468" r:id="rId8"/>
-    <p:sldId id="446" r:id="rId9"/>
-    <p:sldId id="448" r:id="rId10"/>
-    <p:sldId id="451" r:id="rId11"/>
-    <p:sldId id="452" r:id="rId12"/>
-    <p:sldId id="469" r:id="rId13"/>
-    <p:sldId id="456" r:id="rId14"/>
-    <p:sldId id="265" r:id="rId15"/>
+    <p:sldId id="471" r:id="rId3"/>
+    <p:sldId id="451" r:id="rId4"/>
+    <p:sldId id="448" r:id="rId5"/>
+    <p:sldId id="452" r:id="rId6"/>
+    <p:sldId id="472" r:id="rId7"/>
+    <p:sldId id="445" r:id="rId8"/>
+    <p:sldId id="470" r:id="rId9"/>
+    <p:sldId id="447" r:id="rId10"/>
+    <p:sldId id="467" r:id="rId11"/>
+    <p:sldId id="456" r:id="rId12"/>
+    <p:sldId id="265" r:id="rId13"/>
   </p:sldIdLst>
   <p:sldSz cx="12195175" cy="6858000"/>
   <p:notesSz cx="6858000" cy="9144000"/>
@@ -253,7 +251,7 @@
             <a:fld id="{47855BD9-AF71-426C-9B9B-B0E52B88852E}" type="slidenum">
               <a:rPr lang="de-DE" sz="1000" smtClean="0"/>
               <a:pPr algn="ctr"/>
-              <a:t>‹#›</a:t>
+              <a:t>‹Nr.›</a:t>
             </a:fld>
             <a:endParaRPr lang="de-DE" sz="1000" dirty="0"/>
           </a:p>
@@ -402,7 +400,7 @@
             <a:fld id="{7D8C2C35-2B8A-446E-BEC0-FD36716C29AC}" type="slidenum">
               <a:rPr lang="de-DE" smtClean="0"/>
               <a:pPr/>
-              <a:t>‹#›</a:t>
+              <a:t>‹Nr.›</a:t>
             </a:fld>
             <a:endParaRPr lang="de-DE" dirty="0"/>
           </a:p>
@@ -572,6 +570,64 @@
           <a:bodyPr/>
           <a:lstStyle/>
           <a:p>
+            <a:pPr marL="342900" indent="-342900">
+              <a:buFont typeface="Wingdings" panose="05000000000000000000" pitchFamily="2" charset="2"/>
+              <a:buChar char="§"/>
+            </a:pPr>
+            <a:r>
+              <a:rPr lang="en-US" dirty="0"/>
+              <a:t>Helm is the “apt-get” for Kubernetes</a:t>
+            </a:r>
+          </a:p>
+          <a:p>
+            <a:pPr marL="342900" indent="-342900">
+              <a:buFont typeface="Wingdings" panose="05000000000000000000" pitchFamily="2" charset="2"/>
+              <a:buChar char="§"/>
+            </a:pPr>
+            <a:r>
+              <a:rPr lang="en-US" dirty="0"/>
+              <a:t>Preconfigured &amp; parameterized packages of Kubernetes resources</a:t>
+            </a:r>
+          </a:p>
+          <a:p>
+            <a:pPr marL="342900" indent="-342900">
+              <a:buFont typeface="Wingdings" panose="05000000000000000000" pitchFamily="2" charset="2"/>
+              <a:buChar char="§"/>
+            </a:pPr>
+            <a:r>
+              <a:rPr lang="en-US" dirty="0"/>
+              <a:t>Designed to manage applications with several isolated components</a:t>
+            </a:r>
+          </a:p>
+          <a:p>
+            <a:pPr marL="342900" indent="-342900">
+              <a:buFont typeface="Wingdings" panose="05000000000000000000" pitchFamily="2" charset="2"/>
+              <a:buChar char="§"/>
+            </a:pPr>
+            <a:r>
+              <a:rPr lang="en-US" dirty="0"/>
+              <a:t>Supports “release management” with updates &amp; roll-backs</a:t>
+            </a:r>
+          </a:p>
+          <a:p>
+            <a:pPr marL="342900" indent="-342900">
+              <a:buFont typeface="Wingdings" panose="05000000000000000000" pitchFamily="2" charset="2"/>
+              <a:buChar char="§"/>
+            </a:pPr>
+            <a:r>
+              <a:rPr lang="en-US" dirty="0"/>
+              <a:t>Initially built by </a:t>
+            </a:r>
+            <a:r>
+              <a:rPr lang="en-US" dirty="0" err="1"/>
+              <a:t>Deis</a:t>
+            </a:r>
+            <a:r>
+              <a:rPr lang="en-US" dirty="0"/>
+              <a:t> (a Microsoft company), handed over to CNCF by now</a:t>
+            </a:r>
+          </a:p>
+          <a:p>
             <a:endParaRPr lang="en-US" dirty="0"/>
           </a:p>
         </p:txBody>
@@ -655,9 +711,284 @@
         <p:spPr/>
         <p:txBody>
           <a:bodyPr>
-            <a:normAutofit fontScale="92500" lnSpcReduction="20000"/>
+            <a:normAutofit fontScale="55000" lnSpcReduction="20000"/>
           </a:bodyPr>
           <a:lstStyle/>
+          <a:p>
+            <a:pPr marL="285750" lvl="0" indent="-285750">
+              <a:buFontTx/>
+              <a:buChar char="-"/>
+            </a:pPr>
+            <a:r>
+              <a:rPr lang="en-US" dirty="0"/>
+              <a:t>Start with showing the helm binary – simply run “helm” without anything else</a:t>
+            </a:r>
+          </a:p>
+          <a:p>
+            <a:pPr marL="285750" lvl="0" indent="-285750">
+              <a:buFontTx/>
+              <a:buChar char="-"/>
+            </a:pPr>
+            <a:r>
+              <a:rPr lang="en-US" dirty="0"/>
+              <a:t>If not yet done, run a “helm </a:t>
+            </a:r>
+            <a:r>
+              <a:rPr lang="en-US" dirty="0" err="1"/>
+              <a:t>init</a:t>
+            </a:r>
+            <a:r>
+              <a:rPr lang="en-US" dirty="0"/>
+              <a:t>” to deploy tiller. But probably there is already a tiller from the time when you created the registry.</a:t>
+            </a:r>
+          </a:p>
+          <a:p>
+            <a:pPr marL="285750" lvl="0" indent="-285750">
+              <a:buFontTx/>
+              <a:buChar char="-"/>
+            </a:pPr>
+            <a:r>
+              <a:rPr lang="en-US" dirty="0"/>
+              <a:t>Show the tiller pod in </a:t>
+            </a:r>
+            <a:r>
+              <a:rPr lang="en-US" dirty="0" err="1"/>
+              <a:t>kube</a:t>
+            </a:r>
+            <a:r>
+              <a:rPr lang="en-US" dirty="0"/>
+              <a:t>-system namespace. Explain, that for helm </a:t>
+            </a:r>
+            <a:r>
+              <a:rPr lang="en-US" dirty="0" err="1"/>
+              <a:t>init</a:t>
+            </a:r>
+            <a:r>
+              <a:rPr lang="en-US" dirty="0"/>
+              <a:t>, participants should target their own namespace. Otherwise they will connect to the same tiller. Highlight that in order to setup tiller with cluster access (i.e. outside of it’s namespace a </a:t>
+            </a:r>
+            <a:r>
+              <a:rPr lang="en-US" dirty="0" err="1"/>
+              <a:t>clusterrolebinding</a:t>
+            </a:r>
+            <a:r>
+              <a:rPr lang="en-US" dirty="0"/>
+              <a:t> is required)</a:t>
+            </a:r>
+          </a:p>
+          <a:p>
+            <a:pPr marL="285750" lvl="0" indent="-285750">
+              <a:buFontTx/>
+              <a:buChar char="-"/>
+            </a:pPr>
+            <a:r>
+              <a:rPr lang="en-US" dirty="0"/>
+              <a:t>Run “helm list” to show the already installed charts and explain that they are called a “release”.</a:t>
+            </a:r>
+          </a:p>
+          <a:p>
+            <a:pPr marL="0" lvl="0" indent="0">
+              <a:buFontTx/>
+              <a:buNone/>
+            </a:pPr>
+            <a:endParaRPr lang="en-US" dirty="0"/>
+          </a:p>
+          <a:p>
+            <a:pPr marL="0" lvl="0" indent="0">
+              <a:buFontTx/>
+              <a:buNone/>
+            </a:pPr>
+            <a:r>
+              <a:rPr lang="en-US" dirty="0"/>
+              <a:t>Next move on to the question, wherefrom to get charts:</a:t>
+            </a:r>
+          </a:p>
+          <a:p>
+            <a:pPr marL="285750" lvl="0" indent="-285750">
+              <a:buFontTx/>
+              <a:buChar char="-"/>
+            </a:pPr>
+            <a:r>
+              <a:rPr lang="en-US" dirty="0"/>
+              <a:t>Open https://github.com/helm/charts in a browser</a:t>
+            </a:r>
+          </a:p>
+          <a:p>
+            <a:pPr marL="285750" lvl="0" indent="-285750">
+              <a:buFontTx/>
+              <a:buChar char="-"/>
+            </a:pPr>
+            <a:r>
+              <a:rPr lang="en-US" dirty="0"/>
+              <a:t>Talk about the different “levels” – currently incubator, test &amp; stable and go to stable</a:t>
+            </a:r>
+          </a:p>
+          <a:p>
+            <a:pPr marL="285750" lvl="0" indent="-285750">
+              <a:buFontTx/>
+              <a:buChar char="-"/>
+            </a:pPr>
+            <a:r>
+              <a:rPr lang="en-US" dirty="0"/>
+              <a:t>Pick up any chart (e.g. mongo </a:t>
+            </a:r>
+            <a:r>
+              <a:rPr lang="en-US" dirty="0" err="1"/>
+              <a:t>db</a:t>
+            </a:r>
+            <a:r>
+              <a:rPr lang="en-US" dirty="0"/>
+              <a:t> or </a:t>
+            </a:r>
+            <a:r>
+              <a:rPr lang="en-US" dirty="0" err="1"/>
+              <a:t>wordpress</a:t>
+            </a:r>
+            <a:r>
+              <a:rPr lang="en-US" dirty="0"/>
+              <a:t>) and go into details.</a:t>
+            </a:r>
+          </a:p>
+          <a:p>
+            <a:pPr marL="285750" lvl="0" indent="-285750">
+              <a:buFontTx/>
+              <a:buChar char="-"/>
+            </a:pPr>
+            <a:r>
+              <a:rPr lang="en-US" dirty="0"/>
+              <a:t>Discuss the info on the readme page, especially the “installing the chart” and “configuration”</a:t>
+            </a:r>
+          </a:p>
+          <a:p>
+            <a:pPr marL="285750" lvl="0" indent="-285750">
+              <a:buFontTx/>
+              <a:buChar char="-"/>
+            </a:pPr>
+            <a:r>
+              <a:rPr lang="en-US" dirty="0"/>
+              <a:t>Highlight that any parameter in configuration has a default value or is not set. </a:t>
+            </a:r>
+          </a:p>
+          <a:p>
+            <a:pPr marL="285750" lvl="0" indent="-285750">
+              <a:buFontTx/>
+              <a:buChar char="-"/>
+            </a:pPr>
+            <a:r>
+              <a:rPr lang="en-US" dirty="0"/>
+              <a:t>Highlight that any parameter in configuration can be overwritten / customized either by using “--set key=value” or a </a:t>
+            </a:r>
+            <a:r>
+              <a:rPr lang="en-US" dirty="0" err="1"/>
+              <a:t>values.yaml</a:t>
+            </a:r>
+            <a:r>
+              <a:rPr lang="en-US" dirty="0"/>
+              <a:t> file.</a:t>
+            </a:r>
+          </a:p>
+          <a:p>
+            <a:pPr marL="285750" lvl="0" indent="-285750">
+              <a:buFontTx/>
+              <a:buChar char="-"/>
+            </a:pPr>
+            <a:r>
+              <a:rPr lang="en-US" dirty="0"/>
+              <a:t>The default values can be found in the repo in a </a:t>
+            </a:r>
+            <a:r>
+              <a:rPr lang="en-US" dirty="0" err="1"/>
+              <a:t>values.yaml</a:t>
+            </a:r>
+            <a:r>
+              <a:rPr lang="en-US" dirty="0"/>
+              <a:t> file too.</a:t>
+            </a:r>
+          </a:p>
+          <a:p>
+            <a:pPr marL="285750" lvl="0" indent="-285750">
+              <a:buFontTx/>
+              <a:buChar char="-"/>
+            </a:pPr>
+            <a:r>
+              <a:rPr lang="en-US" dirty="0"/>
+              <a:t>Go to the templates and take a look at one of the </a:t>
+            </a:r>
+            <a:r>
+              <a:rPr lang="en-US" dirty="0" err="1"/>
+              <a:t>yaml</a:t>
+            </a:r>
+            <a:r>
+              <a:rPr lang="en-US" dirty="0"/>
+              <a:t> files. Explain that helm uses a go-based engine to render the charts upon deployment </a:t>
+            </a:r>
+            <a:r>
+              <a:rPr lang="en-US" dirty="0">
+                <a:sym typeface="Wingdings" panose="05000000000000000000" pitchFamily="2" charset="2"/>
+              </a:rPr>
+              <a:t> substituting variables with specific values.</a:t>
+            </a:r>
+          </a:p>
+          <a:p>
+            <a:pPr marL="0" lvl="0" indent="0">
+              <a:buFontTx/>
+              <a:buNone/>
+            </a:pPr>
+            <a:endParaRPr lang="en-US" dirty="0">
+              <a:sym typeface="Wingdings" panose="05000000000000000000" pitchFamily="2" charset="2"/>
+            </a:endParaRPr>
+          </a:p>
+          <a:p>
+            <a:pPr marL="0" lvl="0" indent="0">
+              <a:buFontTx/>
+              <a:buNone/>
+            </a:pPr>
+            <a:r>
+              <a:rPr lang="en-US" dirty="0">
+                <a:sym typeface="Wingdings" panose="05000000000000000000" pitchFamily="2" charset="2"/>
+              </a:rPr>
+              <a:t>Finally run a helm install for the chart you choose and show the created object / run some of the commands printed out.</a:t>
+            </a:r>
+          </a:p>
+          <a:p>
+            <a:pPr marL="0" lvl="0" indent="0">
+              <a:buFontTx/>
+              <a:buNone/>
+            </a:pPr>
+            <a:endParaRPr lang="en-US" dirty="0">
+              <a:sym typeface="Wingdings" panose="05000000000000000000" pitchFamily="2" charset="2"/>
+            </a:endParaRPr>
+          </a:p>
+          <a:p>
+            <a:pPr marL="0" lvl="0" indent="0">
+              <a:buFontTx/>
+              <a:buNone/>
+            </a:pPr>
+            <a:r>
+              <a:rPr lang="en-US" dirty="0">
+                <a:sym typeface="Wingdings" panose="05000000000000000000" pitchFamily="2" charset="2"/>
+              </a:rPr>
+              <a:t>You can also talk about the --debug (verbosity) &amp; --dry-un (simulation mode) commands for helm actions like install. </a:t>
+            </a:r>
+          </a:p>
+          <a:p>
+            <a:pPr marL="0" lvl="0" indent="0">
+              <a:buFontTx/>
+              <a:buNone/>
+            </a:pPr>
+            <a:endParaRPr lang="en-US" dirty="0">
+              <a:sym typeface="Wingdings" panose="05000000000000000000" pitchFamily="2" charset="2"/>
+            </a:endParaRPr>
+          </a:p>
+          <a:p>
+            <a:pPr marL="0" lvl="0" indent="0">
+              <a:buFontTx/>
+              <a:buNone/>
+            </a:pPr>
+            <a:endParaRPr lang="en-US" dirty="0">
+              <a:sym typeface="Wingdings" panose="05000000000000000000" pitchFamily="2" charset="2"/>
+            </a:endParaRPr>
+          </a:p>
           <a:p>
             <a:pPr marL="342900" indent="-342900">
               <a:buFontTx/>
@@ -722,7 +1053,15 @@
             </a:pPr>
             <a:r>
               <a:rPr lang="en-US" sz="1600" dirty="0"/>
-              <a:t>Show NOTES.txt -&gt; it contains the lines to print after a successful deployment</a:t>
+              <a:t>Show </a:t>
+            </a:r>
+            <a:r>
+              <a:rPr lang="en-US" sz="1600" dirty="0" err="1"/>
+              <a:t>NOTES.txt</a:t>
+            </a:r>
+            <a:r>
+              <a:rPr lang="en-US" sz="1600" dirty="0"/>
+              <a:t> -&gt; it contains the lines to print after a successful deployment</a:t>
             </a:r>
           </a:p>
           <a:p>
@@ -850,6 +1189,13 @@
               <a:rPr lang="en-US" b="1" dirty="0"/>
               <a:t>“.” is referencing a relative path to your chart – don’t truncate it!</a:t>
             </a:r>
+          </a:p>
+          <a:p>
+            <a:pPr marL="0" lvl="0" indent="0">
+              <a:buFontTx/>
+              <a:buNone/>
+            </a:pPr>
+            <a:endParaRPr lang="en-US" dirty="0"/>
           </a:p>
           <a:p>
             <a:pPr marL="0" lvl="0" indent="0">
@@ -878,7 +1224,7 @@
             <a:fld id="{7D8C2C35-2B8A-446E-BEC0-FD36716C29AC}" type="slidenum">
               <a:rPr lang="de-DE" smtClean="0"/>
               <a:pPr/>
-              <a:t>12</a:t>
+              <a:t>10</a:t>
             </a:fld>
             <a:endParaRPr lang="de-DE" dirty="0"/>
           </a:p>
@@ -887,7 +1233,7 @@
     </p:spTree>
     <p:extLst>
       <p:ext uri="{BB962C8B-B14F-4D97-AF65-F5344CB8AC3E}">
-        <p14:creationId xmlns:p14="http://schemas.microsoft.com/office/powerpoint/2010/main" val="944111672"/>
+        <p14:creationId xmlns:p14="http://schemas.microsoft.com/office/powerpoint/2010/main" val="4049153715"/>
       </p:ext>
     </p:extLst>
   </p:cSld>
@@ -963,7 +1309,7 @@
             <a:fld id="{7D8C2C35-2B8A-446E-BEC0-FD36716C29AC}" type="slidenum">
               <a:rPr lang="de-DE" smtClean="0"/>
               <a:pPr/>
-              <a:t>13</a:t>
+              <a:t>11</a:t>
             </a:fld>
             <a:endParaRPr lang="de-DE" dirty="0"/>
           </a:p>
@@ -1017,7 +1363,7 @@
             <a:fld id="{7D8C2C35-2B8A-446E-BEC0-FD36716C29AC}" type="slidenum">
               <a:rPr lang="en-US" smtClean="0"/>
               <a:pPr/>
-              <a:t>14</a:t>
+              <a:t>12</a:t>
             </a:fld>
             <a:endParaRPr lang="en-US" dirty="0"/>
           </a:p>
@@ -1093,7 +1439,7 @@
       </p:grpSpPr>
       <p:sp>
         <p:nvSpPr>
-          <p:cNvPr id="2" name="Slide Image Placeholder 1"/>
+          <p:cNvPr id="2" name="Folienbildplatzhalter 1"/>
           <p:cNvSpPr>
             <a:spLocks noGrp="1" noRot="1" noChangeAspect="1"/>
           </p:cNvSpPr>
@@ -1105,7 +1451,7 @@
       </p:sp>
       <p:sp>
         <p:nvSpPr>
-          <p:cNvPr id="3" name="Notes Placeholder 2"/>
+          <p:cNvPr id="3" name="Notizenplatzhalter 2"/>
           <p:cNvSpPr>
             <a:spLocks noGrp="1"/>
           </p:cNvSpPr>
@@ -1118,18 +1464,36 @@
           <a:bodyPr/>
           <a:lstStyle/>
           <a:p>
-            <a:endParaRPr lang="en-US" dirty="0"/>
+            <a:r>
+              <a:rPr lang="en-US" noProof="0" dirty="0"/>
+              <a:t>Helm Charts consist of templates of Kubernetes resources which can be transformed into valid, specific resources using parameters and a powerful template engine.</a:t>
+            </a:r>
+          </a:p>
+          <a:p>
+            <a:r>
+              <a:rPr lang="en-US" noProof="0" dirty="0"/>
+              <a:t>The template engine allows to program small helper functions and execute logical checks. Internally, it uses the go-template package + sprig library.</a:t>
+            </a:r>
+          </a:p>
+          <a:p>
+            <a:endParaRPr lang="en-US" noProof="0" dirty="0"/>
+          </a:p>
+          <a:p>
+            <a:r>
+              <a:rPr lang="en-US" noProof="0" dirty="0"/>
+              <a:t>Charts can be nested and thus have dependencies to other charts. In other terms, you can aggregate multiple charts into bundles or simply satisfy the need for a database in you application.</a:t>
+            </a:r>
           </a:p>
         </p:txBody>
       </p:sp>
       <p:sp>
         <p:nvSpPr>
-          <p:cNvPr id="4" name="Slide Number Placeholder 3"/>
+          <p:cNvPr id="4" name="Foliennummernplatzhalter 3"/>
           <p:cNvSpPr>
             <a:spLocks noGrp="1"/>
           </p:cNvSpPr>
           <p:nvPr>
-            <p:ph type="sldNum" sz="quarter" idx="10"/>
+            <p:ph type="sldNum" sz="quarter" idx="5"/>
           </p:nvPr>
         </p:nvSpPr>
         <p:spPr/>
@@ -1138,18 +1502,18 @@
           <a:lstStyle/>
           <a:p>
             <a:fld id="{7D8C2C35-2B8A-446E-BEC0-FD36716C29AC}" type="slidenum">
-              <a:rPr lang="en-US" smtClean="0"/>
+              <a:rPr lang="de-DE" smtClean="0"/>
               <a:pPr/>
               <a:t>2</a:t>
             </a:fld>
-            <a:endParaRPr lang="en-US" dirty="0"/>
+            <a:endParaRPr lang="de-DE" dirty="0"/>
           </a:p>
         </p:txBody>
       </p:sp>
     </p:spTree>
     <p:extLst>
       <p:ext uri="{BB962C8B-B14F-4D97-AF65-F5344CB8AC3E}">
-        <p14:creationId xmlns:p14="http://schemas.microsoft.com/office/powerpoint/2010/main" val="561089298"/>
+        <p14:creationId xmlns:p14="http://schemas.microsoft.com/office/powerpoint/2010/main" val="2382106698"/>
       </p:ext>
     </p:extLst>
   </p:cSld>
@@ -1205,24 +1569,21 @@
           <a:p>
             <a:r>
               <a:rPr lang="en-US" dirty="0"/>
-              <a:t>Helm v3 has only component – the locally running “helm” client. It uses the active available </a:t>
+              <a:t>Default parameters of a helm chart are stored in a file called </a:t>
             </a:r>
             <a:r>
               <a:rPr lang="en-US" dirty="0" err="1"/>
-              <a:t>kube.config</a:t>
+              <a:t>values.yaml</a:t>
             </a:r>
             <a:r>
               <a:rPr lang="en-US" dirty="0"/>
-              <a:t> context to talk to K8s. No separate setup steps are needed.</a:t>
-            </a:r>
-          </a:p>
-          <a:p>
-            <a:endParaRPr lang="en-US" dirty="0"/>
+              <a:t>.</a:t>
+            </a:r>
           </a:p>
           <a:p>
             <a:r>
               <a:rPr lang="en-US" dirty="0"/>
-              <a:t>To use helm, you need the pre-packaged software in so called charts. A chart is a description of how to deploy &amp; parameterize an application. This includes </a:t>
+              <a:t>The values file is organized in the typical </a:t>
             </a:r>
             <a:r>
               <a:rPr lang="en-US" dirty="0" err="1"/>
@@ -1230,85 +1591,25 @@
             </a:r>
             <a:r>
               <a:rPr lang="en-US" dirty="0"/>
-              <a:t> templates for pods, services or </a:t>
+              <a:t> structure and you can have key-value pairs, maps, arrays or a combination of all of these ;)</a:t>
+            </a:r>
+          </a:p>
+          <a:p>
+            <a:endParaRPr lang="en-US" dirty="0"/>
+          </a:p>
+          <a:p>
+            <a:r>
+              <a:rPr lang="en-US" dirty="0"/>
+              <a:t>Within the template engine, you can access these “variables” via the values object. Helm know more objects, like Release. Check the </a:t>
             </a:r>
             <a:r>
               <a:rPr lang="en-US" dirty="0" err="1"/>
-              <a:t>configMaps</a:t>
+              <a:t>docu</a:t>
             </a:r>
             <a:r>
               <a:rPr lang="en-US" dirty="0"/>
-              <a:t>.</a:t>
-            </a:r>
-          </a:p>
-          <a:p>
-            <a:r>
-              <a:rPr lang="en-US" dirty="0"/>
-              <a:t>Upon installation of the chart, there is a go-templating engine evaluating the given parameters and substituting variables.</a:t>
-            </a:r>
-          </a:p>
-          <a:p>
-            <a:endParaRPr lang="en-US" dirty="0"/>
-          </a:p>
-          <a:p>
-            <a:pPr marL="0" marR="0" lvl="0" indent="0" algn="l" defTabSz="1088776" rtl="0" eaLnBrk="1" fontAlgn="auto" latinLnBrk="0" hangingPunct="1">
-              <a:lnSpc>
-                <a:spcPct val="100000"/>
-              </a:lnSpc>
-              <a:spcBef>
-                <a:spcPts val="0"/>
-              </a:spcBef>
-              <a:spcAft>
-                <a:spcPts val="0"/>
-              </a:spcAft>
-              <a:buClrTx/>
-              <a:buSzTx/>
-              <a:buFontTx/>
-              <a:buNone/>
-              <a:tabLst/>
-              <a:defRPr/>
-            </a:pPr>
-            <a:r>
-              <a:rPr lang="en-US" dirty="0"/>
-              <a:t>In v2, there were two components - the locally running client and the tiller-server. It was required to run “helm </a:t>
-            </a:r>
-            <a:r>
-              <a:rPr lang="en-US" dirty="0" err="1"/>
-              <a:t>init</a:t>
-            </a:r>
-            <a:r>
-              <a:rPr lang="en-US" dirty="0"/>
-              <a:t>”, to deploy tiller to the cluster. There was also the idea of a global/cluster-wide service to manage all charts installed to a cluster. This idea has been abandoned and helm v3 is a “client-only” tool.</a:t>
-            </a:r>
-          </a:p>
-          <a:p>
-            <a:pPr marL="0" marR="0" lvl="0" indent="0" algn="l" defTabSz="1088776" rtl="0" eaLnBrk="1" fontAlgn="auto" latinLnBrk="0" hangingPunct="1">
-              <a:lnSpc>
-                <a:spcPct val="100000"/>
-              </a:lnSpc>
-              <a:spcBef>
-                <a:spcPts val="0"/>
-              </a:spcBef>
-              <a:spcAft>
-                <a:spcPts val="0"/>
-              </a:spcAft>
-              <a:buClrTx/>
-              <a:buSzTx/>
-              <a:buFontTx/>
-              <a:buNone/>
-              <a:tabLst/>
-              <a:defRPr/>
-            </a:pPr>
-            <a:r>
-              <a:rPr lang="en-US" dirty="0"/>
-              <a:t>When using helm v2, be careful with namespaces and specify where your tiller-server should run.</a:t>
-            </a:r>
-          </a:p>
-          <a:p>
-            <a:endParaRPr lang="en-US" dirty="0"/>
-          </a:p>
-          <a:p>
-            <a:endParaRPr lang="en-US" dirty="0"/>
+              <a:t> for details.</a:t>
+            </a:r>
           </a:p>
         </p:txBody>
       </p:sp>
@@ -1328,18 +1629,18 @@
           <a:lstStyle/>
           <a:p>
             <a:fld id="{7D8C2C35-2B8A-446E-BEC0-FD36716C29AC}" type="slidenum">
-              <a:rPr lang="en-US" smtClean="0"/>
+              <a:rPr lang="de-DE" smtClean="0"/>
               <a:pPr/>
               <a:t>3</a:t>
             </a:fld>
-            <a:endParaRPr lang="en-US" dirty="0"/>
+            <a:endParaRPr lang="de-DE" dirty="0"/>
           </a:p>
         </p:txBody>
       </p:sp>
     </p:spTree>
     <p:extLst>
       <p:ext uri="{BB962C8B-B14F-4D97-AF65-F5344CB8AC3E}">
-        <p14:creationId xmlns:p14="http://schemas.microsoft.com/office/powerpoint/2010/main" val="1771773811"/>
+        <p14:creationId xmlns:p14="http://schemas.microsoft.com/office/powerpoint/2010/main" val="1124543534"/>
       </p:ext>
     </p:extLst>
   </p:cSld>
@@ -1390,48 +1691,10 @@
         </p:nvSpPr>
         <p:spPr/>
         <p:txBody>
-          <a:bodyPr/>
+          <a:bodyPr>
+            <a:normAutofit lnSpcReduction="10000"/>
+          </a:bodyPr>
           <a:lstStyle/>
-          <a:p>
-            <a:r>
-              <a:rPr lang="en-US" dirty="0"/>
-              <a:t>Helm v3 has only component – the locally running “helm” client. </a:t>
-            </a:r>
-          </a:p>
-          <a:p>
-            <a:endParaRPr lang="en-US" dirty="0"/>
-          </a:p>
-          <a:p>
-            <a:r>
-              <a:rPr lang="en-US" dirty="0"/>
-              <a:t>To use helm, you need the pre-packaged software in so called charts. A chart is a description of how to deploy &amp; parameterize an application. This includes </a:t>
-            </a:r>
-            <a:r>
-              <a:rPr lang="en-US" dirty="0" err="1"/>
-              <a:t>yaml</a:t>
-            </a:r>
-            <a:r>
-              <a:rPr lang="en-US" dirty="0"/>
-              <a:t> templates for pods, services or </a:t>
-            </a:r>
-            <a:r>
-              <a:rPr lang="en-US" dirty="0" err="1"/>
-              <a:t>configMaps</a:t>
-            </a:r>
-            <a:r>
-              <a:rPr lang="en-US" dirty="0"/>
-              <a:t>.</a:t>
-            </a:r>
-          </a:p>
-          <a:p>
-            <a:r>
-              <a:rPr lang="en-US" dirty="0"/>
-              <a:t>Upon installation of the chart, there is a go-templating engine evaluating the given parameters and substituting variables.</a:t>
-            </a:r>
-          </a:p>
-          <a:p>
-            <a:endParaRPr lang="en-US" dirty="0"/>
-          </a:p>
           <a:p>
             <a:pPr marL="0" marR="0" lvl="0" indent="0" algn="l" defTabSz="1088776" rtl="0" eaLnBrk="1" fontAlgn="auto" latinLnBrk="0" hangingPunct="1">
               <a:lnSpc>
@@ -1452,45 +1715,101 @@
             </a:pPr>
             <a:r>
               <a:rPr lang="en-US" dirty="0"/>
-              <a:t>In v2, there were two components - the locally running client and the tiller-server. It was required to run “helm </a:t>
+              <a:t>The power of helm lies within its templates and the ability to convert templates with values into valid </a:t>
             </a:r>
             <a:r>
               <a:rPr lang="en-US" dirty="0" err="1"/>
-              <a:t>init</a:t>
+              <a:t>yaml</a:t>
             </a:r>
             <a:r>
               <a:rPr lang="en-US" dirty="0"/>
-              <a:t>”, to deploy tiller to the cluster. There was also the idea of a global/cluster-wide service to manage all charts installed to a cluster. This idea has been abandoned and helm v3 is a “client-only” tool.</a:t>
-            </a:r>
-          </a:p>
-          <a:p>
-            <a:pPr marL="0" marR="0" lvl="0" indent="0" algn="l" defTabSz="1088776" rtl="0" eaLnBrk="1" fontAlgn="auto" latinLnBrk="0" hangingPunct="1">
-              <a:lnSpc>
-                <a:spcPct val="100000"/>
-              </a:lnSpc>
-              <a:spcBef>
-                <a:spcPts val="0"/>
-              </a:spcBef>
-              <a:spcAft>
-                <a:spcPts val="0"/>
-              </a:spcAft>
-              <a:buClrTx/>
-              <a:buSzTx/>
-              <a:buFontTx/>
-              <a:buNone/>
-              <a:tabLst/>
-              <a:defRPr/>
-            </a:pPr>
+              <a:t> files. When authoring charts this is where most of your work will end up.</a:t>
+            </a:r>
+          </a:p>
+          <a:p>
+            <a:endParaRPr lang="en-US" dirty="0"/>
+          </a:p>
+          <a:p>
             <a:r>
               <a:rPr lang="en-US" dirty="0"/>
-              <a:t>When using helm v2, be careful with namespaces and specify where your tiller-server should run.</a:t>
+              <a:t>So lets take a look at the template section of a chart. In our example there are 2 config map </a:t>
+            </a:r>
+            <a:r>
+              <a:rPr lang="en-US" dirty="0" err="1"/>
+              <a:t>yaml</a:t>
+            </a:r>
+            <a:r>
+              <a:rPr lang="en-US" dirty="0"/>
+              <a:t> files. One is pretty normal and works also without helm. However it is not very flexible. The 2</a:t>
+            </a:r>
+            <a:r>
+              <a:rPr lang="en-US" baseline="30000" dirty="0"/>
+              <a:t>nd</a:t>
+            </a:r>
+            <a:r>
+              <a:rPr lang="en-US" dirty="0"/>
+              <a:t> file contains references to helm variables – indicated by {{ }}. Helm renders the templates and converts them into valid </a:t>
+            </a:r>
+            <a:r>
+              <a:rPr lang="en-US" dirty="0" err="1"/>
+              <a:t>yaml</a:t>
+            </a:r>
+            <a:r>
+              <a:rPr lang="en-US" dirty="0"/>
+              <a:t>.</a:t>
             </a:r>
           </a:p>
           <a:p>
             <a:endParaRPr lang="en-US" dirty="0"/>
           </a:p>
           <a:p>
+            <a:r>
+              <a:rPr lang="en-US" dirty="0"/>
+              <a:t>There are build in variables .Release.* and custom values .Values.* . Additionally you can define functions and include / execute them. The definitions are stored in the _</a:t>
+            </a:r>
+            <a:r>
+              <a:rPr lang="en-US" dirty="0" err="1"/>
+              <a:t>helpers.tpl</a:t>
+            </a:r>
+            <a:r>
+              <a:rPr lang="en-US" dirty="0"/>
+              <a:t>. The demo-chart makes use of these, so take a look around there.</a:t>
+            </a:r>
+          </a:p>
+          <a:p>
             <a:endParaRPr lang="en-US" dirty="0"/>
+          </a:p>
+          <a:p>
+            <a:r>
+              <a:rPr lang="en-US" dirty="0"/>
+              <a:t>To check, if the chart is ok, use “helm lint”. It will point out </a:t>
+            </a:r>
+            <a:r>
+              <a:rPr lang="en-US" dirty="0" err="1"/>
+              <a:t>yaml</a:t>
+            </a:r>
+            <a:r>
+              <a:rPr lang="en-US" dirty="0"/>
+              <a:t> errors and much more.</a:t>
+            </a:r>
+          </a:p>
+          <a:p>
+            <a:r>
+              <a:rPr lang="en-US" dirty="0"/>
+              <a:t>To check, how a chart would actually look like once deployed, use the --dry-run flag in combination with --debug</a:t>
+            </a:r>
+          </a:p>
+          <a:p>
+            <a:endParaRPr lang="en-US" dirty="0"/>
+          </a:p>
+          <a:p>
+            <a:endParaRPr lang="en-US" dirty="0"/>
+          </a:p>
+          <a:p>
+            <a:r>
+              <a:rPr lang="en-US" dirty="0"/>
+              <a:t>For details, check https://github.com/kubernetes/helm/tree/master/docs</a:t>
+            </a:r>
           </a:p>
         </p:txBody>
       </p:sp>
@@ -1510,18 +1829,18 @@
           <a:lstStyle/>
           <a:p>
             <a:fld id="{7D8C2C35-2B8A-446E-BEC0-FD36716C29AC}" type="slidenum">
-              <a:rPr lang="en-US" smtClean="0"/>
+              <a:rPr lang="de-DE" smtClean="0"/>
               <a:pPr/>
               <a:t>4</a:t>
             </a:fld>
-            <a:endParaRPr lang="en-US" dirty="0"/>
+            <a:endParaRPr lang="de-DE" dirty="0"/>
           </a:p>
         </p:txBody>
       </p:sp>
     </p:spTree>
     <p:extLst>
       <p:ext uri="{BB962C8B-B14F-4D97-AF65-F5344CB8AC3E}">
-        <p14:creationId xmlns:p14="http://schemas.microsoft.com/office/powerpoint/2010/main" val="3681972960"/>
+        <p14:creationId xmlns:p14="http://schemas.microsoft.com/office/powerpoint/2010/main" val="1430307665"/>
       </p:ext>
     </p:extLst>
   </p:cSld>
@@ -1577,753 +1896,95 @@
           <a:p>
             <a:r>
               <a:rPr lang="en-US" dirty="0"/>
-              <a:t>Helm charts can be stored locally or in a repository. The default “stable” repo available in helm v2 has to be added manually with helm v3 (as of now).</a:t>
-            </a:r>
-          </a:p>
-          <a:p>
-            <a:pPr marL="0" marR="0" lvl="0" indent="0" algn="l" defTabSz="1088776" rtl="0" eaLnBrk="1" fontAlgn="auto" latinLnBrk="0" hangingPunct="1">
-              <a:lnSpc>
-                <a:spcPct val="100000"/>
-              </a:lnSpc>
-              <a:spcBef>
-                <a:spcPts val="0"/>
-              </a:spcBef>
-              <a:spcAft>
-                <a:spcPts val="0"/>
-              </a:spcAft>
-              <a:buClrTx/>
-              <a:buSzTx/>
-              <a:buFontTx/>
-              <a:buNone/>
-              <a:tabLst/>
-              <a:defRPr/>
-            </a:pPr>
+              <a:t>{{ }} triggers the go templating engine</a:t>
+            </a:r>
+          </a:p>
+          <a:p>
             <a:r>
               <a:rPr lang="en-US" dirty="0"/>
-              <a:t>Run “helm </a:t>
-            </a:r>
-            <a:r>
-              <a:rPr lang="de-DE" sz="1400" b="0" kern="1200" dirty="0" err="1">
-                <a:solidFill>
-                  <a:schemeClr val="tx1"/>
-                </a:solidFill>
-                <a:effectLst/>
-                <a:latin typeface="+mn-lt"/>
-                <a:ea typeface="+mn-ea"/>
-                <a:cs typeface="+mn-cs"/>
-              </a:rPr>
-              <a:t>repo</a:t>
-            </a:r>
-            <a:r>
-              <a:rPr lang="de-DE" sz="1400" b="0" kern="1200" dirty="0">
-                <a:solidFill>
-                  <a:schemeClr val="tx1"/>
-                </a:solidFill>
-                <a:effectLst/>
-                <a:latin typeface="+mn-lt"/>
-                <a:ea typeface="+mn-ea"/>
-                <a:cs typeface="+mn-cs"/>
-              </a:rPr>
-              <a:t> </a:t>
-            </a:r>
-            <a:r>
-              <a:rPr lang="de-DE" sz="1400" b="0" kern="1200" dirty="0" err="1">
-                <a:solidFill>
-                  <a:schemeClr val="tx1"/>
-                </a:solidFill>
-                <a:effectLst/>
-                <a:latin typeface="+mn-lt"/>
-                <a:ea typeface="+mn-ea"/>
-                <a:cs typeface="+mn-cs"/>
-              </a:rPr>
-              <a:t>add</a:t>
-            </a:r>
-            <a:r>
-              <a:rPr lang="de-DE" sz="1400" b="0" kern="1200" dirty="0">
-                <a:solidFill>
-                  <a:schemeClr val="tx1"/>
-                </a:solidFill>
-                <a:effectLst/>
-                <a:latin typeface="+mn-lt"/>
-                <a:ea typeface="+mn-ea"/>
-                <a:cs typeface="+mn-cs"/>
-              </a:rPr>
-              <a:t> </a:t>
-            </a:r>
-            <a:r>
-              <a:rPr lang="de-DE" sz="1400" b="0" kern="1200" dirty="0" err="1">
-                <a:solidFill>
-                  <a:schemeClr val="tx1"/>
-                </a:solidFill>
-                <a:effectLst/>
-                <a:latin typeface="+mn-lt"/>
-                <a:ea typeface="+mn-ea"/>
-                <a:cs typeface="+mn-cs"/>
-              </a:rPr>
-              <a:t>stable</a:t>
-            </a:r>
-            <a:r>
-              <a:rPr lang="de-DE" sz="1400" b="0" kern="1200" dirty="0">
-                <a:solidFill>
-                  <a:schemeClr val="tx1"/>
-                </a:solidFill>
-                <a:effectLst/>
-                <a:latin typeface="+mn-lt"/>
-                <a:ea typeface="+mn-ea"/>
-                <a:cs typeface="+mn-cs"/>
-              </a:rPr>
-              <a:t> https://kubernetes-charts.storage.googleapis.com/“ </a:t>
-            </a:r>
-            <a:r>
-              <a:rPr lang="de-DE" sz="1400" b="0" kern="1200" dirty="0" err="1">
-                <a:solidFill>
-                  <a:schemeClr val="tx1"/>
-                </a:solidFill>
-                <a:effectLst/>
-                <a:latin typeface="+mn-lt"/>
-                <a:ea typeface="+mn-ea"/>
-                <a:cs typeface="+mn-cs"/>
-              </a:rPr>
+              <a:t>.Values is a reference to an object with all keys in the </a:t>
+            </a:r>
+            <a:r>
+              <a:rPr lang="en-US" dirty="0" err="1"/>
+              <a:t>values.yaml</a:t>
+            </a:r>
+            <a:r>
+              <a:rPr lang="en-US" dirty="0"/>
+              <a:t> file</a:t>
+            </a:r>
+          </a:p>
+          <a:p>
+            <a:r>
+              <a:rPr lang="en-US" dirty="0"/>
+              <a:t>.</a:t>
+            </a:r>
+            <a:r>
+              <a:rPr lang="en-US" dirty="0" err="1"/>
+              <a:t>myMessage</a:t>
+            </a:r>
+            <a:r>
+              <a:rPr lang="en-US" dirty="0"/>
+              <a:t> is the reference to the key “</a:t>
+            </a:r>
+            <a:r>
+              <a:rPr lang="en-US" dirty="0" err="1"/>
+              <a:t>myMessage</a:t>
+            </a:r>
+            <a:r>
+              <a:rPr lang="en-US" dirty="0"/>
+              <a:t>” in .Values</a:t>
+            </a:r>
+          </a:p>
+          <a:p>
+            <a:endParaRPr lang="en-US" dirty="0"/>
+          </a:p>
+          <a:p>
+            <a:r>
+              <a:rPr lang="en-US" dirty="0"/>
+              <a:t>In case of nested values such as example below, use .</a:t>
+            </a:r>
+            <a:r>
+              <a:rPr lang="en-US" dirty="0" err="1"/>
+              <a:t>Values.message.greeting</a:t>
+            </a:r>
+            <a:r>
+              <a:rPr lang="en-US" dirty="0"/>
+              <a:t> or .to </a:t>
+            </a:r>
+            <a:r>
+              <a:rPr lang="en-US" dirty="0" err="1"/>
               <a:t>to</a:t>
             </a:r>
             <a:r>
-              <a:rPr lang="de-DE" sz="1400" b="0" kern="1200" dirty="0">
-                <a:solidFill>
-                  <a:schemeClr val="tx1"/>
-                </a:solidFill>
-                <a:effectLst/>
-                <a:latin typeface="+mn-lt"/>
-                <a:ea typeface="+mn-ea"/>
-                <a:cs typeface="+mn-cs"/>
-              </a:rPr>
-              <a:t> </a:t>
-            </a:r>
-            <a:r>
-              <a:rPr lang="de-DE" sz="1400" b="0" kern="1200" dirty="0" err="1">
-                <a:solidFill>
-                  <a:schemeClr val="tx1"/>
-                </a:solidFill>
-                <a:effectLst/>
-                <a:latin typeface="+mn-lt"/>
-                <a:ea typeface="+mn-ea"/>
-                <a:cs typeface="+mn-cs"/>
-              </a:rPr>
-              <a:t>add</a:t>
-            </a:r>
-            <a:r>
-              <a:rPr lang="de-DE" sz="1400" b="0" kern="1200" dirty="0">
-                <a:solidFill>
-                  <a:schemeClr val="tx1"/>
-                </a:solidFill>
-                <a:effectLst/>
-                <a:latin typeface="+mn-lt"/>
-                <a:ea typeface="+mn-ea"/>
-                <a:cs typeface="+mn-cs"/>
-              </a:rPr>
-              <a:t> </a:t>
-            </a:r>
-            <a:r>
-              <a:rPr lang="de-DE" sz="1400" b="0" kern="1200" dirty="0" err="1">
-                <a:solidFill>
-                  <a:schemeClr val="tx1"/>
-                </a:solidFill>
-                <a:effectLst/>
-                <a:latin typeface="+mn-lt"/>
-                <a:ea typeface="+mn-ea"/>
-                <a:cs typeface="+mn-cs"/>
-              </a:rPr>
-              <a:t>make</a:t>
-            </a:r>
-            <a:r>
-              <a:rPr lang="de-DE" sz="1400" b="0" kern="1200" dirty="0">
-                <a:solidFill>
-                  <a:schemeClr val="tx1"/>
-                </a:solidFill>
-                <a:effectLst/>
-                <a:latin typeface="+mn-lt"/>
-                <a:ea typeface="+mn-ea"/>
-                <a:cs typeface="+mn-cs"/>
-              </a:rPr>
-              <a:t> </a:t>
-            </a:r>
-            <a:r>
-              <a:rPr lang="de-DE" sz="1400" b="0" kern="1200" dirty="0" err="1">
-                <a:solidFill>
-                  <a:schemeClr val="tx1"/>
-                </a:solidFill>
-                <a:effectLst/>
-                <a:latin typeface="+mn-lt"/>
-                <a:ea typeface="+mn-ea"/>
-                <a:cs typeface="+mn-cs"/>
-              </a:rPr>
-              <a:t>it</a:t>
-            </a:r>
-            <a:r>
-              <a:rPr lang="de-DE" sz="1400" b="0" kern="1200" dirty="0">
-                <a:solidFill>
-                  <a:schemeClr val="tx1"/>
-                </a:solidFill>
-                <a:effectLst/>
-                <a:latin typeface="+mn-lt"/>
-                <a:ea typeface="+mn-ea"/>
-                <a:cs typeface="+mn-cs"/>
-              </a:rPr>
-              <a:t> </a:t>
-            </a:r>
-            <a:r>
-              <a:rPr lang="de-DE" sz="1400" b="0" kern="1200" dirty="0" err="1">
-                <a:solidFill>
-                  <a:schemeClr val="tx1"/>
-                </a:solidFill>
-                <a:effectLst/>
-                <a:latin typeface="+mn-lt"/>
-                <a:ea typeface="+mn-ea"/>
-                <a:cs typeface="+mn-cs"/>
-              </a:rPr>
-              <a:t>available</a:t>
-            </a:r>
-            <a:r>
-              <a:rPr lang="de-DE" sz="1400" b="0" kern="1200" dirty="0">
-                <a:solidFill>
-                  <a:schemeClr val="tx1"/>
-                </a:solidFill>
-                <a:effectLst/>
-                <a:latin typeface="+mn-lt"/>
-                <a:ea typeface="+mn-ea"/>
-                <a:cs typeface="+mn-cs"/>
-              </a:rPr>
-              <a:t> </a:t>
-            </a:r>
-            <a:r>
-              <a:rPr lang="de-DE" sz="1400" b="0" kern="1200" dirty="0" err="1">
-                <a:solidFill>
-                  <a:schemeClr val="tx1"/>
-                </a:solidFill>
-                <a:effectLst/>
-                <a:latin typeface="+mn-lt"/>
-                <a:ea typeface="+mn-ea"/>
-                <a:cs typeface="+mn-cs"/>
-              </a:rPr>
-              <a:t>to</a:t>
-            </a:r>
-            <a:r>
-              <a:rPr lang="de-DE" sz="1400" b="0" kern="1200" dirty="0">
-                <a:solidFill>
-                  <a:schemeClr val="tx1"/>
-                </a:solidFill>
-                <a:effectLst/>
-                <a:latin typeface="+mn-lt"/>
-                <a:ea typeface="+mn-ea"/>
-                <a:cs typeface="+mn-cs"/>
-              </a:rPr>
-              <a:t> </a:t>
-            </a:r>
-            <a:r>
-              <a:rPr lang="de-DE" sz="1400" b="0" kern="1200" dirty="0" err="1">
-                <a:solidFill>
-                  <a:schemeClr val="tx1"/>
-                </a:solidFill>
-                <a:effectLst/>
-                <a:latin typeface="+mn-lt"/>
-                <a:ea typeface="+mn-ea"/>
-                <a:cs typeface="+mn-cs"/>
-              </a:rPr>
-              <a:t>your</a:t>
-            </a:r>
-            <a:r>
-              <a:rPr lang="de-DE" sz="1400" b="0" kern="1200" dirty="0">
-                <a:solidFill>
-                  <a:schemeClr val="tx1"/>
-                </a:solidFill>
-                <a:effectLst/>
-                <a:latin typeface="+mn-lt"/>
-                <a:ea typeface="+mn-ea"/>
-                <a:cs typeface="+mn-cs"/>
-              </a:rPr>
-              <a:t> </a:t>
-            </a:r>
-            <a:r>
-              <a:rPr lang="de-DE" sz="1400" b="0" kern="1200" dirty="0" err="1">
-                <a:solidFill>
-                  <a:schemeClr val="tx1"/>
-                </a:solidFill>
-                <a:effectLst/>
-                <a:latin typeface="+mn-lt"/>
-                <a:ea typeface="+mn-ea"/>
-                <a:cs typeface="+mn-cs"/>
-              </a:rPr>
-              <a:t>helm</a:t>
-            </a:r>
-            <a:r>
-              <a:rPr lang="de-DE" sz="1400" b="0" kern="1200" dirty="0">
-                <a:solidFill>
-                  <a:schemeClr val="tx1"/>
-                </a:solidFill>
-                <a:effectLst/>
-                <a:latin typeface="+mn-lt"/>
-                <a:ea typeface="+mn-ea"/>
-                <a:cs typeface="+mn-cs"/>
-              </a:rPr>
-              <a:t> </a:t>
-            </a:r>
-            <a:r>
-              <a:rPr lang="de-DE" sz="1400" b="0" kern="1200" dirty="0" err="1">
-                <a:solidFill>
-                  <a:schemeClr val="tx1"/>
-                </a:solidFill>
-                <a:effectLst/>
-                <a:latin typeface="+mn-lt"/>
-                <a:ea typeface="+mn-ea"/>
-                <a:cs typeface="+mn-cs"/>
-              </a:rPr>
-              <a:t>installation</a:t>
-            </a:r>
-            <a:r>
-              <a:rPr lang="de-DE" sz="1400" b="0" kern="1200" dirty="0">
-                <a:solidFill>
-                  <a:schemeClr val="tx1"/>
-                </a:solidFill>
-                <a:effectLst/>
-                <a:latin typeface="+mn-lt"/>
-                <a:ea typeface="+mn-ea"/>
-                <a:cs typeface="+mn-cs"/>
-              </a:rPr>
-              <a:t>.</a:t>
-            </a:r>
-          </a:p>
-          <a:p>
-            <a:pPr marL="0" marR="0" lvl="0" indent="0" algn="l" defTabSz="1088776" rtl="0" eaLnBrk="1" fontAlgn="auto" latinLnBrk="0" hangingPunct="1">
-              <a:lnSpc>
-                <a:spcPct val="100000"/>
-              </a:lnSpc>
-              <a:spcBef>
-                <a:spcPts val="0"/>
-              </a:spcBef>
-              <a:spcAft>
-                <a:spcPts val="0"/>
-              </a:spcAft>
-              <a:buClrTx/>
-              <a:buSzTx/>
-              <a:buFontTx/>
-              <a:buNone/>
-              <a:tabLst/>
-              <a:defRPr/>
-            </a:pPr>
-            <a:endParaRPr lang="de-DE" sz="1400" b="0" kern="1200" dirty="0">
-              <a:solidFill>
-                <a:schemeClr val="tx1"/>
-              </a:solidFill>
-              <a:effectLst/>
-              <a:latin typeface="+mn-lt"/>
-              <a:ea typeface="+mn-ea"/>
-              <a:cs typeface="+mn-cs"/>
-            </a:endParaRPr>
-          </a:p>
-          <a:p>
-            <a:pPr marL="0" marR="0" lvl="0" indent="0" algn="l" defTabSz="1088776" rtl="0" eaLnBrk="1" fontAlgn="auto" latinLnBrk="0" hangingPunct="1">
-              <a:lnSpc>
-                <a:spcPct val="100000"/>
-              </a:lnSpc>
-              <a:spcBef>
-                <a:spcPts val="0"/>
-              </a:spcBef>
-              <a:spcAft>
-                <a:spcPts val="0"/>
-              </a:spcAft>
-              <a:buClrTx/>
-              <a:buSzTx/>
-              <a:buFontTx/>
-              <a:buNone/>
-              <a:tabLst/>
-              <a:defRPr/>
-            </a:pPr>
-            <a:r>
-              <a:rPr lang="de-DE" sz="1400" b="0" kern="1200" dirty="0" err="1">
-                <a:solidFill>
-                  <a:schemeClr val="tx1"/>
-                </a:solidFill>
-                <a:effectLst/>
-                <a:latin typeface="+mn-lt"/>
-                <a:ea typeface="+mn-ea"/>
-                <a:cs typeface="+mn-cs"/>
-              </a:rPr>
-              <a:t>Once</a:t>
-            </a:r>
-            <a:r>
-              <a:rPr lang="de-DE" sz="1400" b="0" kern="1200" dirty="0">
-                <a:solidFill>
-                  <a:schemeClr val="tx1"/>
-                </a:solidFill>
-                <a:effectLst/>
-                <a:latin typeface="+mn-lt"/>
-                <a:ea typeface="+mn-ea"/>
-                <a:cs typeface="+mn-cs"/>
-              </a:rPr>
-              <a:t> </a:t>
-            </a:r>
-            <a:r>
-              <a:rPr lang="de-DE" sz="1400" b="0" kern="1200" dirty="0" err="1">
-                <a:solidFill>
-                  <a:schemeClr val="tx1"/>
-                </a:solidFill>
-                <a:effectLst/>
-                <a:latin typeface="+mn-lt"/>
-                <a:ea typeface="+mn-ea"/>
-                <a:cs typeface="+mn-cs"/>
-              </a:rPr>
-              <a:t>the</a:t>
-            </a:r>
-            <a:r>
-              <a:rPr lang="de-DE" sz="1400" b="0" kern="1200" dirty="0">
-                <a:solidFill>
-                  <a:schemeClr val="tx1"/>
-                </a:solidFill>
-                <a:effectLst/>
-                <a:latin typeface="+mn-lt"/>
-                <a:ea typeface="+mn-ea"/>
-                <a:cs typeface="+mn-cs"/>
-              </a:rPr>
-              <a:t> </a:t>
-            </a:r>
-            <a:r>
-              <a:rPr lang="de-DE" sz="1400" b="0" kern="1200" dirty="0" err="1">
-                <a:solidFill>
-                  <a:schemeClr val="tx1"/>
-                </a:solidFill>
-                <a:effectLst/>
-                <a:latin typeface="+mn-lt"/>
-                <a:ea typeface="+mn-ea"/>
-                <a:cs typeface="+mn-cs"/>
-              </a:rPr>
-              <a:t>repo</a:t>
-            </a:r>
-            <a:r>
-              <a:rPr lang="de-DE" sz="1400" b="0" kern="1200" dirty="0">
-                <a:solidFill>
-                  <a:schemeClr val="tx1"/>
-                </a:solidFill>
-                <a:effectLst/>
-                <a:latin typeface="+mn-lt"/>
-                <a:ea typeface="+mn-ea"/>
-                <a:cs typeface="+mn-cs"/>
-              </a:rPr>
-              <a:t> is </a:t>
-            </a:r>
-            <a:r>
-              <a:rPr lang="de-DE" sz="1400" b="0" kern="1200" dirty="0" err="1">
-                <a:solidFill>
-                  <a:schemeClr val="tx1"/>
-                </a:solidFill>
-                <a:effectLst/>
-                <a:latin typeface="+mn-lt"/>
-                <a:ea typeface="+mn-ea"/>
-                <a:cs typeface="+mn-cs"/>
-              </a:rPr>
-              <a:t>available</a:t>
-            </a:r>
-            <a:r>
-              <a:rPr lang="de-DE" sz="1400" b="0" kern="1200" dirty="0">
-                <a:solidFill>
-                  <a:schemeClr val="tx1"/>
-                </a:solidFill>
-                <a:effectLst/>
-                <a:latin typeface="+mn-lt"/>
-                <a:ea typeface="+mn-ea"/>
-                <a:cs typeface="+mn-cs"/>
-              </a:rPr>
-              <a:t> „</a:t>
-            </a:r>
-            <a:r>
-              <a:rPr lang="de-DE" sz="1400" b="0" kern="1200" dirty="0" err="1">
-                <a:solidFill>
-                  <a:schemeClr val="tx1"/>
-                </a:solidFill>
-                <a:effectLst/>
-                <a:latin typeface="+mn-lt"/>
-                <a:ea typeface="+mn-ea"/>
-                <a:cs typeface="+mn-cs"/>
-              </a:rPr>
-              <a:t>helm</a:t>
-            </a:r>
-            <a:r>
-              <a:rPr lang="de-DE" sz="1400" b="0" kern="1200" dirty="0">
-                <a:solidFill>
-                  <a:schemeClr val="tx1"/>
-                </a:solidFill>
-                <a:effectLst/>
-                <a:latin typeface="+mn-lt"/>
-                <a:ea typeface="+mn-ea"/>
-                <a:cs typeface="+mn-cs"/>
-              </a:rPr>
-              <a:t> </a:t>
-            </a:r>
-            <a:r>
-              <a:rPr lang="de-DE" sz="1400" b="0" kern="1200" dirty="0" err="1">
-                <a:solidFill>
-                  <a:schemeClr val="tx1"/>
-                </a:solidFill>
-                <a:effectLst/>
-                <a:latin typeface="+mn-lt"/>
-                <a:ea typeface="+mn-ea"/>
-                <a:cs typeface="+mn-cs"/>
-              </a:rPr>
-              <a:t>search</a:t>
-            </a:r>
-            <a:r>
-              <a:rPr lang="de-DE" sz="1400" b="0" kern="1200" dirty="0">
-                <a:solidFill>
-                  <a:schemeClr val="tx1"/>
-                </a:solidFill>
-                <a:effectLst/>
-                <a:latin typeface="+mn-lt"/>
-                <a:ea typeface="+mn-ea"/>
-                <a:cs typeface="+mn-cs"/>
-              </a:rPr>
-              <a:t> </a:t>
-            </a:r>
-            <a:r>
-              <a:rPr lang="de-DE" sz="1400" b="0" kern="1200" dirty="0" err="1">
-                <a:solidFill>
-                  <a:schemeClr val="tx1"/>
-                </a:solidFill>
-                <a:effectLst/>
-                <a:latin typeface="+mn-lt"/>
-                <a:ea typeface="+mn-ea"/>
-                <a:cs typeface="+mn-cs"/>
-              </a:rPr>
-              <a:t>repo</a:t>
-            </a:r>
-            <a:r>
-              <a:rPr lang="de-DE" sz="1400" b="0" kern="1200" dirty="0">
-                <a:solidFill>
-                  <a:schemeClr val="tx1"/>
-                </a:solidFill>
-                <a:effectLst/>
-                <a:latin typeface="+mn-lt"/>
-                <a:ea typeface="+mn-ea"/>
-                <a:cs typeface="+mn-cs"/>
-              </a:rPr>
-              <a:t> &lt;</a:t>
-            </a:r>
-            <a:r>
-              <a:rPr lang="de-DE" sz="1400" b="0" kern="1200" dirty="0" err="1">
-                <a:solidFill>
-                  <a:schemeClr val="tx1"/>
-                </a:solidFill>
-                <a:effectLst/>
-                <a:latin typeface="+mn-lt"/>
-                <a:ea typeface="+mn-ea"/>
-                <a:cs typeface="+mn-cs"/>
-              </a:rPr>
-              <a:t>term</a:t>
-            </a:r>
-            <a:r>
-              <a:rPr lang="de-DE" sz="1400" b="0" kern="1200" dirty="0">
-                <a:solidFill>
-                  <a:schemeClr val="tx1"/>
-                </a:solidFill>
-                <a:effectLst/>
-                <a:latin typeface="+mn-lt"/>
-                <a:ea typeface="+mn-ea"/>
-                <a:cs typeface="+mn-cs"/>
-              </a:rPr>
-              <a:t>&gt;“ will </a:t>
-            </a:r>
-            <a:r>
-              <a:rPr lang="de-DE" sz="1400" b="0" kern="1200" dirty="0" err="1">
-                <a:solidFill>
-                  <a:schemeClr val="tx1"/>
-                </a:solidFill>
-                <a:effectLst/>
-                <a:latin typeface="+mn-lt"/>
-                <a:ea typeface="+mn-ea"/>
-                <a:cs typeface="+mn-cs"/>
-              </a:rPr>
-              <a:t>allow</a:t>
-            </a:r>
-            <a:r>
-              <a:rPr lang="de-DE" sz="1400" b="0" kern="1200" dirty="0">
-                <a:solidFill>
-                  <a:schemeClr val="tx1"/>
-                </a:solidFill>
-                <a:effectLst/>
-                <a:latin typeface="+mn-lt"/>
-                <a:ea typeface="+mn-ea"/>
-                <a:cs typeface="+mn-cs"/>
-              </a:rPr>
-              <a:t> </a:t>
-            </a:r>
-            <a:r>
-              <a:rPr lang="de-DE" sz="1400" b="0" kern="1200" dirty="0" err="1">
-                <a:solidFill>
-                  <a:schemeClr val="tx1"/>
-                </a:solidFill>
-                <a:effectLst/>
-                <a:latin typeface="+mn-lt"/>
-                <a:ea typeface="+mn-ea"/>
-                <a:cs typeface="+mn-cs"/>
-              </a:rPr>
-              <a:t>to</a:t>
-            </a:r>
-            <a:r>
-              <a:rPr lang="de-DE" sz="1400" b="0" kern="1200" dirty="0">
-                <a:solidFill>
-                  <a:schemeClr val="tx1"/>
-                </a:solidFill>
-                <a:effectLst/>
-                <a:latin typeface="+mn-lt"/>
-                <a:ea typeface="+mn-ea"/>
-                <a:cs typeface="+mn-cs"/>
-              </a:rPr>
-              <a:t> </a:t>
-            </a:r>
-            <a:r>
-              <a:rPr lang="de-DE" sz="1400" b="0" kern="1200" dirty="0" err="1">
-                <a:solidFill>
-                  <a:schemeClr val="tx1"/>
-                </a:solidFill>
-                <a:effectLst/>
-                <a:latin typeface="+mn-lt"/>
-                <a:ea typeface="+mn-ea"/>
-                <a:cs typeface="+mn-cs"/>
-              </a:rPr>
-              <a:t>look</a:t>
-            </a:r>
-            <a:r>
-              <a:rPr lang="de-DE" sz="1400" b="0" kern="1200" dirty="0">
-                <a:solidFill>
-                  <a:schemeClr val="tx1"/>
-                </a:solidFill>
-                <a:effectLst/>
-                <a:latin typeface="+mn-lt"/>
-                <a:ea typeface="+mn-ea"/>
-                <a:cs typeface="+mn-cs"/>
-              </a:rPr>
-              <a:t> </a:t>
-            </a:r>
-            <a:r>
-              <a:rPr lang="de-DE" sz="1400" b="0" kern="1200" dirty="0" err="1">
-                <a:solidFill>
-                  <a:schemeClr val="tx1"/>
-                </a:solidFill>
-                <a:effectLst/>
-                <a:latin typeface="+mn-lt"/>
-                <a:ea typeface="+mn-ea"/>
-                <a:cs typeface="+mn-cs"/>
-              </a:rPr>
-              <a:t>for</a:t>
-            </a:r>
-            <a:r>
-              <a:rPr lang="de-DE" sz="1400" b="0" kern="1200" dirty="0">
-                <a:solidFill>
-                  <a:schemeClr val="tx1"/>
-                </a:solidFill>
-                <a:effectLst/>
-                <a:latin typeface="+mn-lt"/>
-                <a:ea typeface="+mn-ea"/>
-                <a:cs typeface="+mn-cs"/>
-              </a:rPr>
-              <a:t> </a:t>
-            </a:r>
-            <a:r>
-              <a:rPr lang="de-DE" sz="1400" b="0" kern="1200" dirty="0" err="1">
-                <a:solidFill>
-                  <a:schemeClr val="tx1"/>
-                </a:solidFill>
-                <a:effectLst/>
-                <a:latin typeface="+mn-lt"/>
-                <a:ea typeface="+mn-ea"/>
-                <a:cs typeface="+mn-cs"/>
-              </a:rPr>
-              <a:t>charts</a:t>
-            </a:r>
-            <a:r>
-              <a:rPr lang="de-DE" sz="1400" b="0" kern="1200" dirty="0">
-                <a:solidFill>
-                  <a:schemeClr val="tx1"/>
-                </a:solidFill>
-                <a:effectLst/>
-                <a:latin typeface="+mn-lt"/>
-                <a:ea typeface="+mn-ea"/>
-                <a:cs typeface="+mn-cs"/>
-              </a:rPr>
-              <a:t>. Helm hub (</a:t>
-            </a:r>
-            <a:r>
-              <a:rPr lang="de-DE" dirty="0">
-                <a:hlinkClick r:id="rId3"/>
-              </a:rPr>
-              <a:t>https://hub.helm.sh/</a:t>
-            </a:r>
-            <a:r>
-              <a:rPr lang="de-DE" dirty="0"/>
-              <a:t>) </a:t>
-            </a:r>
-            <a:r>
-              <a:rPr lang="de-DE" dirty="0" err="1"/>
-              <a:t>can</a:t>
-            </a:r>
-            <a:r>
-              <a:rPr lang="de-DE" dirty="0"/>
-              <a:t> also </a:t>
-            </a:r>
-            <a:r>
-              <a:rPr lang="de-DE" dirty="0" err="1"/>
-              <a:t>be</a:t>
-            </a:r>
-            <a:r>
-              <a:rPr lang="de-DE" dirty="0"/>
-              <a:t> </a:t>
-            </a:r>
-            <a:r>
-              <a:rPr lang="de-DE" dirty="0" err="1"/>
-              <a:t>searched</a:t>
-            </a:r>
-            <a:r>
-              <a:rPr lang="de-DE" dirty="0"/>
-              <a:t> </a:t>
-            </a:r>
-            <a:r>
-              <a:rPr lang="de-DE" dirty="0" err="1"/>
-              <a:t>with</a:t>
-            </a:r>
-            <a:r>
-              <a:rPr lang="de-DE" dirty="0"/>
-              <a:t> „</a:t>
-            </a:r>
-            <a:r>
-              <a:rPr lang="de-DE" dirty="0" err="1"/>
-              <a:t>helm</a:t>
-            </a:r>
-            <a:r>
-              <a:rPr lang="de-DE" dirty="0"/>
-              <a:t> </a:t>
-            </a:r>
-            <a:r>
-              <a:rPr lang="de-DE" dirty="0" err="1"/>
-              <a:t>search</a:t>
-            </a:r>
-            <a:r>
-              <a:rPr lang="de-DE" dirty="0"/>
-              <a:t> hub &lt;</a:t>
-            </a:r>
-            <a:r>
-              <a:rPr lang="de-DE" dirty="0" err="1"/>
-              <a:t>term</a:t>
-            </a:r>
-            <a:r>
-              <a:rPr lang="de-DE" dirty="0"/>
-              <a:t>&gt;“.</a:t>
-            </a:r>
-            <a:endParaRPr lang="de-DE" sz="1400" b="0" kern="1200" dirty="0">
-              <a:solidFill>
-                <a:schemeClr val="tx1"/>
-              </a:solidFill>
-              <a:effectLst/>
-              <a:latin typeface="+mn-lt"/>
-              <a:ea typeface="+mn-ea"/>
-              <a:cs typeface="+mn-cs"/>
-            </a:endParaRPr>
+              <a:rPr lang="en-US" dirty="0"/>
+              <a:t> reference the </a:t>
+            </a:r>
+            <a:r>
+              <a:rPr lang="en-US" dirty="0" err="1"/>
+              <a:t>acutal</a:t>
+            </a:r>
+            <a:r>
+              <a:rPr lang="en-US" dirty="0"/>
+              <a:t> key</a:t>
+            </a:r>
+          </a:p>
+          <a:p>
+            <a:r>
+              <a:rPr lang="en-US" dirty="0"/>
+              <a:t>message:</a:t>
+            </a:r>
+          </a:p>
+          <a:p>
+            <a:r>
+              <a:rPr lang="en-US" dirty="0"/>
+              <a:t>  greeting: “hello”</a:t>
+            </a:r>
+          </a:p>
+          <a:p>
+            <a:r>
+              <a:rPr lang="en-US" dirty="0"/>
+              <a:t>  to: “course”</a:t>
+            </a:r>
           </a:p>
         </p:txBody>
       </p:sp>
@@ -2354,7 +2015,7 @@
     </p:spTree>
     <p:extLst>
       <p:ext uri="{BB962C8B-B14F-4D97-AF65-F5344CB8AC3E}">
-        <p14:creationId xmlns:p14="http://schemas.microsoft.com/office/powerpoint/2010/main" val="1096285440"/>
+        <p14:creationId xmlns:p14="http://schemas.microsoft.com/office/powerpoint/2010/main" val="2999438910"/>
       </p:ext>
     </p:extLst>
   </p:cSld>
@@ -2383,7 +2044,7 @@
       </p:grpSpPr>
       <p:sp>
         <p:nvSpPr>
-          <p:cNvPr id="2" name="Slide Image Placeholder 1"/>
+          <p:cNvPr id="2" name="Folienbildplatzhalter 1"/>
           <p:cNvSpPr>
             <a:spLocks noGrp="1" noRot="1" noChangeAspect="1"/>
           </p:cNvSpPr>
@@ -2395,7 +2056,7 @@
       </p:sp>
       <p:sp>
         <p:nvSpPr>
-          <p:cNvPr id="3" name="Notes Placeholder 2"/>
+          <p:cNvPr id="3" name="Notizenplatzhalter 2"/>
           <p:cNvSpPr>
             <a:spLocks noGrp="1"/>
           </p:cNvSpPr>
@@ -2405,278 +2066,53 @@
         </p:nvSpPr>
         <p:spPr/>
         <p:txBody>
-          <a:bodyPr>
-            <a:normAutofit fontScale="85000" lnSpcReduction="20000"/>
-          </a:bodyPr>
+          <a:bodyPr/>
           <a:lstStyle/>
           <a:p>
-            <a:pPr marL="285750" lvl="0" indent="-285750">
-              <a:buFontTx/>
-              <a:buChar char="-"/>
-            </a:pPr>
-            <a:r>
-              <a:rPr lang="en-US" dirty="0"/>
-              <a:t>Start with showing the helm binary – simply run “helm” without anything else</a:t>
-            </a:r>
-          </a:p>
-          <a:p>
-            <a:pPr marL="285750" lvl="0" indent="-285750">
-              <a:buFontTx/>
-              <a:buChar char="-"/>
-            </a:pPr>
-            <a:r>
-              <a:rPr lang="en-US" dirty="0"/>
-              <a:t>If not yet done, run a “helm </a:t>
-            </a:r>
-            <a:r>
-              <a:rPr lang="en-US" dirty="0" err="1"/>
-              <a:t>init</a:t>
-            </a:r>
-            <a:r>
-              <a:rPr lang="en-US" dirty="0"/>
-              <a:t>” to deploy tiller. But probably there is already a tiller from the time when you created the registry.</a:t>
-            </a:r>
-          </a:p>
-          <a:p>
-            <a:pPr marL="285750" lvl="0" indent="-285750">
-              <a:buFontTx/>
-              <a:buChar char="-"/>
-            </a:pPr>
-            <a:r>
-              <a:rPr lang="en-US" dirty="0"/>
-              <a:t>Show the tiller pod in </a:t>
-            </a:r>
-            <a:r>
-              <a:rPr lang="en-US" dirty="0" err="1"/>
-              <a:t>kube</a:t>
-            </a:r>
-            <a:r>
-              <a:rPr lang="en-US" dirty="0"/>
-              <a:t>-system namespace. Explain, that for helm </a:t>
-            </a:r>
-            <a:r>
-              <a:rPr lang="en-US" dirty="0" err="1"/>
-              <a:t>init</a:t>
-            </a:r>
-            <a:r>
-              <a:rPr lang="en-US" dirty="0"/>
-              <a:t>, participants should target their own namespace. Otherwise they will connect to the same tiller. Highlight that in order to setup tiller with cluster access (i.e. outside of it’s namespace a </a:t>
-            </a:r>
-            <a:r>
-              <a:rPr lang="en-US" dirty="0" err="1"/>
-              <a:t>clusterrolebinding</a:t>
-            </a:r>
-            <a:r>
-              <a:rPr lang="en-US" dirty="0"/>
-              <a:t> is required)</a:t>
-            </a:r>
-          </a:p>
-          <a:p>
-            <a:pPr marL="285750" lvl="0" indent="-285750">
-              <a:buFontTx/>
-              <a:buChar char="-"/>
-            </a:pPr>
-            <a:r>
-              <a:rPr lang="en-US" dirty="0"/>
-              <a:t>Run “helm list” to show the already installed charts and explain that they are called a “release”.</a:t>
-            </a:r>
-          </a:p>
-          <a:p>
-            <a:pPr marL="0" lvl="0" indent="0">
-              <a:buFontTx/>
-              <a:buNone/>
-            </a:pPr>
-            <a:endParaRPr lang="en-US" dirty="0"/>
-          </a:p>
-          <a:p>
-            <a:pPr marL="0" lvl="0" indent="0">
-              <a:buFontTx/>
-              <a:buNone/>
-            </a:pPr>
-            <a:r>
-              <a:rPr lang="en-US" dirty="0"/>
-              <a:t>Next move on to the question, wherefrom to get charts:</a:t>
-            </a:r>
-          </a:p>
-          <a:p>
-            <a:pPr marL="285750" lvl="0" indent="-285750">
-              <a:buFontTx/>
-              <a:buChar char="-"/>
-            </a:pPr>
-            <a:r>
-              <a:rPr lang="en-US" dirty="0"/>
-              <a:t>Open https://github.com/helm/charts in a browser</a:t>
-            </a:r>
-          </a:p>
-          <a:p>
-            <a:pPr marL="285750" lvl="0" indent="-285750">
-              <a:buFontTx/>
-              <a:buChar char="-"/>
-            </a:pPr>
-            <a:r>
-              <a:rPr lang="en-US" dirty="0"/>
-              <a:t>Talk about the different “levels” – currently incubator, test &amp; stable and go to stable</a:t>
-            </a:r>
-          </a:p>
-          <a:p>
-            <a:pPr marL="285750" lvl="0" indent="-285750">
-              <a:buFontTx/>
-              <a:buChar char="-"/>
-            </a:pPr>
-            <a:r>
-              <a:rPr lang="en-US" dirty="0"/>
-              <a:t>Pick up any chart (e.g. mongo </a:t>
-            </a:r>
-            <a:r>
-              <a:rPr lang="en-US" dirty="0" err="1"/>
-              <a:t>db</a:t>
-            </a:r>
-            <a:r>
-              <a:rPr lang="en-US" dirty="0"/>
-              <a:t> or </a:t>
-            </a:r>
-            <a:r>
-              <a:rPr lang="en-US" dirty="0" err="1"/>
-              <a:t>wordpress</a:t>
-            </a:r>
-            <a:r>
-              <a:rPr lang="en-US" dirty="0"/>
-              <a:t>) and go into details.</a:t>
-            </a:r>
-          </a:p>
-          <a:p>
-            <a:pPr marL="285750" lvl="0" indent="-285750">
-              <a:buFontTx/>
-              <a:buChar char="-"/>
-            </a:pPr>
-            <a:r>
-              <a:rPr lang="en-US" dirty="0"/>
-              <a:t>Discuss the info on the readme page, especially the “installing the chart” and “configuration”</a:t>
-            </a:r>
-          </a:p>
-          <a:p>
-            <a:pPr marL="285750" lvl="0" indent="-285750">
-              <a:buFontTx/>
-              <a:buChar char="-"/>
-            </a:pPr>
-            <a:r>
-              <a:rPr lang="en-US" dirty="0"/>
-              <a:t>Highlight that any parameter in configuration has a default value or is not set. </a:t>
-            </a:r>
-          </a:p>
-          <a:p>
-            <a:pPr marL="285750" lvl="0" indent="-285750">
-              <a:buFontTx/>
-              <a:buChar char="-"/>
-            </a:pPr>
-            <a:r>
-              <a:rPr lang="en-US" dirty="0"/>
-              <a:t>Highlight that any parameter in configuration can be overwritten / customized either by using “--set key=value” or a </a:t>
-            </a:r>
-            <a:r>
-              <a:rPr lang="en-US" dirty="0" err="1"/>
-              <a:t>values.yaml</a:t>
-            </a:r>
-            <a:r>
-              <a:rPr lang="en-US" dirty="0"/>
-              <a:t> file.</a:t>
-            </a:r>
-          </a:p>
-          <a:p>
-            <a:pPr marL="285750" lvl="0" indent="-285750">
-              <a:buFontTx/>
-              <a:buChar char="-"/>
-            </a:pPr>
-            <a:r>
-              <a:rPr lang="en-US" dirty="0"/>
-              <a:t>The default values can be found in the repo in a </a:t>
-            </a:r>
-            <a:r>
-              <a:rPr lang="en-US" dirty="0" err="1"/>
-              <a:t>values.yaml</a:t>
-            </a:r>
-            <a:r>
-              <a:rPr lang="en-US" dirty="0"/>
-              <a:t> file too.</a:t>
-            </a:r>
-          </a:p>
-          <a:p>
-            <a:pPr marL="285750" lvl="0" indent="-285750">
-              <a:buFontTx/>
-              <a:buChar char="-"/>
-            </a:pPr>
-            <a:r>
-              <a:rPr lang="en-US" dirty="0"/>
-              <a:t>Go to the templates and take a look at one of the </a:t>
-            </a:r>
-            <a:r>
-              <a:rPr lang="en-US" dirty="0" err="1"/>
-              <a:t>yaml</a:t>
-            </a:r>
-            <a:r>
-              <a:rPr lang="en-US" dirty="0"/>
-              <a:t> files. Explain that helm uses a go-based engine to render the charts upon deployment </a:t>
-            </a:r>
-            <a:r>
-              <a:rPr lang="en-US" dirty="0">
-                <a:sym typeface="Wingdings" panose="05000000000000000000" pitchFamily="2" charset="2"/>
-              </a:rPr>
-              <a:t> substituting variables with specific values.</a:t>
-            </a:r>
-          </a:p>
-          <a:p>
-            <a:pPr marL="0" lvl="0" indent="0">
-              <a:buFontTx/>
-              <a:buNone/>
-            </a:pPr>
-            <a:endParaRPr lang="en-US" dirty="0">
-              <a:sym typeface="Wingdings" panose="05000000000000000000" pitchFamily="2" charset="2"/>
-            </a:endParaRPr>
-          </a:p>
-          <a:p>
-            <a:pPr marL="0" lvl="0" indent="0">
-              <a:buFontTx/>
-              <a:buNone/>
-            </a:pPr>
-            <a:r>
-              <a:rPr lang="en-US" dirty="0">
-                <a:sym typeface="Wingdings" panose="05000000000000000000" pitchFamily="2" charset="2"/>
-              </a:rPr>
-              <a:t>Finally run a helm install for the chart you choose and show the created object / run some of the commands printed out.</a:t>
-            </a:r>
-          </a:p>
-          <a:p>
-            <a:pPr marL="0" lvl="0" indent="0">
-              <a:buFontTx/>
-              <a:buNone/>
-            </a:pPr>
-            <a:endParaRPr lang="en-US" dirty="0">
-              <a:sym typeface="Wingdings" panose="05000000000000000000" pitchFamily="2" charset="2"/>
-            </a:endParaRPr>
-          </a:p>
-          <a:p>
-            <a:pPr marL="0" lvl="0" indent="0">
-              <a:buFontTx/>
-              <a:buNone/>
-            </a:pPr>
-            <a:r>
-              <a:rPr lang="en-US" dirty="0">
-                <a:sym typeface="Wingdings" panose="05000000000000000000" pitchFamily="2" charset="2"/>
-              </a:rPr>
-              <a:t>You can also talk about the --debug (verbosity) &amp; --dry-un (simulation mode) commands for helm actions like install. </a:t>
-            </a:r>
-            <a:endParaRPr lang="en-US" dirty="0"/>
+            <a:r>
+              <a:rPr lang="en-US" noProof="0" dirty="0"/>
+              <a:t>Of course, you can use your local file system as well. But at some point you might want to consume existing charts. This is when you need remote helm chart repositories.</a:t>
+            </a:r>
+          </a:p>
+          <a:p>
+            <a:endParaRPr lang="en-US" noProof="0" dirty="0"/>
+          </a:p>
+          <a:p>
+            <a:r>
+              <a:rPr lang="en-US" noProof="0" dirty="0"/>
+              <a:t>Up until November 2020, charts were stored on </a:t>
+            </a:r>
+            <a:r>
+              <a:rPr lang="en-US" noProof="0" dirty="0" err="1"/>
+              <a:t>github</a:t>
+            </a:r>
+            <a:r>
+              <a:rPr lang="en-US" noProof="0" dirty="0"/>
+              <a:t> under the helm org in a charts repo. These charts are no longer </a:t>
+            </a:r>
+            <a:r>
+              <a:rPr lang="en-US" noProof="0" dirty="0" err="1"/>
+              <a:t>maintened</a:t>
+            </a:r>
+            <a:r>
+              <a:rPr lang="en-US" noProof="0" dirty="0"/>
+              <a:t> (i.e. deprecated), but still contain valuable things. The new place to look for charts is the artifact hub, but also repositories set up by chart providers. Overall, charts have been spread across much </a:t>
+            </a:r>
+            <a:r>
+              <a:rPr lang="en-US" noProof="0"/>
+              <a:t>more location.</a:t>
+            </a:r>
           </a:p>
         </p:txBody>
       </p:sp>
       <p:sp>
         <p:nvSpPr>
-          <p:cNvPr id="4" name="Slide Number Placeholder 3"/>
+          <p:cNvPr id="4" name="Foliennummernplatzhalter 3"/>
           <p:cNvSpPr>
             <a:spLocks noGrp="1"/>
           </p:cNvSpPr>
           <p:nvPr>
-            <p:ph type="sldNum" sz="quarter" idx="10"/>
+            <p:ph type="sldNum" sz="quarter" idx="5"/>
           </p:nvPr>
         </p:nvSpPr>
         <p:spPr/>
@@ -2696,7 +2132,7 @@
     </p:spTree>
     <p:extLst>
       <p:ext uri="{BB962C8B-B14F-4D97-AF65-F5344CB8AC3E}">
-        <p14:creationId xmlns:p14="http://schemas.microsoft.com/office/powerpoint/2010/main" val="4049153715"/>
+        <p14:creationId xmlns:p14="http://schemas.microsoft.com/office/powerpoint/2010/main" val="1099171079"/>
       </p:ext>
     </p:extLst>
   </p:cSld>
@@ -2747,10 +2183,56 @@
         </p:nvSpPr>
         <p:spPr/>
         <p:txBody>
-          <a:bodyPr>
-            <a:normAutofit lnSpcReduction="10000"/>
-          </a:bodyPr>
+          <a:bodyPr/>
           <a:lstStyle/>
+          <a:p>
+            <a:r>
+              <a:rPr lang="en-US" dirty="0"/>
+              <a:t>Helm v3 has only component – the locally running “helm” client. It uses the active available </a:t>
+            </a:r>
+            <a:r>
+              <a:rPr lang="en-US" dirty="0" err="1"/>
+              <a:t>kube.config</a:t>
+            </a:r>
+            <a:r>
+              <a:rPr lang="en-US" dirty="0"/>
+              <a:t> context to talk to K8s. No separate setup steps are needed.</a:t>
+            </a:r>
+          </a:p>
+          <a:p>
+            <a:endParaRPr lang="en-US" dirty="0"/>
+          </a:p>
+          <a:p>
+            <a:r>
+              <a:rPr lang="en-US" dirty="0"/>
+              <a:t>To use helm, you need the pre-packaged software in so called charts. A chart is a description of how to deploy &amp; parameterize an application. This includes </a:t>
+            </a:r>
+            <a:r>
+              <a:rPr lang="en-US" dirty="0" err="1"/>
+              <a:t>yaml</a:t>
+            </a:r>
+            <a:r>
+              <a:rPr lang="en-US" dirty="0"/>
+              <a:t> templates for pods, services or </a:t>
+            </a:r>
+            <a:r>
+              <a:rPr lang="en-US" dirty="0" err="1"/>
+              <a:t>configMaps</a:t>
+            </a:r>
+            <a:r>
+              <a:rPr lang="en-US" dirty="0"/>
+              <a:t>.</a:t>
+            </a:r>
+          </a:p>
+          <a:p>
+            <a:r>
+              <a:rPr lang="en-US" dirty="0"/>
+              <a:t>Upon installation of the chart, there is a go-templating engine evaluating the given parameters and substituting variables.</a:t>
+            </a:r>
+          </a:p>
+          <a:p>
+            <a:endParaRPr lang="en-US" dirty="0"/>
+          </a:p>
           <a:p>
             <a:pPr marL="0" marR="0" lvl="0" indent="0" algn="l" defTabSz="1088776" rtl="0" eaLnBrk="1" fontAlgn="auto" latinLnBrk="0" hangingPunct="1">
               <a:lnSpc>
@@ -2771,101 +2253,45 @@
             </a:pPr>
             <a:r>
               <a:rPr lang="en-US" dirty="0"/>
-              <a:t>The power of helm lies within its templates and the ability to convert templates with values into valid </a:t>
+              <a:t>In v2, there were two components - the locally running client and the tiller-server. It was required to run “helm </a:t>
             </a:r>
             <a:r>
               <a:rPr lang="en-US" dirty="0" err="1"/>
-              <a:t>yaml</a:t>
+              <a:t>init</a:t>
             </a:r>
             <a:r>
               <a:rPr lang="en-US" dirty="0"/>
-              <a:t> files. When authoring charts this is where most of your work will end up.</a:t>
+              <a:t>”, to deploy tiller to the cluster. There was also the idea of a global/cluster-wide service to manage all charts installed to a cluster. This idea has been abandoned and helm v3 is a “client-only” tool.</a:t>
+            </a:r>
+          </a:p>
+          <a:p>
+            <a:pPr marL="0" marR="0" lvl="0" indent="0" algn="l" defTabSz="1088776" rtl="0" eaLnBrk="1" fontAlgn="auto" latinLnBrk="0" hangingPunct="1">
+              <a:lnSpc>
+                <a:spcPct val="100000"/>
+              </a:lnSpc>
+              <a:spcBef>
+                <a:spcPts val="0"/>
+              </a:spcBef>
+              <a:spcAft>
+                <a:spcPts val="0"/>
+              </a:spcAft>
+              <a:buClrTx/>
+              <a:buSzTx/>
+              <a:buFontTx/>
+              <a:buNone/>
+              <a:tabLst/>
+              <a:defRPr/>
+            </a:pPr>
+            <a:r>
+              <a:rPr lang="en-US" dirty="0"/>
+              <a:t>When using helm v2, be careful with namespaces and specify where your tiller-server should run.</a:t>
             </a:r>
           </a:p>
           <a:p>
             <a:endParaRPr lang="en-US" dirty="0"/>
           </a:p>
           <a:p>
-            <a:r>
-              <a:rPr lang="en-US" dirty="0"/>
-              <a:t>So lets take a look at the template section of a chart. In our example there are 2 config map </a:t>
-            </a:r>
-            <a:r>
-              <a:rPr lang="en-US" dirty="0" err="1"/>
-              <a:t>yaml</a:t>
-            </a:r>
-            <a:r>
-              <a:rPr lang="en-US" dirty="0"/>
-              <a:t> files. One is pretty normal and works also without helm. However it is not very flexible. The 2</a:t>
-            </a:r>
-            <a:r>
-              <a:rPr lang="en-US" baseline="30000" dirty="0"/>
-              <a:t>nd</a:t>
-            </a:r>
-            <a:r>
-              <a:rPr lang="en-US" dirty="0"/>
-              <a:t> file contains references to helm variables – indicated by {{ }}. Helm renders the templates and converts them into valid </a:t>
-            </a:r>
-            <a:r>
-              <a:rPr lang="en-US" dirty="0" err="1"/>
-              <a:t>yaml</a:t>
-            </a:r>
-            <a:r>
-              <a:rPr lang="en-US" dirty="0"/>
-              <a:t>.</a:t>
-            </a:r>
-          </a:p>
-          <a:p>
             <a:endParaRPr lang="en-US" dirty="0"/>
-          </a:p>
-          <a:p>
-            <a:r>
-              <a:rPr lang="en-US" dirty="0"/>
-              <a:t>There are build in variables .Release.* and custom values .Values.* . Additionally you can define functions and include / execute them. The definitions are stored in the _</a:t>
-            </a:r>
-            <a:r>
-              <a:rPr lang="en-US" dirty="0" err="1"/>
-              <a:t>helpers.tpl</a:t>
-            </a:r>
-            <a:r>
-              <a:rPr lang="en-US" dirty="0"/>
-              <a:t>. The demo-chart makes use of these, so take a look around there.</a:t>
-            </a:r>
-          </a:p>
-          <a:p>
-            <a:endParaRPr lang="en-US" dirty="0"/>
-          </a:p>
-          <a:p>
-            <a:r>
-              <a:rPr lang="en-US" dirty="0"/>
-              <a:t>To check, if the chart is ok, use “helm lint”. It will point out </a:t>
-            </a:r>
-            <a:r>
-              <a:rPr lang="en-US" dirty="0" err="1"/>
-              <a:t>yaml</a:t>
-            </a:r>
-            <a:r>
-              <a:rPr lang="en-US" dirty="0"/>
-              <a:t> errors and much more.</a:t>
-            </a:r>
-          </a:p>
-          <a:p>
-            <a:r>
-              <a:rPr lang="en-US" dirty="0"/>
-              <a:t>To check, how a chart would actually look like once deployed, use the --dry-run flag in combination with --debug</a:t>
-            </a:r>
-          </a:p>
-          <a:p>
-            <a:endParaRPr lang="en-US" dirty="0"/>
-          </a:p>
-          <a:p>
-            <a:endParaRPr lang="en-US" dirty="0"/>
-          </a:p>
-          <a:p>
-            <a:r>
-              <a:rPr lang="en-US" dirty="0"/>
-              <a:t>For details, check https://github.com/kubernetes/helm/tree/master/docs</a:t>
-            </a:r>
           </a:p>
         </p:txBody>
       </p:sp>
@@ -2885,18 +2311,18 @@
           <a:lstStyle/>
           <a:p>
             <a:fld id="{7D8C2C35-2B8A-446E-BEC0-FD36716C29AC}" type="slidenum">
-              <a:rPr lang="de-DE" smtClean="0"/>
+              <a:rPr lang="en-US" smtClean="0"/>
               <a:pPr/>
-              <a:t>9</a:t>
+              <a:t>7</a:t>
             </a:fld>
-            <a:endParaRPr lang="de-DE" dirty="0"/>
+            <a:endParaRPr lang="en-US" dirty="0"/>
           </a:p>
         </p:txBody>
       </p:sp>
     </p:spTree>
     <p:extLst>
       <p:ext uri="{BB962C8B-B14F-4D97-AF65-F5344CB8AC3E}">
-        <p14:creationId xmlns:p14="http://schemas.microsoft.com/office/powerpoint/2010/main" val="1430307665"/>
+        <p14:creationId xmlns:p14="http://schemas.microsoft.com/office/powerpoint/2010/main" val="1771773811"/>
       </p:ext>
     </p:extLst>
   </p:cSld>
@@ -2950,6 +2376,103 @@
           <a:bodyPr/>
           <a:lstStyle/>
           <a:p>
+            <a:r>
+              <a:rPr lang="en-US" dirty="0"/>
+              <a:t>Helm v3 has only component – the locally running “helm” client. </a:t>
+            </a:r>
+          </a:p>
+          <a:p>
+            <a:endParaRPr lang="en-US" dirty="0"/>
+          </a:p>
+          <a:p>
+            <a:r>
+              <a:rPr lang="en-US" dirty="0"/>
+              <a:t>To use helm, you need the pre-packaged software in so called charts. A chart is a description of how to deploy &amp; parameterize an application. This includes </a:t>
+            </a:r>
+            <a:r>
+              <a:rPr lang="en-US" dirty="0" err="1"/>
+              <a:t>yaml</a:t>
+            </a:r>
+            <a:r>
+              <a:rPr lang="en-US" dirty="0"/>
+              <a:t> templates for pods, services or </a:t>
+            </a:r>
+            <a:r>
+              <a:rPr lang="en-US" dirty="0" err="1"/>
+              <a:t>configMaps</a:t>
+            </a:r>
+            <a:r>
+              <a:rPr lang="en-US" dirty="0"/>
+              <a:t>.</a:t>
+            </a:r>
+          </a:p>
+          <a:p>
+            <a:r>
+              <a:rPr lang="en-US" dirty="0"/>
+              <a:t>Upon installation of the chart, there is a go-templating engine evaluating the given parameters and substituting variables.</a:t>
+            </a:r>
+          </a:p>
+          <a:p>
+            <a:endParaRPr lang="en-US" dirty="0"/>
+          </a:p>
+          <a:p>
+            <a:pPr marL="0" marR="0" lvl="0" indent="0" algn="l" defTabSz="1088776" rtl="0" eaLnBrk="1" fontAlgn="auto" latinLnBrk="0" hangingPunct="1">
+              <a:lnSpc>
+                <a:spcPct val="100000"/>
+              </a:lnSpc>
+              <a:spcBef>
+                <a:spcPts val="0"/>
+              </a:spcBef>
+              <a:spcAft>
+                <a:spcPts val="0"/>
+              </a:spcAft>
+              <a:buClrTx/>
+              <a:buSzTx/>
+              <a:buFontTx/>
+              <a:buNone/>
+              <a:tabLst/>
+              <a:defRPr/>
+            </a:pPr>
+            <a:r>
+              <a:rPr lang="en-US" dirty="0"/>
+              <a:t>In v2, there were two components - the locally running client and the tiller-server. It was required to run “helm </a:t>
+            </a:r>
+            <a:r>
+              <a:rPr lang="en-US" dirty="0" err="1"/>
+              <a:t>init</a:t>
+            </a:r>
+            <a:r>
+              <a:rPr lang="en-US" dirty="0"/>
+              <a:t>”, to deploy tiller to the cluster. There was also the idea of a global/cluster-wide service to manage all charts installed to a cluster. This idea has been abandoned and helm v3 is a “client-only” tool.</a:t>
+            </a:r>
+          </a:p>
+          <a:p>
+            <a:pPr marL="0" marR="0" lvl="0" indent="0" algn="l" defTabSz="1088776" rtl="0" eaLnBrk="1" fontAlgn="auto" latinLnBrk="0" hangingPunct="1">
+              <a:lnSpc>
+                <a:spcPct val="100000"/>
+              </a:lnSpc>
+              <a:spcBef>
+                <a:spcPts val="0"/>
+              </a:spcBef>
+              <a:spcAft>
+                <a:spcPts val="0"/>
+              </a:spcAft>
+              <a:buClrTx/>
+              <a:buSzTx/>
+              <a:buFontTx/>
+              <a:buNone/>
+              <a:tabLst/>
+              <a:defRPr/>
+            </a:pPr>
+            <a:r>
+              <a:rPr lang="en-US" dirty="0"/>
+              <a:t>When using helm v2, be careful with namespaces and specify where your tiller-server should run.</a:t>
+            </a:r>
+          </a:p>
+          <a:p>
+            <a:endParaRPr lang="en-US" dirty="0"/>
+          </a:p>
+          <a:p>
             <a:endParaRPr lang="en-US" dirty="0"/>
           </a:p>
         </p:txBody>
@@ -2970,18 +2493,18 @@
           <a:lstStyle/>
           <a:p>
             <a:fld id="{7D8C2C35-2B8A-446E-BEC0-FD36716C29AC}" type="slidenum">
-              <a:rPr lang="de-DE" smtClean="0"/>
+              <a:rPr lang="en-US" smtClean="0"/>
               <a:pPr/>
-              <a:t>10</a:t>
+              <a:t>8</a:t>
             </a:fld>
-            <a:endParaRPr lang="de-DE" dirty="0"/>
+            <a:endParaRPr lang="en-US" dirty="0"/>
           </a:p>
         </p:txBody>
       </p:sp>
     </p:spTree>
     <p:extLst>
       <p:ext uri="{BB962C8B-B14F-4D97-AF65-F5344CB8AC3E}">
-        <p14:creationId xmlns:p14="http://schemas.microsoft.com/office/powerpoint/2010/main" val="1124543534"/>
+        <p14:creationId xmlns:p14="http://schemas.microsoft.com/office/powerpoint/2010/main" val="3681972960"/>
       </p:ext>
     </p:extLst>
   </p:cSld>
@@ -3037,95 +2560,753 @@
           <a:p>
             <a:r>
               <a:rPr lang="en-US" dirty="0"/>
-              <a:t>{{ }} triggers the go templating engine</a:t>
-            </a:r>
-          </a:p>
-          <a:p>
+              <a:t>Helm charts can be stored locally or in a repository. The default “stable” repo available in helm v2 has to be added manually with helm v3 (as of now).</a:t>
+            </a:r>
+          </a:p>
+          <a:p>
+            <a:pPr marL="0" marR="0" lvl="0" indent="0" algn="l" defTabSz="1088776" rtl="0" eaLnBrk="1" fontAlgn="auto" latinLnBrk="0" hangingPunct="1">
+              <a:lnSpc>
+                <a:spcPct val="100000"/>
+              </a:lnSpc>
+              <a:spcBef>
+                <a:spcPts val="0"/>
+              </a:spcBef>
+              <a:spcAft>
+                <a:spcPts val="0"/>
+              </a:spcAft>
+              <a:buClrTx/>
+              <a:buSzTx/>
+              <a:buFontTx/>
+              <a:buNone/>
+              <a:tabLst/>
+              <a:defRPr/>
+            </a:pPr>
             <a:r>
               <a:rPr lang="en-US" dirty="0"/>
-              <a:t>.Values is a reference to an object with all keys in the </a:t>
-            </a:r>
-            <a:r>
-              <a:rPr lang="en-US" dirty="0" err="1"/>
-              <a:t>values.yaml</a:t>
-            </a:r>
-            <a:r>
-              <a:rPr lang="en-US" dirty="0"/>
-              <a:t> file</a:t>
-            </a:r>
-          </a:p>
-          <a:p>
-            <a:r>
-              <a:rPr lang="en-US" dirty="0"/>
+              <a:t>Run “helm </a:t>
+            </a:r>
+            <a:r>
+              <a:rPr lang="de-DE" sz="1400" b="0" kern="1200" dirty="0" err="1">
+                <a:solidFill>
+                  <a:schemeClr val="tx1"/>
+                </a:solidFill>
+                <a:effectLst/>
+                <a:latin typeface="+mn-lt"/>
+                <a:ea typeface="+mn-ea"/>
+                <a:cs typeface="+mn-cs"/>
+              </a:rPr>
+              <a:t>repo</a:t>
+            </a:r>
+            <a:r>
+              <a:rPr lang="de-DE" sz="1400" b="0" kern="1200" dirty="0">
+                <a:solidFill>
+                  <a:schemeClr val="tx1"/>
+                </a:solidFill>
+                <a:effectLst/>
+                <a:latin typeface="+mn-lt"/>
+                <a:ea typeface="+mn-ea"/>
+                <a:cs typeface="+mn-cs"/>
+              </a:rPr>
+              <a:t> </a:t>
+            </a:r>
+            <a:r>
+              <a:rPr lang="de-DE" sz="1400" b="0" kern="1200" dirty="0" err="1">
+                <a:solidFill>
+                  <a:schemeClr val="tx1"/>
+                </a:solidFill>
+                <a:effectLst/>
+                <a:latin typeface="+mn-lt"/>
+                <a:ea typeface="+mn-ea"/>
+                <a:cs typeface="+mn-cs"/>
+              </a:rPr>
+              <a:t>add</a:t>
+            </a:r>
+            <a:r>
+              <a:rPr lang="de-DE" sz="1400" b="0" kern="1200" dirty="0">
+                <a:solidFill>
+                  <a:schemeClr val="tx1"/>
+                </a:solidFill>
+                <a:effectLst/>
+                <a:latin typeface="+mn-lt"/>
+                <a:ea typeface="+mn-ea"/>
+                <a:cs typeface="+mn-cs"/>
+              </a:rPr>
+              <a:t> </a:t>
+            </a:r>
+            <a:r>
+              <a:rPr lang="de-DE" sz="1400" b="0" kern="1200" dirty="0" err="1">
+                <a:solidFill>
+                  <a:schemeClr val="tx1"/>
+                </a:solidFill>
+                <a:effectLst/>
+                <a:latin typeface="+mn-lt"/>
+                <a:ea typeface="+mn-ea"/>
+                <a:cs typeface="+mn-cs"/>
+              </a:rPr>
+              <a:t>stable</a:t>
+            </a:r>
+            <a:r>
+              <a:rPr lang="de-DE" sz="1400" b="0" kern="1200" dirty="0">
+                <a:solidFill>
+                  <a:schemeClr val="tx1"/>
+                </a:solidFill>
+                <a:effectLst/>
+                <a:latin typeface="+mn-lt"/>
+                <a:ea typeface="+mn-ea"/>
+                <a:cs typeface="+mn-cs"/>
+              </a:rPr>
+              <a:t> https://kubernetes-charts.storage.googleapis.com/“ </a:t>
+            </a:r>
+            <a:r>
+              <a:rPr lang="de-DE" sz="1400" b="0" kern="1200" dirty="0" err="1">
+                <a:solidFill>
+                  <a:schemeClr val="tx1"/>
+                </a:solidFill>
+                <a:effectLst/>
+                <a:latin typeface="+mn-lt"/>
+                <a:ea typeface="+mn-ea"/>
+                <a:cs typeface="+mn-cs"/>
+              </a:rPr>
+              <a:t>to</a:t>
+            </a:r>
+            <a:r>
+              <a:rPr lang="de-DE" sz="1400" b="0" kern="1200" dirty="0">
+                <a:solidFill>
+                  <a:schemeClr val="tx1"/>
+                </a:solidFill>
+                <a:effectLst/>
+                <a:latin typeface="+mn-lt"/>
+                <a:ea typeface="+mn-ea"/>
+                <a:cs typeface="+mn-cs"/>
+              </a:rPr>
+              <a:t> </a:t>
+            </a:r>
+            <a:r>
+              <a:rPr lang="de-DE" sz="1400" b="0" kern="1200" dirty="0" err="1">
+                <a:solidFill>
+                  <a:schemeClr val="tx1"/>
+                </a:solidFill>
+                <a:effectLst/>
+                <a:latin typeface="+mn-lt"/>
+                <a:ea typeface="+mn-ea"/>
+                <a:cs typeface="+mn-cs"/>
+              </a:rPr>
+              <a:t>add</a:t>
+            </a:r>
+            <a:r>
+              <a:rPr lang="de-DE" sz="1400" b="0" kern="1200" dirty="0">
+                <a:solidFill>
+                  <a:schemeClr val="tx1"/>
+                </a:solidFill>
+                <a:effectLst/>
+                <a:latin typeface="+mn-lt"/>
+                <a:ea typeface="+mn-ea"/>
+                <a:cs typeface="+mn-cs"/>
+              </a:rPr>
+              <a:t> </a:t>
+            </a:r>
+            <a:r>
+              <a:rPr lang="de-DE" sz="1400" b="0" kern="1200" dirty="0" err="1">
+                <a:solidFill>
+                  <a:schemeClr val="tx1"/>
+                </a:solidFill>
+                <a:effectLst/>
+                <a:latin typeface="+mn-lt"/>
+                <a:ea typeface="+mn-ea"/>
+                <a:cs typeface="+mn-cs"/>
+              </a:rPr>
+              <a:t>make</a:t>
+            </a:r>
+            <a:r>
+              <a:rPr lang="de-DE" sz="1400" b="0" kern="1200" dirty="0">
+                <a:solidFill>
+                  <a:schemeClr val="tx1"/>
+                </a:solidFill>
+                <a:effectLst/>
+                <a:latin typeface="+mn-lt"/>
+                <a:ea typeface="+mn-ea"/>
+                <a:cs typeface="+mn-cs"/>
+              </a:rPr>
+              <a:t> </a:t>
+            </a:r>
+            <a:r>
+              <a:rPr lang="de-DE" sz="1400" b="0" kern="1200" dirty="0" err="1">
+                <a:solidFill>
+                  <a:schemeClr val="tx1"/>
+                </a:solidFill>
+                <a:effectLst/>
+                <a:latin typeface="+mn-lt"/>
+                <a:ea typeface="+mn-ea"/>
+                <a:cs typeface="+mn-cs"/>
+              </a:rPr>
+              <a:t>it</a:t>
+            </a:r>
+            <a:r>
+              <a:rPr lang="de-DE" sz="1400" b="0" kern="1200" dirty="0">
+                <a:solidFill>
+                  <a:schemeClr val="tx1"/>
+                </a:solidFill>
+                <a:effectLst/>
+                <a:latin typeface="+mn-lt"/>
+                <a:ea typeface="+mn-ea"/>
+                <a:cs typeface="+mn-cs"/>
+              </a:rPr>
+              <a:t> </a:t>
+            </a:r>
+            <a:r>
+              <a:rPr lang="de-DE" sz="1400" b="0" kern="1200" dirty="0" err="1">
+                <a:solidFill>
+                  <a:schemeClr val="tx1"/>
+                </a:solidFill>
+                <a:effectLst/>
+                <a:latin typeface="+mn-lt"/>
+                <a:ea typeface="+mn-ea"/>
+                <a:cs typeface="+mn-cs"/>
+              </a:rPr>
+              <a:t>available</a:t>
+            </a:r>
+            <a:r>
+              <a:rPr lang="de-DE" sz="1400" b="0" kern="1200" dirty="0">
+                <a:solidFill>
+                  <a:schemeClr val="tx1"/>
+                </a:solidFill>
+                <a:effectLst/>
+                <a:latin typeface="+mn-lt"/>
+                <a:ea typeface="+mn-ea"/>
+                <a:cs typeface="+mn-cs"/>
+              </a:rPr>
+              <a:t> </a:t>
+            </a:r>
+            <a:r>
+              <a:rPr lang="de-DE" sz="1400" b="0" kern="1200" dirty="0" err="1">
+                <a:solidFill>
+                  <a:schemeClr val="tx1"/>
+                </a:solidFill>
+                <a:effectLst/>
+                <a:latin typeface="+mn-lt"/>
+                <a:ea typeface="+mn-ea"/>
+                <a:cs typeface="+mn-cs"/>
+              </a:rPr>
+              <a:t>to</a:t>
+            </a:r>
+            <a:r>
+              <a:rPr lang="de-DE" sz="1400" b="0" kern="1200" dirty="0">
+                <a:solidFill>
+                  <a:schemeClr val="tx1"/>
+                </a:solidFill>
+                <a:effectLst/>
+                <a:latin typeface="+mn-lt"/>
+                <a:ea typeface="+mn-ea"/>
+                <a:cs typeface="+mn-cs"/>
+              </a:rPr>
+              <a:t> </a:t>
+            </a:r>
+            <a:r>
+              <a:rPr lang="de-DE" sz="1400" b="0" kern="1200" dirty="0" err="1">
+                <a:solidFill>
+                  <a:schemeClr val="tx1"/>
+                </a:solidFill>
+                <a:effectLst/>
+                <a:latin typeface="+mn-lt"/>
+                <a:ea typeface="+mn-ea"/>
+                <a:cs typeface="+mn-cs"/>
+              </a:rPr>
+              <a:t>your</a:t>
+            </a:r>
+            <a:r>
+              <a:rPr lang="de-DE" sz="1400" b="0" kern="1200" dirty="0">
+                <a:solidFill>
+                  <a:schemeClr val="tx1"/>
+                </a:solidFill>
+                <a:effectLst/>
+                <a:latin typeface="+mn-lt"/>
+                <a:ea typeface="+mn-ea"/>
+                <a:cs typeface="+mn-cs"/>
+              </a:rPr>
+              <a:t> </a:t>
+            </a:r>
+            <a:r>
+              <a:rPr lang="de-DE" sz="1400" b="0" kern="1200" dirty="0" err="1">
+                <a:solidFill>
+                  <a:schemeClr val="tx1"/>
+                </a:solidFill>
+                <a:effectLst/>
+                <a:latin typeface="+mn-lt"/>
+                <a:ea typeface="+mn-ea"/>
+                <a:cs typeface="+mn-cs"/>
+              </a:rPr>
+              <a:t>helm</a:t>
+            </a:r>
+            <a:r>
+              <a:rPr lang="de-DE" sz="1400" b="0" kern="1200" dirty="0">
+                <a:solidFill>
+                  <a:schemeClr val="tx1"/>
+                </a:solidFill>
+                <a:effectLst/>
+                <a:latin typeface="+mn-lt"/>
+                <a:ea typeface="+mn-ea"/>
+                <a:cs typeface="+mn-cs"/>
+              </a:rPr>
+              <a:t> </a:t>
+            </a:r>
+            <a:r>
+              <a:rPr lang="de-DE" sz="1400" b="0" kern="1200" dirty="0" err="1">
+                <a:solidFill>
+                  <a:schemeClr val="tx1"/>
+                </a:solidFill>
+                <a:effectLst/>
+                <a:latin typeface="+mn-lt"/>
+                <a:ea typeface="+mn-ea"/>
+                <a:cs typeface="+mn-cs"/>
+              </a:rPr>
+              <a:t>installation</a:t>
+            </a:r>
+            <a:r>
+              <a:rPr lang="de-DE" sz="1400" b="0" kern="1200" dirty="0">
+                <a:solidFill>
+                  <a:schemeClr val="tx1"/>
+                </a:solidFill>
+                <a:effectLst/>
+                <a:latin typeface="+mn-lt"/>
+                <a:ea typeface="+mn-ea"/>
+                <a:cs typeface="+mn-cs"/>
+              </a:rPr>
               <a:t>.</a:t>
             </a:r>
-            <a:r>
-              <a:rPr lang="en-US" dirty="0" err="1"/>
-              <a:t>myMessage</a:t>
-            </a:r>
-            <a:r>
-              <a:rPr lang="en-US" dirty="0"/>
-              <a:t> is the reference to the key “</a:t>
-            </a:r>
-            <a:r>
-              <a:rPr lang="en-US" dirty="0" err="1"/>
-              <a:t>myMessage</a:t>
-            </a:r>
-            <a:r>
-              <a:rPr lang="en-US" dirty="0"/>
-              <a:t>” in .Values</a:t>
-            </a:r>
-          </a:p>
-          <a:p>
-            <a:endParaRPr lang="en-US" dirty="0"/>
-          </a:p>
-          <a:p>
-            <a:r>
-              <a:rPr lang="en-US" dirty="0"/>
-              <a:t>In case of nested values such as example below, use .</a:t>
-            </a:r>
-            <a:r>
-              <a:rPr lang="en-US" dirty="0" err="1"/>
-              <a:t>Values.message.greeting</a:t>
-            </a:r>
-            <a:r>
-              <a:rPr lang="en-US" dirty="0"/>
-              <a:t> or .to </a:t>
-            </a:r>
-            <a:r>
-              <a:rPr lang="en-US" dirty="0" err="1"/>
+          </a:p>
+          <a:p>
+            <a:pPr marL="0" marR="0" lvl="0" indent="0" algn="l" defTabSz="1088776" rtl="0" eaLnBrk="1" fontAlgn="auto" latinLnBrk="0" hangingPunct="1">
+              <a:lnSpc>
+                <a:spcPct val="100000"/>
+              </a:lnSpc>
+              <a:spcBef>
+                <a:spcPts val="0"/>
+              </a:spcBef>
+              <a:spcAft>
+                <a:spcPts val="0"/>
+              </a:spcAft>
+              <a:buClrTx/>
+              <a:buSzTx/>
+              <a:buFontTx/>
+              <a:buNone/>
+              <a:tabLst/>
+              <a:defRPr/>
+            </a:pPr>
+            <a:endParaRPr lang="de-DE" sz="1400" b="0" kern="1200" dirty="0">
+              <a:solidFill>
+                <a:schemeClr val="tx1"/>
+              </a:solidFill>
+              <a:effectLst/>
+              <a:latin typeface="+mn-lt"/>
+              <a:ea typeface="+mn-ea"/>
+              <a:cs typeface="+mn-cs"/>
+            </a:endParaRPr>
+          </a:p>
+          <a:p>
+            <a:pPr marL="0" marR="0" lvl="0" indent="0" algn="l" defTabSz="1088776" rtl="0" eaLnBrk="1" fontAlgn="auto" latinLnBrk="0" hangingPunct="1">
+              <a:lnSpc>
+                <a:spcPct val="100000"/>
+              </a:lnSpc>
+              <a:spcBef>
+                <a:spcPts val="0"/>
+              </a:spcBef>
+              <a:spcAft>
+                <a:spcPts val="0"/>
+              </a:spcAft>
+              <a:buClrTx/>
+              <a:buSzTx/>
+              <a:buFontTx/>
+              <a:buNone/>
+              <a:tabLst/>
+              <a:defRPr/>
+            </a:pPr>
+            <a:r>
+              <a:rPr lang="de-DE" sz="1400" b="0" kern="1200" dirty="0" err="1">
+                <a:solidFill>
+                  <a:schemeClr val="tx1"/>
+                </a:solidFill>
+                <a:effectLst/>
+                <a:latin typeface="+mn-lt"/>
+                <a:ea typeface="+mn-ea"/>
+                <a:cs typeface="+mn-cs"/>
+              </a:rPr>
+              <a:t>Once</a:t>
+            </a:r>
+            <a:r>
+              <a:rPr lang="de-DE" sz="1400" b="0" kern="1200" dirty="0">
+                <a:solidFill>
+                  <a:schemeClr val="tx1"/>
+                </a:solidFill>
+                <a:effectLst/>
+                <a:latin typeface="+mn-lt"/>
+                <a:ea typeface="+mn-ea"/>
+                <a:cs typeface="+mn-cs"/>
+              </a:rPr>
+              <a:t> </a:t>
+            </a:r>
+            <a:r>
+              <a:rPr lang="de-DE" sz="1400" b="0" kern="1200" dirty="0" err="1">
+                <a:solidFill>
+                  <a:schemeClr val="tx1"/>
+                </a:solidFill>
+                <a:effectLst/>
+                <a:latin typeface="+mn-lt"/>
+                <a:ea typeface="+mn-ea"/>
+                <a:cs typeface="+mn-cs"/>
+              </a:rPr>
+              <a:t>the</a:t>
+            </a:r>
+            <a:r>
+              <a:rPr lang="de-DE" sz="1400" b="0" kern="1200" dirty="0">
+                <a:solidFill>
+                  <a:schemeClr val="tx1"/>
+                </a:solidFill>
+                <a:effectLst/>
+                <a:latin typeface="+mn-lt"/>
+                <a:ea typeface="+mn-ea"/>
+                <a:cs typeface="+mn-cs"/>
+              </a:rPr>
+              <a:t> </a:t>
+            </a:r>
+            <a:r>
+              <a:rPr lang="de-DE" sz="1400" b="0" kern="1200" dirty="0" err="1">
+                <a:solidFill>
+                  <a:schemeClr val="tx1"/>
+                </a:solidFill>
+                <a:effectLst/>
+                <a:latin typeface="+mn-lt"/>
+                <a:ea typeface="+mn-ea"/>
+                <a:cs typeface="+mn-cs"/>
+              </a:rPr>
+              <a:t>repo</a:t>
+            </a:r>
+            <a:r>
+              <a:rPr lang="de-DE" sz="1400" b="0" kern="1200" dirty="0">
+                <a:solidFill>
+                  <a:schemeClr val="tx1"/>
+                </a:solidFill>
+                <a:effectLst/>
+                <a:latin typeface="+mn-lt"/>
+                <a:ea typeface="+mn-ea"/>
+                <a:cs typeface="+mn-cs"/>
+              </a:rPr>
+              <a:t> is </a:t>
+            </a:r>
+            <a:r>
+              <a:rPr lang="de-DE" sz="1400" b="0" kern="1200" dirty="0" err="1">
+                <a:solidFill>
+                  <a:schemeClr val="tx1"/>
+                </a:solidFill>
+                <a:effectLst/>
+                <a:latin typeface="+mn-lt"/>
+                <a:ea typeface="+mn-ea"/>
+                <a:cs typeface="+mn-cs"/>
+              </a:rPr>
+              <a:t>available</a:t>
+            </a:r>
+            <a:r>
+              <a:rPr lang="de-DE" sz="1400" b="0" kern="1200" dirty="0">
+                <a:solidFill>
+                  <a:schemeClr val="tx1"/>
+                </a:solidFill>
+                <a:effectLst/>
+                <a:latin typeface="+mn-lt"/>
+                <a:ea typeface="+mn-ea"/>
+                <a:cs typeface="+mn-cs"/>
+              </a:rPr>
+              <a:t> „</a:t>
+            </a:r>
+            <a:r>
+              <a:rPr lang="de-DE" sz="1400" b="0" kern="1200" dirty="0" err="1">
+                <a:solidFill>
+                  <a:schemeClr val="tx1"/>
+                </a:solidFill>
+                <a:effectLst/>
+                <a:latin typeface="+mn-lt"/>
+                <a:ea typeface="+mn-ea"/>
+                <a:cs typeface="+mn-cs"/>
+              </a:rPr>
+              <a:t>helm</a:t>
+            </a:r>
+            <a:r>
+              <a:rPr lang="de-DE" sz="1400" b="0" kern="1200" dirty="0">
+                <a:solidFill>
+                  <a:schemeClr val="tx1"/>
+                </a:solidFill>
+                <a:effectLst/>
+                <a:latin typeface="+mn-lt"/>
+                <a:ea typeface="+mn-ea"/>
+                <a:cs typeface="+mn-cs"/>
+              </a:rPr>
+              <a:t> </a:t>
+            </a:r>
+            <a:r>
+              <a:rPr lang="de-DE" sz="1400" b="0" kern="1200" dirty="0" err="1">
+                <a:solidFill>
+                  <a:schemeClr val="tx1"/>
+                </a:solidFill>
+                <a:effectLst/>
+                <a:latin typeface="+mn-lt"/>
+                <a:ea typeface="+mn-ea"/>
+                <a:cs typeface="+mn-cs"/>
+              </a:rPr>
+              <a:t>search</a:t>
+            </a:r>
+            <a:r>
+              <a:rPr lang="de-DE" sz="1400" b="0" kern="1200" dirty="0">
+                <a:solidFill>
+                  <a:schemeClr val="tx1"/>
+                </a:solidFill>
+                <a:effectLst/>
+                <a:latin typeface="+mn-lt"/>
+                <a:ea typeface="+mn-ea"/>
+                <a:cs typeface="+mn-cs"/>
+              </a:rPr>
+              <a:t> </a:t>
+            </a:r>
+            <a:r>
+              <a:rPr lang="de-DE" sz="1400" b="0" kern="1200" dirty="0" err="1">
+                <a:solidFill>
+                  <a:schemeClr val="tx1"/>
+                </a:solidFill>
+                <a:effectLst/>
+                <a:latin typeface="+mn-lt"/>
+                <a:ea typeface="+mn-ea"/>
+                <a:cs typeface="+mn-cs"/>
+              </a:rPr>
+              <a:t>repo</a:t>
+            </a:r>
+            <a:r>
+              <a:rPr lang="de-DE" sz="1400" b="0" kern="1200" dirty="0">
+                <a:solidFill>
+                  <a:schemeClr val="tx1"/>
+                </a:solidFill>
+                <a:effectLst/>
+                <a:latin typeface="+mn-lt"/>
+                <a:ea typeface="+mn-ea"/>
+                <a:cs typeface="+mn-cs"/>
+              </a:rPr>
+              <a:t> &lt;</a:t>
+            </a:r>
+            <a:r>
+              <a:rPr lang="de-DE" sz="1400" b="0" kern="1200" dirty="0" err="1">
+                <a:solidFill>
+                  <a:schemeClr val="tx1"/>
+                </a:solidFill>
+                <a:effectLst/>
+                <a:latin typeface="+mn-lt"/>
+                <a:ea typeface="+mn-ea"/>
+                <a:cs typeface="+mn-cs"/>
+              </a:rPr>
+              <a:t>term</a:t>
+            </a:r>
+            <a:r>
+              <a:rPr lang="de-DE" sz="1400" b="0" kern="1200" dirty="0">
+                <a:solidFill>
+                  <a:schemeClr val="tx1"/>
+                </a:solidFill>
+                <a:effectLst/>
+                <a:latin typeface="+mn-lt"/>
+                <a:ea typeface="+mn-ea"/>
+                <a:cs typeface="+mn-cs"/>
+              </a:rPr>
+              <a:t>&gt;“ will </a:t>
+            </a:r>
+            <a:r>
+              <a:rPr lang="de-DE" sz="1400" b="0" kern="1200" dirty="0" err="1">
+                <a:solidFill>
+                  <a:schemeClr val="tx1"/>
+                </a:solidFill>
+                <a:effectLst/>
+                <a:latin typeface="+mn-lt"/>
+                <a:ea typeface="+mn-ea"/>
+                <a:cs typeface="+mn-cs"/>
+              </a:rPr>
+              <a:t>allow</a:t>
+            </a:r>
+            <a:r>
+              <a:rPr lang="de-DE" sz="1400" b="0" kern="1200" dirty="0">
+                <a:solidFill>
+                  <a:schemeClr val="tx1"/>
+                </a:solidFill>
+                <a:effectLst/>
+                <a:latin typeface="+mn-lt"/>
+                <a:ea typeface="+mn-ea"/>
+                <a:cs typeface="+mn-cs"/>
+              </a:rPr>
+              <a:t> </a:t>
+            </a:r>
+            <a:r>
+              <a:rPr lang="de-DE" sz="1400" b="0" kern="1200" dirty="0" err="1">
+                <a:solidFill>
+                  <a:schemeClr val="tx1"/>
+                </a:solidFill>
+                <a:effectLst/>
+                <a:latin typeface="+mn-lt"/>
+                <a:ea typeface="+mn-ea"/>
+                <a:cs typeface="+mn-cs"/>
+              </a:rPr>
               <a:t>to</a:t>
             </a:r>
             <a:r>
-              <a:rPr lang="en-US" dirty="0"/>
-              <a:t> reference the </a:t>
-            </a:r>
-            <a:r>
-              <a:rPr lang="en-US" dirty="0" err="1"/>
-              <a:t>acutal</a:t>
-            </a:r>
-            <a:r>
-              <a:rPr lang="en-US" dirty="0"/>
-              <a:t> key</a:t>
-            </a:r>
-          </a:p>
-          <a:p>
-            <a:r>
-              <a:rPr lang="en-US" dirty="0"/>
-              <a:t>message:</a:t>
-            </a:r>
-          </a:p>
-          <a:p>
-            <a:r>
-              <a:rPr lang="en-US" dirty="0"/>
-              <a:t>  greeting: “hello”</a:t>
-            </a:r>
-          </a:p>
-          <a:p>
-            <a:r>
-              <a:rPr lang="en-US" dirty="0"/>
-              <a:t>  to: “course”</a:t>
-            </a:r>
+              <a:rPr lang="de-DE" sz="1400" b="0" kern="1200" dirty="0">
+                <a:solidFill>
+                  <a:schemeClr val="tx1"/>
+                </a:solidFill>
+                <a:effectLst/>
+                <a:latin typeface="+mn-lt"/>
+                <a:ea typeface="+mn-ea"/>
+                <a:cs typeface="+mn-cs"/>
+              </a:rPr>
+              <a:t> </a:t>
+            </a:r>
+            <a:r>
+              <a:rPr lang="de-DE" sz="1400" b="0" kern="1200" dirty="0" err="1">
+                <a:solidFill>
+                  <a:schemeClr val="tx1"/>
+                </a:solidFill>
+                <a:effectLst/>
+                <a:latin typeface="+mn-lt"/>
+                <a:ea typeface="+mn-ea"/>
+                <a:cs typeface="+mn-cs"/>
+              </a:rPr>
+              <a:t>look</a:t>
+            </a:r>
+            <a:r>
+              <a:rPr lang="de-DE" sz="1400" b="0" kern="1200" dirty="0">
+                <a:solidFill>
+                  <a:schemeClr val="tx1"/>
+                </a:solidFill>
+                <a:effectLst/>
+                <a:latin typeface="+mn-lt"/>
+                <a:ea typeface="+mn-ea"/>
+                <a:cs typeface="+mn-cs"/>
+              </a:rPr>
+              <a:t> </a:t>
+            </a:r>
+            <a:r>
+              <a:rPr lang="de-DE" sz="1400" b="0" kern="1200" dirty="0" err="1">
+                <a:solidFill>
+                  <a:schemeClr val="tx1"/>
+                </a:solidFill>
+                <a:effectLst/>
+                <a:latin typeface="+mn-lt"/>
+                <a:ea typeface="+mn-ea"/>
+                <a:cs typeface="+mn-cs"/>
+              </a:rPr>
+              <a:t>for</a:t>
+            </a:r>
+            <a:r>
+              <a:rPr lang="de-DE" sz="1400" b="0" kern="1200" dirty="0">
+                <a:solidFill>
+                  <a:schemeClr val="tx1"/>
+                </a:solidFill>
+                <a:effectLst/>
+                <a:latin typeface="+mn-lt"/>
+                <a:ea typeface="+mn-ea"/>
+                <a:cs typeface="+mn-cs"/>
+              </a:rPr>
+              <a:t> </a:t>
+            </a:r>
+            <a:r>
+              <a:rPr lang="de-DE" sz="1400" b="0" kern="1200" dirty="0" err="1">
+                <a:solidFill>
+                  <a:schemeClr val="tx1"/>
+                </a:solidFill>
+                <a:effectLst/>
+                <a:latin typeface="+mn-lt"/>
+                <a:ea typeface="+mn-ea"/>
+                <a:cs typeface="+mn-cs"/>
+              </a:rPr>
+              <a:t>charts</a:t>
+            </a:r>
+            <a:r>
+              <a:rPr lang="de-DE" sz="1400" b="0" kern="1200" dirty="0">
+                <a:solidFill>
+                  <a:schemeClr val="tx1"/>
+                </a:solidFill>
+                <a:effectLst/>
+                <a:latin typeface="+mn-lt"/>
+                <a:ea typeface="+mn-ea"/>
+                <a:cs typeface="+mn-cs"/>
+              </a:rPr>
+              <a:t>. Helm hub (</a:t>
+            </a:r>
+            <a:r>
+              <a:rPr lang="de-DE" dirty="0">
+                <a:hlinkClick r:id="rId3"/>
+              </a:rPr>
+              <a:t>https://hub.helm.sh/</a:t>
+            </a:r>
+            <a:r>
+              <a:rPr lang="de-DE" dirty="0"/>
+              <a:t>) </a:t>
+            </a:r>
+            <a:r>
+              <a:rPr lang="de-DE" dirty="0" err="1"/>
+              <a:t>can</a:t>
+            </a:r>
+            <a:r>
+              <a:rPr lang="de-DE" dirty="0"/>
+              <a:t> also </a:t>
+            </a:r>
+            <a:r>
+              <a:rPr lang="de-DE" dirty="0" err="1"/>
+              <a:t>be</a:t>
+            </a:r>
+            <a:r>
+              <a:rPr lang="de-DE" dirty="0"/>
+              <a:t> </a:t>
+            </a:r>
+            <a:r>
+              <a:rPr lang="de-DE" dirty="0" err="1"/>
+              <a:t>searched</a:t>
+            </a:r>
+            <a:r>
+              <a:rPr lang="de-DE" dirty="0"/>
+              <a:t> </a:t>
+            </a:r>
+            <a:r>
+              <a:rPr lang="de-DE" dirty="0" err="1"/>
+              <a:t>with</a:t>
+            </a:r>
+            <a:r>
+              <a:rPr lang="de-DE" dirty="0"/>
+              <a:t> „</a:t>
+            </a:r>
+            <a:r>
+              <a:rPr lang="de-DE" dirty="0" err="1"/>
+              <a:t>helm</a:t>
+            </a:r>
+            <a:r>
+              <a:rPr lang="de-DE" dirty="0"/>
+              <a:t> </a:t>
+            </a:r>
+            <a:r>
+              <a:rPr lang="de-DE" dirty="0" err="1"/>
+              <a:t>search</a:t>
+            </a:r>
+            <a:r>
+              <a:rPr lang="de-DE" dirty="0"/>
+              <a:t> hub &lt;</a:t>
+            </a:r>
+            <a:r>
+              <a:rPr lang="de-DE" dirty="0" err="1"/>
+              <a:t>term</a:t>
+            </a:r>
+            <a:r>
+              <a:rPr lang="de-DE" dirty="0"/>
+              <a:t>&gt;“.</a:t>
+            </a:r>
+            <a:endParaRPr lang="de-DE" sz="1400" b="0" kern="1200" dirty="0">
+              <a:solidFill>
+                <a:schemeClr val="tx1"/>
+              </a:solidFill>
+              <a:effectLst/>
+              <a:latin typeface="+mn-lt"/>
+              <a:ea typeface="+mn-ea"/>
+              <a:cs typeface="+mn-cs"/>
+            </a:endParaRPr>
           </a:p>
         </p:txBody>
       </p:sp>
@@ -3147,7 +3328,7 @@
             <a:fld id="{7D8C2C35-2B8A-446E-BEC0-FD36716C29AC}" type="slidenum">
               <a:rPr lang="de-DE" smtClean="0"/>
               <a:pPr/>
-              <a:t>11</a:t>
+              <a:t>9</a:t>
             </a:fld>
             <a:endParaRPr lang="de-DE" dirty="0"/>
           </a:p>
@@ -3156,7 +3337,7 @@
     </p:spTree>
     <p:extLst>
       <p:ext uri="{BB962C8B-B14F-4D97-AF65-F5344CB8AC3E}">
-        <p14:creationId xmlns:p14="http://schemas.microsoft.com/office/powerpoint/2010/main" val="2999438910"/>
+        <p14:creationId xmlns:p14="http://schemas.microsoft.com/office/powerpoint/2010/main" val="1096285440"/>
       </p:ext>
     </p:extLst>
   </p:cSld>
@@ -3789,7 +3970,7 @@
   <p:clrMapOvr>
     <a:masterClrMapping/>
   </p:clrMapOvr>
-  <p:extLst mod="1">
+  <p:extLst>
     <p:ext uri="{DCECCB84-F9BA-43D5-87BE-67443E8EF086}">
       <p15:sldGuideLst xmlns:p15="http://schemas.microsoft.com/office/powerpoint/2012/main"/>
     </p:ext>
@@ -6680,7 +6861,7 @@
   <p:clrMapOvr>
     <a:masterClrMapping/>
   </p:clrMapOvr>
-  <p:extLst mod="1">
+  <p:extLst>
     <p:ext uri="{DCECCB84-F9BA-43D5-87BE-67443E8EF086}">
       <p15:sldGuideLst xmlns:p15="http://schemas.microsoft.com/office/powerpoint/2012/main"/>
     </p:ext>
@@ -6857,7 +7038,7 @@
   <p:clrMapOvr>
     <a:masterClrMapping/>
   </p:clrMapOvr>
-  <p:extLst mod="1">
+  <p:extLst>
     <p:ext uri="{DCECCB84-F9BA-43D5-87BE-67443E8EF086}">
       <p15:sldGuideLst xmlns:p15="http://schemas.microsoft.com/office/powerpoint/2012/main"/>
     </p:ext>
@@ -14654,7 +14835,7 @@
   <p:clrMapOvr>
     <a:masterClrMapping/>
   </p:clrMapOvr>
-  <p:extLst mod="1">
+  <p:extLst>
     <p:ext uri="{DCECCB84-F9BA-43D5-87BE-67443E8EF086}">
       <p15:sldGuideLst xmlns:p15="http://schemas.microsoft.com/office/powerpoint/2012/main"/>
     </p:ext>
@@ -15079,7 +15260,7 @@
   <p:clrMapOvr>
     <a:masterClrMapping/>
   </p:clrMapOvr>
-  <p:extLst mod="1">
+  <p:extLst>
     <p:ext uri="{DCECCB84-F9BA-43D5-87BE-67443E8EF086}">
       <p15:sldGuideLst xmlns:p15="http://schemas.microsoft.com/office/powerpoint/2012/main"/>
     </p:ext>
@@ -15710,7 +15891,7 @@
               <a:pPr marL="0" lvl="0" indent="0" algn="r">
                 <a:buNone/>
               </a:pPr>
-              <a:t>‹#›</a:t>
+              <a:t>‹Nr.›</a:t>
             </a:fld>
             <a:endParaRPr lang="en-US" sz="900" noProof="0" dirty="0"/>
           </a:p>
@@ -16435,7 +16616,7 @@
       </a:lvl9pPr>
     </p:otherStyle>
   </p:txStyles>
-  <p:extLst mod="1">
+  <p:extLst>
     <p:ext uri="{27BBF7A9-308A-43DC-89C8-2F10F3537804}">
       <p15:sldGuideLst xmlns:p15="http://schemas.microsoft.com/office/powerpoint/2012/main"/>
     </p:ext>
@@ -16477,7 +16658,7 @@
           <a:p>
             <a:r>
               <a:rPr lang="en-US" dirty="0"/>
-              <a:t>Kubernetes &amp; helm</a:t>
+              <a:t>Kubernetes &amp;</a:t>
             </a:r>
             <a:br>
               <a:rPr lang="en-US" dirty="0"/>
@@ -16520,6 +16701,53 @@
           </a:xfrm>
         </p:spPr>
       </p:pic>
+      <p:pic>
+        <p:nvPicPr>
+          <p:cNvPr id="4" name="Picture 6" descr="Related image">
+            <a:extLst>
+              <a:ext uri="{FF2B5EF4-FFF2-40B4-BE49-F238E27FC236}">
+                <a16:creationId xmlns:a16="http://schemas.microsoft.com/office/drawing/2014/main" id="{7BBFD1B1-59F4-654F-ABA0-3DC35A07266F}"/>
+              </a:ext>
+            </a:extLst>
+          </p:cNvPr>
+          <p:cNvPicPr>
+            <a:picLocks noChangeAspect="1" noChangeArrowheads="1"/>
+          </p:cNvPicPr>
+          <p:nvPr/>
+        </p:nvPicPr>
+        <p:blipFill>
+          <a:blip r:embed="rId4">
+            <a:extLst>
+              <a:ext uri="{28A0092B-C50C-407E-A947-70E740481C1C}">
+                <a14:useLocalDpi xmlns:a14="http://schemas.microsoft.com/office/drawing/2010/main" val="0"/>
+              </a:ext>
+            </a:extLst>
+          </a:blip>
+          <a:srcRect/>
+          <a:stretch>
+            <a:fillRect/>
+          </a:stretch>
+        </p:blipFill>
+        <p:spPr bwMode="auto">
+          <a:xfrm>
+            <a:off x="3570604" y="2977943"/>
+            <a:ext cx="2438400" cy="2438400"/>
+          </a:xfrm>
+          <a:prstGeom prst="rect">
+            <a:avLst/>
+          </a:prstGeom>
+          <a:noFill/>
+          <a:extLst>
+            <a:ext uri="{909E8E84-426E-40DD-AFC4-6F175D3DCCD1}">
+              <a14:hiddenFill xmlns:a14="http://schemas.microsoft.com/office/drawing/2010/main">
+                <a:solidFill>
+                  <a:srgbClr val="FFFFFF"/>
+                </a:solidFill>
+              </a14:hiddenFill>
+            </a:ext>
+          </a:extLst>
+        </p:spPr>
+      </p:pic>
     </p:spTree>
     <p:extLst>
       <p:ext uri="{BB962C8B-B14F-4D97-AF65-F5344CB8AC3E}">
@@ -16530,10 +16758,1504 @@
   <p:clrMapOvr>
     <a:masterClrMapping/>
   </p:clrMapOvr>
+  <p:timing>
+    <p:tnLst>
+      <p:par>
+        <p:cTn id="1" dur="indefinite" restart="never" nodeType="tmRoot">
+          <p:childTnLst>
+            <p:seq concurrent="1" nextAc="seek">
+              <p:cTn id="2" dur="indefinite" nodeType="mainSeq">
+                <p:childTnLst>
+                  <p:par>
+                    <p:cTn id="3" fill="hold">
+                      <p:stCondLst>
+                        <p:cond delay="indefinite"/>
+                        <p:cond evt="onBegin" delay="0">
+                          <p:tn val="2"/>
+                        </p:cond>
+                      </p:stCondLst>
+                      <p:childTnLst>
+                        <p:par>
+                          <p:cTn id="4" fill="hold">
+                            <p:stCondLst>
+                              <p:cond delay="0"/>
+                            </p:stCondLst>
+                            <p:childTnLst>
+                              <p:par>
+                                <p:cTn id="5" presetID="1" presetClass="entr" presetSubtype="0" fill="hold" nodeType="withEffect">
+                                  <p:stCondLst>
+                                    <p:cond delay="0"/>
+                                  </p:stCondLst>
+                                  <p:childTnLst>
+                                    <p:set>
+                                      <p:cBhvr>
+                                        <p:cTn id="6" dur="1" fill="hold">
+                                          <p:stCondLst>
+                                            <p:cond delay="0"/>
+                                          </p:stCondLst>
+                                        </p:cTn>
+                                        <p:tgtEl>
+                                          <p:spTgt spid="4"/>
+                                        </p:tgtEl>
+                                        <p:attrNameLst>
+                                          <p:attrName>style.visibility</p:attrName>
+                                        </p:attrNameLst>
+                                      </p:cBhvr>
+                                      <p:to>
+                                        <p:strVal val="visible"/>
+                                      </p:to>
+                                    </p:set>
+                                  </p:childTnLst>
+                                </p:cTn>
+                              </p:par>
+                            </p:childTnLst>
+                          </p:cTn>
+                        </p:par>
+                      </p:childTnLst>
+                    </p:cTn>
+                  </p:par>
+                </p:childTnLst>
+              </p:cTn>
+              <p:prevCondLst>
+                <p:cond evt="onPrev" delay="0">
+                  <p:tgtEl>
+                    <p:sldTgt/>
+                  </p:tgtEl>
+                </p:cond>
+              </p:prevCondLst>
+              <p:nextCondLst>
+                <p:cond evt="onNext" delay="0">
+                  <p:tgtEl>
+                    <p:sldTgt/>
+                  </p:tgtEl>
+                </p:cond>
+              </p:nextCondLst>
+            </p:seq>
+          </p:childTnLst>
+        </p:cTn>
+      </p:par>
+    </p:tnLst>
+  </p:timing>
 </p:sld>
 </file>
 
 <file path=ppt/slides/slide10.xml><?xml version="1.0" encoding="utf-8"?>
+<p:sld xmlns:a="http://schemas.openxmlformats.org/drawingml/2006/main" xmlns:r="http://schemas.openxmlformats.org/officeDocument/2006/relationships" xmlns:p="http://schemas.openxmlformats.org/presentationml/2006/main">
+  <p:cSld>
+    <p:spTree>
+      <p:nvGrpSpPr>
+        <p:cNvPr id="1" name=""/>
+        <p:cNvGrpSpPr/>
+        <p:nvPr/>
+      </p:nvGrpSpPr>
+      <p:grpSpPr>
+        <a:xfrm>
+          <a:off x="0" y="0"/>
+          <a:ext cx="0" cy="0"/>
+          <a:chOff x="0" y="0"/>
+          <a:chExt cx="0" cy="0"/>
+        </a:xfrm>
+      </p:grpSpPr>
+      <p:sp>
+        <p:nvSpPr>
+          <p:cNvPr id="2" name="Title 1">
+            <a:extLst>
+              <a:ext uri="{FF2B5EF4-FFF2-40B4-BE49-F238E27FC236}">
+                <a16:creationId xmlns:a16="http://schemas.microsoft.com/office/drawing/2014/main" id="{2D4BD4BF-5C0E-4BE1-A99C-25DBDC85D9CD}"/>
+              </a:ext>
+            </a:extLst>
+          </p:cNvPr>
+          <p:cNvSpPr>
+            <a:spLocks noGrp="1"/>
+          </p:cNvSpPr>
+          <p:nvPr>
+            <p:ph type="title"/>
+          </p:nvPr>
+        </p:nvSpPr>
+        <p:spPr/>
+        <p:txBody>
+          <a:bodyPr/>
+          <a:lstStyle/>
+          <a:p>
+            <a:r>
+              <a:rPr lang="en-US" dirty="0"/>
+              <a:t>Demo</a:t>
+            </a:r>
+          </a:p>
+        </p:txBody>
+      </p:sp>
+      <p:pic>
+        <p:nvPicPr>
+          <p:cNvPr id="4" name="Picture 3">
+            <a:extLst>
+              <a:ext uri="{FF2B5EF4-FFF2-40B4-BE49-F238E27FC236}">
+                <a16:creationId xmlns:a16="http://schemas.microsoft.com/office/drawing/2014/main" id="{8F8AF56A-873C-4A73-B1BB-DD1CD39FA262}"/>
+              </a:ext>
+            </a:extLst>
+          </p:cNvPr>
+          <p:cNvPicPr>
+            <a:picLocks noChangeAspect="1"/>
+          </p:cNvPicPr>
+          <p:nvPr/>
+        </p:nvPicPr>
+        <p:blipFill>
+          <a:blip r:embed="rId3"/>
+          <a:stretch>
+            <a:fillRect/>
+          </a:stretch>
+        </p:blipFill>
+        <p:spPr>
+          <a:xfrm>
+            <a:off x="3645157" y="976918"/>
+            <a:ext cx="4904163" cy="4904163"/>
+          </a:xfrm>
+          <a:prstGeom prst="rect">
+            <a:avLst/>
+          </a:prstGeom>
+        </p:spPr>
+      </p:pic>
+    </p:spTree>
+    <p:extLst>
+      <p:ext uri="{BB962C8B-B14F-4D97-AF65-F5344CB8AC3E}">
+        <p14:creationId xmlns:p14="http://schemas.microsoft.com/office/powerpoint/2010/main" val="247635095"/>
+      </p:ext>
+    </p:extLst>
+  </p:cSld>
+  <p:clrMapOvr>
+    <a:masterClrMapping/>
+  </p:clrMapOvr>
+</p:sld>
+</file>
+
+<file path=ppt/slides/slide11.xml><?xml version="1.0" encoding="utf-8"?>
+<p:sld xmlns:a="http://schemas.openxmlformats.org/drawingml/2006/main" xmlns:r="http://schemas.openxmlformats.org/officeDocument/2006/relationships" xmlns:p="http://schemas.openxmlformats.org/presentationml/2006/main">
+  <p:cSld>
+    <p:spTree>
+      <p:nvGrpSpPr>
+        <p:cNvPr id="1" name=""/>
+        <p:cNvGrpSpPr/>
+        <p:nvPr/>
+      </p:nvGrpSpPr>
+      <p:grpSpPr>
+        <a:xfrm>
+          <a:off x="0" y="0"/>
+          <a:ext cx="0" cy="0"/>
+          <a:chOff x="0" y="0"/>
+          <a:chExt cx="0" cy="0"/>
+        </a:xfrm>
+      </p:grpSpPr>
+      <p:sp>
+        <p:nvSpPr>
+          <p:cNvPr id="3" name="Title 2">
+            <a:extLst>
+              <a:ext uri="{FF2B5EF4-FFF2-40B4-BE49-F238E27FC236}">
+                <a16:creationId xmlns:a16="http://schemas.microsoft.com/office/drawing/2014/main" id="{B4B6938A-7A0C-4712-A9B8-41F25B66C8A4}"/>
+              </a:ext>
+            </a:extLst>
+          </p:cNvPr>
+          <p:cNvSpPr>
+            <a:spLocks noGrp="1"/>
+          </p:cNvSpPr>
+          <p:nvPr>
+            <p:ph type="title"/>
+          </p:nvPr>
+        </p:nvSpPr>
+        <p:spPr/>
+        <p:txBody>
+          <a:bodyPr/>
+          <a:lstStyle/>
+          <a:p>
+            <a:r>
+              <a:rPr lang="en-US"/>
+              <a:t>Exercises #10 </a:t>
+            </a:r>
+            <a:r>
+              <a:rPr lang="en-US" dirty="0"/>
+              <a:t>&amp; </a:t>
+            </a:r>
+            <a:r>
+              <a:rPr lang="en-US"/>
+              <a:t>#11</a:t>
+            </a:r>
+            <a:endParaRPr lang="en-US" dirty="0"/>
+          </a:p>
+        </p:txBody>
+      </p:sp>
+      <p:pic>
+        <p:nvPicPr>
+          <p:cNvPr id="4" name="Picture 3">
+            <a:extLst>
+              <a:ext uri="{FF2B5EF4-FFF2-40B4-BE49-F238E27FC236}">
+                <a16:creationId xmlns:a16="http://schemas.microsoft.com/office/drawing/2014/main" id="{F6BA3838-694C-42C5-AEEE-A53AE996E7BE}"/>
+              </a:ext>
+            </a:extLst>
+          </p:cNvPr>
+          <p:cNvPicPr>
+            <a:picLocks noChangeAspect="1"/>
+          </p:cNvPicPr>
+          <p:nvPr/>
+        </p:nvPicPr>
+        <p:blipFill>
+          <a:blip r:embed="rId3"/>
+          <a:stretch>
+            <a:fillRect/>
+          </a:stretch>
+        </p:blipFill>
+        <p:spPr>
+          <a:xfrm>
+            <a:off x="4011439" y="1343200"/>
+            <a:ext cx="4171599" cy="4171599"/>
+          </a:xfrm>
+          <a:prstGeom prst="rect">
+            <a:avLst/>
+          </a:prstGeom>
+        </p:spPr>
+      </p:pic>
+    </p:spTree>
+    <p:extLst>
+      <p:ext uri="{BB962C8B-B14F-4D97-AF65-F5344CB8AC3E}">
+        <p14:creationId xmlns:p14="http://schemas.microsoft.com/office/powerpoint/2010/main" val="2757824260"/>
+      </p:ext>
+    </p:extLst>
+  </p:cSld>
+  <p:clrMapOvr>
+    <a:masterClrMapping/>
+  </p:clrMapOvr>
+</p:sld>
+</file>
+
+<file path=ppt/slides/slide12.xml><?xml version="1.0" encoding="utf-8"?>
+<p:sld xmlns:a="http://schemas.openxmlformats.org/drawingml/2006/main" xmlns:r="http://schemas.openxmlformats.org/officeDocument/2006/relationships" xmlns:p="http://schemas.openxmlformats.org/presentationml/2006/main" show="0">
+  <p:cSld>
+    <p:spTree>
+      <p:nvGrpSpPr>
+        <p:cNvPr id="1" name=""/>
+        <p:cNvGrpSpPr/>
+        <p:nvPr/>
+      </p:nvGrpSpPr>
+      <p:grpSpPr>
+        <a:xfrm>
+          <a:off x="0" y="0"/>
+          <a:ext cx="0" cy="0"/>
+          <a:chOff x="0" y="0"/>
+          <a:chExt cx="0" cy="0"/>
+        </a:xfrm>
+      </p:grpSpPr>
+    </p:spTree>
+  </p:cSld>
+  <p:clrMapOvr>
+    <a:masterClrMapping/>
+  </p:clrMapOvr>
+  <p:transition spd="med"/>
+</p:sld>
+</file>
+
+<file path=ppt/slides/slide2.xml><?xml version="1.0" encoding="utf-8"?>
+<p:sld xmlns:a="http://schemas.openxmlformats.org/drawingml/2006/main" xmlns:r="http://schemas.openxmlformats.org/officeDocument/2006/relationships" xmlns:p="http://schemas.openxmlformats.org/presentationml/2006/main">
+  <p:cSld>
+    <p:spTree>
+      <p:nvGrpSpPr>
+        <p:cNvPr id="1" name=""/>
+        <p:cNvGrpSpPr/>
+        <p:nvPr/>
+      </p:nvGrpSpPr>
+      <p:grpSpPr>
+        <a:xfrm>
+          <a:off x="0" y="0"/>
+          <a:ext cx="0" cy="0"/>
+          <a:chOff x="0" y="0"/>
+          <a:chExt cx="0" cy="0"/>
+        </a:xfrm>
+      </p:grpSpPr>
+      <p:sp>
+        <p:nvSpPr>
+          <p:cNvPr id="2" name="Titel 1">
+            <a:extLst>
+              <a:ext uri="{FF2B5EF4-FFF2-40B4-BE49-F238E27FC236}">
+                <a16:creationId xmlns:a16="http://schemas.microsoft.com/office/drawing/2014/main" id="{EDDE90E4-6E63-BF4A-BFD8-EA8C19B0AA20}"/>
+              </a:ext>
+            </a:extLst>
+          </p:cNvPr>
+          <p:cNvSpPr>
+            <a:spLocks noGrp="1"/>
+          </p:cNvSpPr>
+          <p:nvPr>
+            <p:ph type="title"/>
+          </p:nvPr>
+        </p:nvSpPr>
+        <p:spPr/>
+        <p:txBody>
+          <a:bodyPr/>
+          <a:lstStyle/>
+          <a:p>
+            <a:r>
+              <a:rPr lang="de-DE" dirty="0"/>
+              <a:t>Helm Charts</a:t>
+            </a:r>
+          </a:p>
+        </p:txBody>
+      </p:sp>
+      <p:sp>
+        <p:nvSpPr>
+          <p:cNvPr id="4" name="Rechteck 3">
+            <a:extLst>
+              <a:ext uri="{FF2B5EF4-FFF2-40B4-BE49-F238E27FC236}">
+                <a16:creationId xmlns:a16="http://schemas.microsoft.com/office/drawing/2014/main" id="{745B523B-31F5-EA4C-A693-C0085CE16A32}"/>
+              </a:ext>
+            </a:extLst>
+          </p:cNvPr>
+          <p:cNvSpPr/>
+          <p:nvPr/>
+        </p:nvSpPr>
+        <p:spPr bwMode="gray">
+          <a:xfrm>
+            <a:off x="504001" y="1254235"/>
+            <a:ext cx="2779973" cy="2209800"/>
+          </a:xfrm>
+          <a:prstGeom prst="rect">
+            <a:avLst/>
+          </a:prstGeom>
+          <a:ln>
+            <a:headEnd/>
+            <a:tailEnd/>
+          </a:ln>
+        </p:spPr>
+        <p:style>
+          <a:lnRef idx="2">
+            <a:schemeClr val="dk1"/>
+          </a:lnRef>
+          <a:fillRef idx="1">
+            <a:schemeClr val="lt1"/>
+          </a:fillRef>
+          <a:effectRef idx="0">
+            <a:schemeClr val="dk1"/>
+          </a:effectRef>
+          <a:fontRef idx="minor">
+            <a:schemeClr val="dk1"/>
+          </a:fontRef>
+        </p:style>
+        <p:txBody>
+          <a:bodyPr lIns="90000" tIns="72000" rIns="90000" bIns="72000" rtlCol="0" anchor="ctr"/>
+          <a:lstStyle/>
+          <a:p>
+            <a:pPr marR="0" algn="ctr" defTabSz="914400" eaLnBrk="1" fontAlgn="base" latinLnBrk="0" hangingPunct="1">
+              <a:lnSpc>
+                <a:spcPct val="100000"/>
+              </a:lnSpc>
+              <a:spcBef>
+                <a:spcPct val="50000"/>
+              </a:spcBef>
+              <a:spcAft>
+                <a:spcPct val="0"/>
+              </a:spcAft>
+              <a:buClr>
+                <a:srgbClr val="F0AB00"/>
+              </a:buClr>
+              <a:buSzPct val="80000"/>
+              <a:tabLst/>
+            </a:pPr>
+            <a:endParaRPr kumimoji="0" lang="de-DE" sz="1800" b="1" i="0" u="none" strike="noStrike" kern="0" cap="none" spc="0" normalizeH="0" baseline="0" noProof="0" dirty="0" err="1">
+              <a:ln>
+                <a:noFill/>
+              </a:ln>
+              <a:effectLst/>
+              <a:uLnTx/>
+              <a:uFillTx/>
+              <a:ea typeface="Arial Unicode MS" pitchFamily="34" charset="-128"/>
+              <a:cs typeface="Arial Unicode MS" pitchFamily="34" charset="-128"/>
+            </a:endParaRPr>
+          </a:p>
+        </p:txBody>
+      </p:sp>
+      <p:sp>
+        <p:nvSpPr>
+          <p:cNvPr id="5" name="Rechteck 4">
+            <a:extLst>
+              <a:ext uri="{FF2B5EF4-FFF2-40B4-BE49-F238E27FC236}">
+                <a16:creationId xmlns:a16="http://schemas.microsoft.com/office/drawing/2014/main" id="{ACCB651E-3749-E24D-8F15-DDE02A7CCF7F}"/>
+              </a:ext>
+            </a:extLst>
+          </p:cNvPr>
+          <p:cNvSpPr/>
+          <p:nvPr/>
+        </p:nvSpPr>
+        <p:spPr bwMode="gray">
+          <a:xfrm>
+            <a:off x="656401" y="1406635"/>
+            <a:ext cx="2779973" cy="2209800"/>
+          </a:xfrm>
+          <a:prstGeom prst="rect">
+            <a:avLst/>
+          </a:prstGeom>
+          <a:ln>
+            <a:headEnd/>
+            <a:tailEnd/>
+          </a:ln>
+        </p:spPr>
+        <p:style>
+          <a:lnRef idx="2">
+            <a:schemeClr val="dk1"/>
+          </a:lnRef>
+          <a:fillRef idx="1">
+            <a:schemeClr val="lt1"/>
+          </a:fillRef>
+          <a:effectRef idx="0">
+            <a:schemeClr val="dk1"/>
+          </a:effectRef>
+          <a:fontRef idx="minor">
+            <a:schemeClr val="dk1"/>
+          </a:fontRef>
+        </p:style>
+        <p:txBody>
+          <a:bodyPr lIns="90000" tIns="72000" rIns="90000" bIns="72000" rtlCol="0" anchor="ctr"/>
+          <a:lstStyle/>
+          <a:p>
+            <a:pPr marR="0" algn="ctr" defTabSz="914400" eaLnBrk="1" fontAlgn="base" latinLnBrk="0" hangingPunct="1">
+              <a:lnSpc>
+                <a:spcPct val="100000"/>
+              </a:lnSpc>
+              <a:spcBef>
+                <a:spcPct val="50000"/>
+              </a:spcBef>
+              <a:spcAft>
+                <a:spcPct val="0"/>
+              </a:spcAft>
+              <a:buClr>
+                <a:srgbClr val="F0AB00"/>
+              </a:buClr>
+              <a:buSzPct val="80000"/>
+              <a:tabLst/>
+            </a:pPr>
+            <a:endParaRPr kumimoji="0" lang="de-DE" sz="1800" b="1" i="0" u="none" strike="noStrike" kern="0" cap="none" spc="0" normalizeH="0" baseline="0" noProof="0" dirty="0" err="1">
+              <a:ln>
+                <a:noFill/>
+              </a:ln>
+              <a:effectLst/>
+              <a:uLnTx/>
+              <a:uFillTx/>
+              <a:ea typeface="Arial Unicode MS" pitchFamily="34" charset="-128"/>
+              <a:cs typeface="Arial Unicode MS" pitchFamily="34" charset="-128"/>
+            </a:endParaRPr>
+          </a:p>
+        </p:txBody>
+      </p:sp>
+      <p:sp>
+        <p:nvSpPr>
+          <p:cNvPr id="6" name="Rechteck 5">
+            <a:extLst>
+              <a:ext uri="{FF2B5EF4-FFF2-40B4-BE49-F238E27FC236}">
+                <a16:creationId xmlns:a16="http://schemas.microsoft.com/office/drawing/2014/main" id="{A01A538F-65AC-814A-B6DA-71531DF0C545}"/>
+              </a:ext>
+            </a:extLst>
+          </p:cNvPr>
+          <p:cNvSpPr/>
+          <p:nvPr/>
+        </p:nvSpPr>
+        <p:spPr bwMode="gray">
+          <a:xfrm>
+            <a:off x="808801" y="1559035"/>
+            <a:ext cx="2779973" cy="2209800"/>
+          </a:xfrm>
+          <a:prstGeom prst="rect">
+            <a:avLst/>
+          </a:prstGeom>
+          <a:ln>
+            <a:headEnd/>
+            <a:tailEnd/>
+          </a:ln>
+        </p:spPr>
+        <p:style>
+          <a:lnRef idx="2">
+            <a:schemeClr val="dk1"/>
+          </a:lnRef>
+          <a:fillRef idx="1">
+            <a:schemeClr val="lt1"/>
+          </a:fillRef>
+          <a:effectRef idx="0">
+            <a:schemeClr val="dk1"/>
+          </a:effectRef>
+          <a:fontRef idx="minor">
+            <a:schemeClr val="dk1"/>
+          </a:fontRef>
+        </p:style>
+        <p:txBody>
+          <a:bodyPr lIns="90000" tIns="72000" rIns="90000" bIns="72000" rtlCol="0" anchor="ctr"/>
+          <a:lstStyle/>
+          <a:p>
+            <a:pPr marR="0" algn="ctr" defTabSz="914400" eaLnBrk="1" fontAlgn="base" latinLnBrk="0" hangingPunct="1">
+              <a:lnSpc>
+                <a:spcPct val="100000"/>
+              </a:lnSpc>
+              <a:spcBef>
+                <a:spcPct val="50000"/>
+              </a:spcBef>
+              <a:spcAft>
+                <a:spcPct val="0"/>
+              </a:spcAft>
+              <a:buClr>
+                <a:srgbClr val="F0AB00"/>
+              </a:buClr>
+              <a:buSzPct val="80000"/>
+              <a:tabLst/>
+            </a:pPr>
+            <a:r>
+              <a:rPr lang="de-DE" sz="1800" b="1" kern="0" dirty="0">
+                <a:latin typeface="Courier" pitchFamily="2" charset="0"/>
+                <a:ea typeface="Arial Unicode MS" pitchFamily="34" charset="-128"/>
+                <a:cs typeface="Arial Unicode MS" pitchFamily="34" charset="-128"/>
+              </a:rPr>
+              <a:t>{{ </a:t>
+            </a:r>
+            <a:r>
+              <a:rPr lang="de-DE" sz="1800" b="1" kern="0" dirty="0" err="1">
+                <a:latin typeface="Courier" pitchFamily="2" charset="0"/>
+                <a:ea typeface="Arial Unicode MS" pitchFamily="34" charset="-128"/>
+                <a:cs typeface="Arial Unicode MS" pitchFamily="34" charset="-128"/>
+              </a:rPr>
+              <a:t>templates</a:t>
+            </a:r>
+            <a:r>
+              <a:rPr lang="de-DE" sz="1800" b="1" kern="0" dirty="0">
+                <a:latin typeface="Courier" pitchFamily="2" charset="0"/>
+                <a:ea typeface="Arial Unicode MS" pitchFamily="34" charset="-128"/>
+                <a:cs typeface="Arial Unicode MS" pitchFamily="34" charset="-128"/>
+              </a:rPr>
+              <a:t> }}</a:t>
+            </a:r>
+            <a:endParaRPr kumimoji="0" lang="de-DE" sz="1800" b="1" i="0" u="none" strike="noStrike" kern="0" cap="none" spc="0" normalizeH="0" baseline="0" noProof="0" dirty="0" err="1">
+              <a:ln>
+                <a:noFill/>
+              </a:ln>
+              <a:effectLst/>
+              <a:uLnTx/>
+              <a:uFillTx/>
+              <a:latin typeface="Courier" pitchFamily="2" charset="0"/>
+              <a:ea typeface="Arial Unicode MS" pitchFamily="34" charset="-128"/>
+              <a:cs typeface="Arial Unicode MS" pitchFamily="34" charset="-128"/>
+            </a:endParaRPr>
+          </a:p>
+        </p:txBody>
+      </p:sp>
+      <p:sp>
+        <p:nvSpPr>
+          <p:cNvPr id="7" name="Rechteck 6">
+            <a:extLst>
+              <a:ext uri="{FF2B5EF4-FFF2-40B4-BE49-F238E27FC236}">
+                <a16:creationId xmlns:a16="http://schemas.microsoft.com/office/drawing/2014/main" id="{D7E3D5A6-F5CE-BE4C-903E-A28310724628}"/>
+              </a:ext>
+            </a:extLst>
+          </p:cNvPr>
+          <p:cNvSpPr/>
+          <p:nvPr/>
+        </p:nvSpPr>
+        <p:spPr bwMode="gray">
+          <a:xfrm>
+            <a:off x="907123" y="4302138"/>
+            <a:ext cx="2268697" cy="1676497"/>
+          </a:xfrm>
+          <a:prstGeom prst="rect">
+            <a:avLst/>
+          </a:prstGeom>
+          <a:ln>
+            <a:headEnd/>
+            <a:tailEnd/>
+          </a:ln>
+        </p:spPr>
+        <p:style>
+          <a:lnRef idx="2">
+            <a:schemeClr val="dk1"/>
+          </a:lnRef>
+          <a:fillRef idx="1">
+            <a:schemeClr val="lt1"/>
+          </a:fillRef>
+          <a:effectRef idx="0">
+            <a:schemeClr val="dk1"/>
+          </a:effectRef>
+          <a:fontRef idx="minor">
+            <a:schemeClr val="dk1"/>
+          </a:fontRef>
+        </p:style>
+        <p:txBody>
+          <a:bodyPr lIns="90000" tIns="72000" rIns="90000" bIns="72000" rtlCol="0" anchor="ctr"/>
+          <a:lstStyle/>
+          <a:p>
+            <a:pPr marR="0" algn="ctr" defTabSz="914400" eaLnBrk="1" fontAlgn="base" latinLnBrk="0" hangingPunct="1">
+              <a:lnSpc>
+                <a:spcPct val="100000"/>
+              </a:lnSpc>
+              <a:spcBef>
+                <a:spcPct val="50000"/>
+              </a:spcBef>
+              <a:spcAft>
+                <a:spcPct val="0"/>
+              </a:spcAft>
+              <a:buClr>
+                <a:srgbClr val="F0AB00"/>
+              </a:buClr>
+              <a:buSzPct val="80000"/>
+              <a:tabLst/>
+            </a:pPr>
+            <a:r>
+              <a:rPr lang="de-DE" sz="1800" b="1" kern="0" dirty="0" err="1">
+                <a:latin typeface="Courier" pitchFamily="2" charset="0"/>
+                <a:ea typeface="Arial Unicode MS" pitchFamily="34" charset="-128"/>
+                <a:cs typeface="Arial Unicode MS" pitchFamily="34" charset="-128"/>
+              </a:rPr>
+              <a:t>parameter</a:t>
+            </a:r>
+            <a:endParaRPr kumimoji="0" lang="de-DE" sz="1800" b="1" i="0" u="none" strike="noStrike" kern="0" cap="none" spc="0" normalizeH="0" baseline="0" noProof="0" dirty="0" err="1">
+              <a:ln>
+                <a:noFill/>
+              </a:ln>
+              <a:effectLst/>
+              <a:uLnTx/>
+              <a:uFillTx/>
+              <a:latin typeface="Courier" pitchFamily="2" charset="0"/>
+              <a:ea typeface="Arial Unicode MS" pitchFamily="34" charset="-128"/>
+              <a:cs typeface="Arial Unicode MS" pitchFamily="34" charset="-128"/>
+            </a:endParaRPr>
+          </a:p>
+        </p:txBody>
+      </p:sp>
+      <p:pic>
+        <p:nvPicPr>
+          <p:cNvPr id="9" name="Grafik 8" descr="Zauberstab (automatisch) mit einfarbiger Füllung">
+            <a:extLst>
+              <a:ext uri="{FF2B5EF4-FFF2-40B4-BE49-F238E27FC236}">
+                <a16:creationId xmlns:a16="http://schemas.microsoft.com/office/drawing/2014/main" id="{34D38156-5F9F-254D-8FD9-DB1F44AC1924}"/>
+              </a:ext>
+            </a:extLst>
+          </p:cNvPr>
+          <p:cNvPicPr>
+            <a:picLocks noChangeAspect="1"/>
+          </p:cNvPicPr>
+          <p:nvPr/>
+        </p:nvPicPr>
+        <p:blipFill>
+          <a:blip r:embed="rId3">
+            <a:extLst>
+              <a:ext uri="{96DAC541-7B7A-43D3-8B79-37D633B846F1}">
+                <asvg:svgBlip xmlns:asvg="http://schemas.microsoft.com/office/drawing/2016/SVG/main" r:embed="rId4"/>
+              </a:ext>
+            </a:extLst>
+          </a:blip>
+          <a:stretch>
+            <a:fillRect/>
+          </a:stretch>
+        </p:blipFill>
+        <p:spPr>
+          <a:xfrm>
+            <a:off x="4540586" y="1983235"/>
+            <a:ext cx="1480800" cy="1480800"/>
+          </a:xfrm>
+          <a:prstGeom prst="rect">
+            <a:avLst/>
+          </a:prstGeom>
+        </p:spPr>
+      </p:pic>
+      <p:pic>
+        <p:nvPicPr>
+          <p:cNvPr id="11" name="Grafik 10" descr="Zaubererhut mit einfarbiger Füllung">
+            <a:extLst>
+              <a:ext uri="{FF2B5EF4-FFF2-40B4-BE49-F238E27FC236}">
+                <a16:creationId xmlns:a16="http://schemas.microsoft.com/office/drawing/2014/main" id="{E8F714E2-4920-6349-AC4D-774710A5313B}"/>
+              </a:ext>
+            </a:extLst>
+          </p:cNvPr>
+          <p:cNvPicPr>
+            <a:picLocks noChangeAspect="1"/>
+          </p:cNvPicPr>
+          <p:nvPr/>
+        </p:nvPicPr>
+        <p:blipFill>
+          <a:blip r:embed="rId5">
+            <a:extLst>
+              <a:ext uri="{96DAC541-7B7A-43D3-8B79-37D633B846F1}">
+                <asvg:svgBlip xmlns:asvg="http://schemas.microsoft.com/office/drawing/2016/SVG/main" r:embed="rId6"/>
+              </a:ext>
+            </a:extLst>
+          </a:blip>
+          <a:stretch>
+            <a:fillRect/>
+          </a:stretch>
+        </p:blipFill>
+        <p:spPr>
+          <a:xfrm>
+            <a:off x="5338491" y="2823893"/>
+            <a:ext cx="1889883" cy="1889883"/>
+          </a:xfrm>
+          <a:prstGeom prst="rect">
+            <a:avLst/>
+          </a:prstGeom>
+        </p:spPr>
+      </p:pic>
+      <p:sp>
+        <p:nvSpPr>
+          <p:cNvPr id="12" name="Rechteck 11">
+            <a:extLst>
+              <a:ext uri="{FF2B5EF4-FFF2-40B4-BE49-F238E27FC236}">
+                <a16:creationId xmlns:a16="http://schemas.microsoft.com/office/drawing/2014/main" id="{F5342AAF-D15E-DC46-AB17-7E92139CEFF4}"/>
+              </a:ext>
+            </a:extLst>
+          </p:cNvPr>
+          <p:cNvSpPr/>
+          <p:nvPr/>
+        </p:nvSpPr>
+        <p:spPr bwMode="gray">
+          <a:xfrm>
+            <a:off x="8758802" y="1193402"/>
+            <a:ext cx="2696399" cy="921861"/>
+          </a:xfrm>
+          <a:prstGeom prst="rect">
+            <a:avLst/>
+          </a:prstGeom>
+          <a:ln>
+            <a:headEnd/>
+            <a:tailEnd/>
+          </a:ln>
+        </p:spPr>
+        <p:style>
+          <a:lnRef idx="2">
+            <a:schemeClr val="dk1"/>
+          </a:lnRef>
+          <a:fillRef idx="1">
+            <a:schemeClr val="lt1"/>
+          </a:fillRef>
+          <a:effectRef idx="0">
+            <a:schemeClr val="dk1"/>
+          </a:effectRef>
+          <a:fontRef idx="minor">
+            <a:schemeClr val="dk1"/>
+          </a:fontRef>
+        </p:style>
+        <p:txBody>
+          <a:bodyPr lIns="90000" tIns="72000" rIns="90000" bIns="72000" rtlCol="0" anchor="ctr"/>
+          <a:lstStyle/>
+          <a:p>
+            <a:pPr marR="0" algn="ctr" defTabSz="914400" eaLnBrk="1" fontAlgn="base" latinLnBrk="0" hangingPunct="1">
+              <a:lnSpc>
+                <a:spcPct val="100000"/>
+              </a:lnSpc>
+              <a:spcBef>
+                <a:spcPct val="50000"/>
+              </a:spcBef>
+              <a:spcAft>
+                <a:spcPct val="0"/>
+              </a:spcAft>
+              <a:buClr>
+                <a:srgbClr val="F0AB00"/>
+              </a:buClr>
+              <a:buSzPct val="80000"/>
+              <a:tabLst/>
+            </a:pPr>
+            <a:r>
+              <a:rPr lang="de-DE" sz="1800" b="1" kern="0" dirty="0">
+                <a:ea typeface="Arial Unicode MS" pitchFamily="34" charset="-128"/>
+                <a:cs typeface="Arial Unicode MS" pitchFamily="34" charset="-128"/>
+              </a:rPr>
+              <a:t>Ingress</a:t>
+            </a:r>
+            <a:endParaRPr kumimoji="0" lang="de-DE" sz="1800" b="1" i="0" u="none" strike="noStrike" kern="0" cap="none" spc="0" normalizeH="0" baseline="0" noProof="0" dirty="0" err="1">
+              <a:ln>
+                <a:noFill/>
+              </a:ln>
+              <a:effectLst/>
+              <a:uLnTx/>
+              <a:uFillTx/>
+              <a:ea typeface="Arial Unicode MS" pitchFamily="34" charset="-128"/>
+              <a:cs typeface="Arial Unicode MS" pitchFamily="34" charset="-128"/>
+            </a:endParaRPr>
+          </a:p>
+        </p:txBody>
+      </p:sp>
+      <p:sp>
+        <p:nvSpPr>
+          <p:cNvPr id="13" name="Rechteck 12">
+            <a:extLst>
+              <a:ext uri="{FF2B5EF4-FFF2-40B4-BE49-F238E27FC236}">
+                <a16:creationId xmlns:a16="http://schemas.microsoft.com/office/drawing/2014/main" id="{CEE7CCF2-6551-6942-9EC6-72CCC4CE7269}"/>
+              </a:ext>
+            </a:extLst>
+          </p:cNvPr>
+          <p:cNvSpPr/>
+          <p:nvPr/>
+        </p:nvSpPr>
+        <p:spPr bwMode="gray">
+          <a:xfrm>
+            <a:off x="8758801" y="2205448"/>
+            <a:ext cx="2696399" cy="921861"/>
+          </a:xfrm>
+          <a:prstGeom prst="rect">
+            <a:avLst/>
+          </a:prstGeom>
+          <a:ln>
+            <a:headEnd/>
+            <a:tailEnd/>
+          </a:ln>
+        </p:spPr>
+        <p:style>
+          <a:lnRef idx="2">
+            <a:schemeClr val="dk1"/>
+          </a:lnRef>
+          <a:fillRef idx="1">
+            <a:schemeClr val="lt1"/>
+          </a:fillRef>
+          <a:effectRef idx="0">
+            <a:schemeClr val="dk1"/>
+          </a:effectRef>
+          <a:fontRef idx="minor">
+            <a:schemeClr val="dk1"/>
+          </a:fontRef>
+        </p:style>
+        <p:txBody>
+          <a:bodyPr lIns="90000" tIns="72000" rIns="90000" bIns="72000" rtlCol="0" anchor="ctr"/>
+          <a:lstStyle/>
+          <a:p>
+            <a:pPr marR="0" algn="ctr" defTabSz="914400" eaLnBrk="1" fontAlgn="base" latinLnBrk="0" hangingPunct="1">
+              <a:lnSpc>
+                <a:spcPct val="100000"/>
+              </a:lnSpc>
+              <a:spcBef>
+                <a:spcPct val="50000"/>
+              </a:spcBef>
+              <a:spcAft>
+                <a:spcPct val="0"/>
+              </a:spcAft>
+              <a:buClr>
+                <a:srgbClr val="F0AB00"/>
+              </a:buClr>
+              <a:buSzPct val="80000"/>
+              <a:tabLst/>
+            </a:pPr>
+            <a:r>
+              <a:rPr lang="de-DE" sz="1800" b="1" kern="0" dirty="0">
+                <a:ea typeface="Arial Unicode MS" pitchFamily="34" charset="-128"/>
+                <a:cs typeface="Arial Unicode MS" pitchFamily="34" charset="-128"/>
+              </a:rPr>
+              <a:t>Service</a:t>
+            </a:r>
+            <a:endParaRPr kumimoji="0" lang="de-DE" sz="1800" b="1" i="0" u="none" strike="noStrike" kern="0" cap="none" spc="0" normalizeH="0" baseline="0" noProof="0" dirty="0" err="1">
+              <a:ln>
+                <a:noFill/>
+              </a:ln>
+              <a:effectLst/>
+              <a:uLnTx/>
+              <a:uFillTx/>
+              <a:ea typeface="Arial Unicode MS" pitchFamily="34" charset="-128"/>
+              <a:cs typeface="Arial Unicode MS" pitchFamily="34" charset="-128"/>
+            </a:endParaRPr>
+          </a:p>
+        </p:txBody>
+      </p:sp>
+      <p:sp>
+        <p:nvSpPr>
+          <p:cNvPr id="14" name="Rechteck 13">
+            <a:extLst>
+              <a:ext uri="{FF2B5EF4-FFF2-40B4-BE49-F238E27FC236}">
+                <a16:creationId xmlns:a16="http://schemas.microsoft.com/office/drawing/2014/main" id="{8270EE84-FF12-FE4D-B39F-A41811EA837A}"/>
+              </a:ext>
+            </a:extLst>
+          </p:cNvPr>
+          <p:cNvSpPr/>
+          <p:nvPr/>
+        </p:nvSpPr>
+        <p:spPr bwMode="gray">
+          <a:xfrm>
+            <a:off x="8758800" y="3217494"/>
+            <a:ext cx="2696399" cy="921861"/>
+          </a:xfrm>
+          <a:prstGeom prst="rect">
+            <a:avLst/>
+          </a:prstGeom>
+          <a:ln>
+            <a:headEnd/>
+            <a:tailEnd/>
+          </a:ln>
+        </p:spPr>
+        <p:style>
+          <a:lnRef idx="2">
+            <a:schemeClr val="dk1"/>
+          </a:lnRef>
+          <a:fillRef idx="1">
+            <a:schemeClr val="lt1"/>
+          </a:fillRef>
+          <a:effectRef idx="0">
+            <a:schemeClr val="dk1"/>
+          </a:effectRef>
+          <a:fontRef idx="minor">
+            <a:schemeClr val="dk1"/>
+          </a:fontRef>
+        </p:style>
+        <p:txBody>
+          <a:bodyPr lIns="90000" tIns="72000" rIns="90000" bIns="72000" rtlCol="0" anchor="ctr"/>
+          <a:lstStyle/>
+          <a:p>
+            <a:pPr marR="0" algn="ctr" defTabSz="914400" eaLnBrk="1" fontAlgn="base" latinLnBrk="0" hangingPunct="1">
+              <a:lnSpc>
+                <a:spcPct val="100000"/>
+              </a:lnSpc>
+              <a:spcBef>
+                <a:spcPct val="50000"/>
+              </a:spcBef>
+              <a:spcAft>
+                <a:spcPct val="0"/>
+              </a:spcAft>
+              <a:buClr>
+                <a:srgbClr val="F0AB00"/>
+              </a:buClr>
+              <a:buSzPct val="80000"/>
+              <a:tabLst/>
+            </a:pPr>
+            <a:r>
+              <a:rPr lang="de-DE" sz="1800" b="1" kern="0" dirty="0" err="1">
+                <a:ea typeface="Arial Unicode MS" pitchFamily="34" charset="-128"/>
+                <a:cs typeface="Arial Unicode MS" pitchFamily="34" charset="-128"/>
+              </a:rPr>
+              <a:t>Deployment</a:t>
+            </a:r>
+            <a:endParaRPr kumimoji="0" lang="de-DE" sz="1800" b="1" i="0" u="none" strike="noStrike" kern="0" cap="none" spc="0" normalizeH="0" baseline="0" noProof="0" dirty="0" err="1">
+              <a:ln>
+                <a:noFill/>
+              </a:ln>
+              <a:effectLst/>
+              <a:uLnTx/>
+              <a:uFillTx/>
+              <a:ea typeface="Arial Unicode MS" pitchFamily="34" charset="-128"/>
+              <a:cs typeface="Arial Unicode MS" pitchFamily="34" charset="-128"/>
+            </a:endParaRPr>
+          </a:p>
+        </p:txBody>
+      </p:sp>
+      <p:sp>
+        <p:nvSpPr>
+          <p:cNvPr id="15" name="Rechteck 14">
+            <a:extLst>
+              <a:ext uri="{FF2B5EF4-FFF2-40B4-BE49-F238E27FC236}">
+                <a16:creationId xmlns:a16="http://schemas.microsoft.com/office/drawing/2014/main" id="{19CEA4A8-3E8E-CC46-9425-013548C53060}"/>
+              </a:ext>
+            </a:extLst>
+          </p:cNvPr>
+          <p:cNvSpPr/>
+          <p:nvPr/>
+        </p:nvSpPr>
+        <p:spPr bwMode="gray">
+          <a:xfrm>
+            <a:off x="8758799" y="4229540"/>
+            <a:ext cx="2696399" cy="921861"/>
+          </a:xfrm>
+          <a:prstGeom prst="rect">
+            <a:avLst/>
+          </a:prstGeom>
+          <a:ln>
+            <a:headEnd/>
+            <a:tailEnd/>
+          </a:ln>
+        </p:spPr>
+        <p:style>
+          <a:lnRef idx="2">
+            <a:schemeClr val="dk1"/>
+          </a:lnRef>
+          <a:fillRef idx="1">
+            <a:schemeClr val="lt1"/>
+          </a:fillRef>
+          <a:effectRef idx="0">
+            <a:schemeClr val="dk1"/>
+          </a:effectRef>
+          <a:fontRef idx="minor">
+            <a:schemeClr val="dk1"/>
+          </a:fontRef>
+        </p:style>
+        <p:txBody>
+          <a:bodyPr lIns="90000" tIns="72000" rIns="90000" bIns="72000" rtlCol="0" anchor="ctr"/>
+          <a:lstStyle/>
+          <a:p>
+            <a:pPr marR="0" algn="ctr" defTabSz="914400" eaLnBrk="1" fontAlgn="base" latinLnBrk="0" hangingPunct="1">
+              <a:lnSpc>
+                <a:spcPct val="100000"/>
+              </a:lnSpc>
+              <a:spcBef>
+                <a:spcPct val="50000"/>
+              </a:spcBef>
+              <a:spcAft>
+                <a:spcPct val="0"/>
+              </a:spcAft>
+              <a:buClr>
+                <a:srgbClr val="F0AB00"/>
+              </a:buClr>
+              <a:buSzPct val="80000"/>
+              <a:tabLst/>
+            </a:pPr>
+            <a:r>
+              <a:rPr lang="de-DE" sz="1800" b="1" kern="0" dirty="0" err="1">
+                <a:ea typeface="Arial Unicode MS" pitchFamily="34" charset="-128"/>
+                <a:cs typeface="Arial Unicode MS" pitchFamily="34" charset="-128"/>
+              </a:rPr>
+              <a:t>ConfigMap</a:t>
+            </a:r>
+            <a:endParaRPr kumimoji="0" lang="de-DE" sz="1800" b="1" i="0" u="none" strike="noStrike" kern="0" cap="none" spc="0" normalizeH="0" baseline="0" noProof="0" dirty="0" err="1">
+              <a:ln>
+                <a:noFill/>
+              </a:ln>
+              <a:effectLst/>
+              <a:uLnTx/>
+              <a:uFillTx/>
+              <a:ea typeface="Arial Unicode MS" pitchFamily="34" charset="-128"/>
+              <a:cs typeface="Arial Unicode MS" pitchFamily="34" charset="-128"/>
+            </a:endParaRPr>
+          </a:p>
+        </p:txBody>
+      </p:sp>
+      <p:sp>
+        <p:nvSpPr>
+          <p:cNvPr id="16" name="Rechteck 15">
+            <a:extLst>
+              <a:ext uri="{FF2B5EF4-FFF2-40B4-BE49-F238E27FC236}">
+                <a16:creationId xmlns:a16="http://schemas.microsoft.com/office/drawing/2014/main" id="{F334FE91-AAD8-3A41-80CC-DA905CA5B85C}"/>
+              </a:ext>
+            </a:extLst>
+          </p:cNvPr>
+          <p:cNvSpPr/>
+          <p:nvPr/>
+        </p:nvSpPr>
+        <p:spPr bwMode="gray">
+          <a:xfrm>
+            <a:off x="8758799" y="5241586"/>
+            <a:ext cx="2696399" cy="921861"/>
+          </a:xfrm>
+          <a:prstGeom prst="rect">
+            <a:avLst/>
+          </a:prstGeom>
+          <a:ln>
+            <a:headEnd/>
+            <a:tailEnd/>
+          </a:ln>
+        </p:spPr>
+        <p:style>
+          <a:lnRef idx="2">
+            <a:schemeClr val="dk1"/>
+          </a:lnRef>
+          <a:fillRef idx="1">
+            <a:schemeClr val="lt1"/>
+          </a:fillRef>
+          <a:effectRef idx="0">
+            <a:schemeClr val="dk1"/>
+          </a:effectRef>
+          <a:fontRef idx="minor">
+            <a:schemeClr val="dk1"/>
+          </a:fontRef>
+        </p:style>
+        <p:txBody>
+          <a:bodyPr lIns="90000" tIns="72000" rIns="90000" bIns="72000" rtlCol="0" anchor="ctr"/>
+          <a:lstStyle/>
+          <a:p>
+            <a:pPr marR="0" algn="ctr" defTabSz="914400" eaLnBrk="1" fontAlgn="base" latinLnBrk="0" hangingPunct="1">
+              <a:lnSpc>
+                <a:spcPct val="100000"/>
+              </a:lnSpc>
+              <a:spcBef>
+                <a:spcPct val="50000"/>
+              </a:spcBef>
+              <a:spcAft>
+                <a:spcPct val="0"/>
+              </a:spcAft>
+              <a:buClr>
+                <a:srgbClr val="F0AB00"/>
+              </a:buClr>
+              <a:buSzPct val="80000"/>
+              <a:tabLst/>
+            </a:pPr>
+            <a:r>
+              <a:rPr lang="de-DE" sz="1800" b="1" kern="0" dirty="0">
+                <a:ea typeface="Arial Unicode MS" pitchFamily="34" charset="-128"/>
+                <a:cs typeface="Arial Unicode MS" pitchFamily="34" charset="-128"/>
+              </a:rPr>
+              <a:t>Secret</a:t>
+            </a:r>
+            <a:endParaRPr kumimoji="0" lang="de-DE" sz="1800" b="1" i="0" u="none" strike="noStrike" kern="0" cap="none" spc="0" normalizeH="0" baseline="0" noProof="0" dirty="0" err="1">
+              <a:ln>
+                <a:noFill/>
+              </a:ln>
+              <a:effectLst/>
+              <a:uLnTx/>
+              <a:uFillTx/>
+              <a:ea typeface="Arial Unicode MS" pitchFamily="34" charset="-128"/>
+              <a:cs typeface="Arial Unicode MS" pitchFamily="34" charset="-128"/>
+            </a:endParaRPr>
+          </a:p>
+        </p:txBody>
+      </p:sp>
+      <p:sp>
+        <p:nvSpPr>
+          <p:cNvPr id="17" name="Textfeld 16">
+            <a:extLst>
+              <a:ext uri="{FF2B5EF4-FFF2-40B4-BE49-F238E27FC236}">
+                <a16:creationId xmlns:a16="http://schemas.microsoft.com/office/drawing/2014/main" id="{A252FDF0-D502-6F47-96C2-D41F7EE5173F}"/>
+              </a:ext>
+            </a:extLst>
+          </p:cNvPr>
+          <p:cNvSpPr txBox="1"/>
+          <p:nvPr/>
+        </p:nvSpPr>
+        <p:spPr>
+          <a:xfrm>
+            <a:off x="5411398" y="5010019"/>
+            <a:ext cx="1846659" cy="692497"/>
+          </a:xfrm>
+          <a:prstGeom prst="rect">
+            <a:avLst/>
+          </a:prstGeom>
+          <a:noFill/>
+        </p:spPr>
+        <p:txBody>
+          <a:bodyPr wrap="none" lIns="0" tIns="0" rIns="0" bIns="0" rtlCol="0">
+            <a:spAutoFit/>
+          </a:bodyPr>
+          <a:lstStyle/>
+          <a:p>
+            <a:pPr fontAlgn="base">
+              <a:spcBef>
+                <a:spcPct val="50000"/>
+              </a:spcBef>
+              <a:spcAft>
+                <a:spcPct val="0"/>
+              </a:spcAft>
+              <a:buClr>
+                <a:srgbClr val="F0AB00"/>
+              </a:buClr>
+              <a:buSzPct val="80000"/>
+            </a:pPr>
+            <a:r>
+              <a:rPr lang="de-DE" sz="1800" b="1" kern="0" dirty="0">
+                <a:ea typeface="Arial Unicode MS" pitchFamily="34" charset="-128"/>
+                <a:cs typeface="Arial Unicode MS" pitchFamily="34" charset="-128"/>
+              </a:rPr>
+              <a:t>Template Engine</a:t>
+            </a:r>
+          </a:p>
+          <a:p>
+            <a:pPr fontAlgn="base">
+              <a:spcBef>
+                <a:spcPct val="50000"/>
+              </a:spcBef>
+              <a:spcAft>
+                <a:spcPct val="0"/>
+              </a:spcAft>
+              <a:buClr>
+                <a:srgbClr val="F0AB00"/>
+              </a:buClr>
+              <a:buSzPct val="80000"/>
+            </a:pPr>
+            <a:endParaRPr lang="de-DE" sz="1800" b="1" kern="0" dirty="0">
+              <a:ea typeface="Arial Unicode MS" pitchFamily="34" charset="-128"/>
+              <a:cs typeface="Arial Unicode MS" pitchFamily="34" charset="-128"/>
+            </a:endParaRPr>
+          </a:p>
+        </p:txBody>
+      </p:sp>
+    </p:spTree>
+    <p:extLst>
+      <p:ext uri="{BB962C8B-B14F-4D97-AF65-F5344CB8AC3E}">
+        <p14:creationId xmlns:p14="http://schemas.microsoft.com/office/powerpoint/2010/main" val="1057045348"/>
+      </p:ext>
+    </p:extLst>
+  </p:cSld>
+  <p:clrMapOvr>
+    <a:masterClrMapping/>
+  </p:clrMapOvr>
+  <p:timing>
+    <p:tnLst>
+      <p:par>
+        <p:cTn id="1" dur="indefinite" restart="never" nodeType="tmRoot">
+          <p:childTnLst>
+            <p:seq concurrent="1" nextAc="seek">
+              <p:cTn id="2" dur="indefinite" nodeType="mainSeq">
+                <p:childTnLst>
+                  <p:par>
+                    <p:cTn id="3" fill="hold">
+                      <p:stCondLst>
+                        <p:cond delay="indefinite"/>
+                      </p:stCondLst>
+                      <p:childTnLst>
+                        <p:par>
+                          <p:cTn id="4" fill="hold">
+                            <p:stCondLst>
+                              <p:cond delay="0"/>
+                            </p:stCondLst>
+                            <p:childTnLst>
+                              <p:par>
+                                <p:cTn id="5" presetID="1" presetClass="entr" presetSubtype="0" fill="hold" nodeType="clickEffect">
+                                  <p:stCondLst>
+                                    <p:cond delay="0"/>
+                                  </p:stCondLst>
+                                  <p:childTnLst>
+                                    <p:set>
+                                      <p:cBhvr>
+                                        <p:cTn id="6" dur="1" fill="hold">
+                                          <p:stCondLst>
+                                            <p:cond delay="0"/>
+                                          </p:stCondLst>
+                                        </p:cTn>
+                                        <p:tgtEl>
+                                          <p:spTgt spid="9"/>
+                                        </p:tgtEl>
+                                        <p:attrNameLst>
+                                          <p:attrName>style.visibility</p:attrName>
+                                        </p:attrNameLst>
+                                      </p:cBhvr>
+                                      <p:to>
+                                        <p:strVal val="visible"/>
+                                      </p:to>
+                                    </p:set>
+                                  </p:childTnLst>
+                                </p:cTn>
+                              </p:par>
+                              <p:par>
+                                <p:cTn id="7" presetID="1" presetClass="entr" presetSubtype="0" fill="hold" nodeType="withEffect">
+                                  <p:stCondLst>
+                                    <p:cond delay="0"/>
+                                  </p:stCondLst>
+                                  <p:childTnLst>
+                                    <p:set>
+                                      <p:cBhvr>
+                                        <p:cTn id="8" dur="1" fill="hold">
+                                          <p:stCondLst>
+                                            <p:cond delay="0"/>
+                                          </p:stCondLst>
+                                        </p:cTn>
+                                        <p:tgtEl>
+                                          <p:spTgt spid="11"/>
+                                        </p:tgtEl>
+                                        <p:attrNameLst>
+                                          <p:attrName>style.visibility</p:attrName>
+                                        </p:attrNameLst>
+                                      </p:cBhvr>
+                                      <p:to>
+                                        <p:strVal val="visible"/>
+                                      </p:to>
+                                    </p:set>
+                                  </p:childTnLst>
+                                </p:cTn>
+                              </p:par>
+                              <p:par>
+                                <p:cTn id="9" presetID="1" presetClass="entr" presetSubtype="0" fill="hold" grpId="0" nodeType="withEffect">
+                                  <p:stCondLst>
+                                    <p:cond delay="0"/>
+                                  </p:stCondLst>
+                                  <p:childTnLst>
+                                    <p:set>
+                                      <p:cBhvr>
+                                        <p:cTn id="10" dur="1" fill="hold">
+                                          <p:stCondLst>
+                                            <p:cond delay="0"/>
+                                          </p:stCondLst>
+                                        </p:cTn>
+                                        <p:tgtEl>
+                                          <p:spTgt spid="17"/>
+                                        </p:tgtEl>
+                                        <p:attrNameLst>
+                                          <p:attrName>style.visibility</p:attrName>
+                                        </p:attrNameLst>
+                                      </p:cBhvr>
+                                      <p:to>
+                                        <p:strVal val="visible"/>
+                                      </p:to>
+                                    </p:set>
+                                  </p:childTnLst>
+                                </p:cTn>
+                              </p:par>
+                            </p:childTnLst>
+                          </p:cTn>
+                        </p:par>
+                      </p:childTnLst>
+                    </p:cTn>
+                  </p:par>
+                  <p:par>
+                    <p:cTn id="11" fill="hold">
+                      <p:stCondLst>
+                        <p:cond delay="indefinite"/>
+                      </p:stCondLst>
+                      <p:childTnLst>
+                        <p:par>
+                          <p:cTn id="12" fill="hold">
+                            <p:stCondLst>
+                              <p:cond delay="0"/>
+                            </p:stCondLst>
+                            <p:childTnLst>
+                              <p:par>
+                                <p:cTn id="13" presetID="1" presetClass="entr" presetSubtype="0" fill="hold" grpId="0" nodeType="clickEffect">
+                                  <p:stCondLst>
+                                    <p:cond delay="0"/>
+                                  </p:stCondLst>
+                                  <p:childTnLst>
+                                    <p:set>
+                                      <p:cBhvr>
+                                        <p:cTn id="14" dur="1" fill="hold">
+                                          <p:stCondLst>
+                                            <p:cond delay="0"/>
+                                          </p:stCondLst>
+                                        </p:cTn>
+                                        <p:tgtEl>
+                                          <p:spTgt spid="12"/>
+                                        </p:tgtEl>
+                                        <p:attrNameLst>
+                                          <p:attrName>style.visibility</p:attrName>
+                                        </p:attrNameLst>
+                                      </p:cBhvr>
+                                      <p:to>
+                                        <p:strVal val="visible"/>
+                                      </p:to>
+                                    </p:set>
+                                  </p:childTnLst>
+                                </p:cTn>
+                              </p:par>
+                              <p:par>
+                                <p:cTn id="15" presetID="1" presetClass="entr" presetSubtype="0" fill="hold" grpId="0" nodeType="withEffect">
+                                  <p:stCondLst>
+                                    <p:cond delay="0"/>
+                                  </p:stCondLst>
+                                  <p:childTnLst>
+                                    <p:set>
+                                      <p:cBhvr>
+                                        <p:cTn id="16" dur="1" fill="hold">
+                                          <p:stCondLst>
+                                            <p:cond delay="0"/>
+                                          </p:stCondLst>
+                                        </p:cTn>
+                                        <p:tgtEl>
+                                          <p:spTgt spid="13"/>
+                                        </p:tgtEl>
+                                        <p:attrNameLst>
+                                          <p:attrName>style.visibility</p:attrName>
+                                        </p:attrNameLst>
+                                      </p:cBhvr>
+                                      <p:to>
+                                        <p:strVal val="visible"/>
+                                      </p:to>
+                                    </p:set>
+                                  </p:childTnLst>
+                                </p:cTn>
+                              </p:par>
+                              <p:par>
+                                <p:cTn id="17" presetID="1" presetClass="entr" presetSubtype="0" fill="hold" grpId="0" nodeType="withEffect">
+                                  <p:stCondLst>
+                                    <p:cond delay="0"/>
+                                  </p:stCondLst>
+                                  <p:childTnLst>
+                                    <p:set>
+                                      <p:cBhvr>
+                                        <p:cTn id="18" dur="1" fill="hold">
+                                          <p:stCondLst>
+                                            <p:cond delay="0"/>
+                                          </p:stCondLst>
+                                        </p:cTn>
+                                        <p:tgtEl>
+                                          <p:spTgt spid="14"/>
+                                        </p:tgtEl>
+                                        <p:attrNameLst>
+                                          <p:attrName>style.visibility</p:attrName>
+                                        </p:attrNameLst>
+                                      </p:cBhvr>
+                                      <p:to>
+                                        <p:strVal val="visible"/>
+                                      </p:to>
+                                    </p:set>
+                                  </p:childTnLst>
+                                </p:cTn>
+                              </p:par>
+                              <p:par>
+                                <p:cTn id="19" presetID="1" presetClass="entr" presetSubtype="0" fill="hold" grpId="0" nodeType="withEffect">
+                                  <p:stCondLst>
+                                    <p:cond delay="0"/>
+                                  </p:stCondLst>
+                                  <p:childTnLst>
+                                    <p:set>
+                                      <p:cBhvr>
+                                        <p:cTn id="20" dur="1" fill="hold">
+                                          <p:stCondLst>
+                                            <p:cond delay="0"/>
+                                          </p:stCondLst>
+                                        </p:cTn>
+                                        <p:tgtEl>
+                                          <p:spTgt spid="15"/>
+                                        </p:tgtEl>
+                                        <p:attrNameLst>
+                                          <p:attrName>style.visibility</p:attrName>
+                                        </p:attrNameLst>
+                                      </p:cBhvr>
+                                      <p:to>
+                                        <p:strVal val="visible"/>
+                                      </p:to>
+                                    </p:set>
+                                  </p:childTnLst>
+                                </p:cTn>
+                              </p:par>
+                              <p:par>
+                                <p:cTn id="21" presetID="1" presetClass="entr" presetSubtype="0" fill="hold" grpId="0" nodeType="withEffect">
+                                  <p:stCondLst>
+                                    <p:cond delay="0"/>
+                                  </p:stCondLst>
+                                  <p:childTnLst>
+                                    <p:set>
+                                      <p:cBhvr>
+                                        <p:cTn id="22" dur="1" fill="hold">
+                                          <p:stCondLst>
+                                            <p:cond delay="0"/>
+                                          </p:stCondLst>
+                                        </p:cTn>
+                                        <p:tgtEl>
+                                          <p:spTgt spid="16"/>
+                                        </p:tgtEl>
+                                        <p:attrNameLst>
+                                          <p:attrName>style.visibility</p:attrName>
+                                        </p:attrNameLst>
+                                      </p:cBhvr>
+                                      <p:to>
+                                        <p:strVal val="visible"/>
+                                      </p:to>
+                                    </p:set>
+                                  </p:childTnLst>
+                                </p:cTn>
+                              </p:par>
+                            </p:childTnLst>
+                          </p:cTn>
+                        </p:par>
+                      </p:childTnLst>
+                    </p:cTn>
+                  </p:par>
+                </p:childTnLst>
+              </p:cTn>
+              <p:prevCondLst>
+                <p:cond evt="onPrev" delay="0">
+                  <p:tgtEl>
+                    <p:sldTgt/>
+                  </p:tgtEl>
+                </p:cond>
+              </p:prevCondLst>
+              <p:nextCondLst>
+                <p:cond evt="onNext" delay="0">
+                  <p:tgtEl>
+                    <p:sldTgt/>
+                  </p:tgtEl>
+                </p:cond>
+              </p:nextCondLst>
+            </p:seq>
+          </p:childTnLst>
+        </p:cTn>
+      </p:par>
+    </p:tnLst>
+    <p:bldLst>
+      <p:bldP spid="12" grpId="0" animBg="1"/>
+      <p:bldP spid="13" grpId="0" animBg="1"/>
+      <p:bldP spid="14" grpId="0" animBg="1"/>
+      <p:bldP spid="15" grpId="0" animBg="1"/>
+      <p:bldP spid="16" grpId="0" animBg="1"/>
+      <p:bldP spid="17" grpId="0"/>
+    </p:bldLst>
+  </p:timing>
+</p:sld>
+</file>
+
+<file path=ppt/slides/slide3.xml><?xml version="1.0" encoding="utf-8"?>
 <p:sld xmlns:a="http://schemas.openxmlformats.org/drawingml/2006/main" xmlns:r="http://schemas.openxmlformats.org/officeDocument/2006/relationships" xmlns:p="http://schemas.openxmlformats.org/presentationml/2006/main">
   <p:cSld>
     <p:spTree>
@@ -16572,7 +18294,7 @@
         </p:blipFill>
         <p:spPr>
           <a:xfrm>
-            <a:off x="515991" y="2181638"/>
+            <a:off x="504001" y="2120710"/>
             <a:ext cx="5304762" cy="771429"/>
           </a:xfrm>
           <a:prstGeom prst="rect">
@@ -16608,7 +18330,7 @@
           <a:p>
             <a:r>
               <a:rPr lang="en-US" dirty="0"/>
-              <a:t>About (default) values</a:t>
+              <a:t>Parameterization</a:t>
             </a:r>
           </a:p>
         </p:txBody>
@@ -16627,13 +18349,13 @@
         </p:nvSpPr>
         <p:spPr bwMode="gray">
           <a:xfrm>
-            <a:off x="7157149" y="1349961"/>
+            <a:off x="6291910" y="688666"/>
             <a:ext cx="4101737" cy="1217392"/>
           </a:xfrm>
           <a:prstGeom prst="wedgeRectCallout">
             <a:avLst>
-              <a:gd name="adj1" fmla="val -79533"/>
-              <a:gd name="adj2" fmla="val 34861"/>
+              <a:gd name="adj1" fmla="val -128434"/>
+              <a:gd name="adj2" fmla="val 38092"/>
             </a:avLst>
           </a:prstGeom>
           <a:ln>
@@ -16686,7 +18408,7 @@
                 <a:ea typeface="Arial Unicode MS" pitchFamily="34" charset="-128"/>
                 <a:cs typeface="Arial Unicode MS" pitchFamily="34" charset="-128"/>
               </a:rPr>
-              <a:t>Most charts come with default values, stored in a </a:t>
+              <a:t>Default parameters are stored in a file called “</a:t>
             </a:r>
             <a:r>
               <a:rPr kumimoji="0" lang="en-US" sz="1800" b="0" i="0" u="none" strike="noStrike" kern="0" cap="none" spc="0" normalizeH="0" baseline="0" noProof="0" dirty="0" err="1">
@@ -16712,31 +18434,8 @@
                 <a:ea typeface="Arial Unicode MS" pitchFamily="34" charset="-128"/>
                 <a:cs typeface="Arial Unicode MS" pitchFamily="34" charset="-128"/>
               </a:rPr>
-              <a:t> file in the chart’s </a:t>
-            </a:r>
-            <a:r>
-              <a:rPr kumimoji="0" lang="en-US" sz="1800" b="0" i="0" u="none" strike="noStrike" kern="0" cap="none" spc="0" normalizeH="0" baseline="0" noProof="0" dirty="0" err="1">
-                <a:ln>
-                  <a:noFill/>
-                </a:ln>
-                <a:effectLst/>
-                <a:uLnTx/>
-                <a:uFillTx/>
-                <a:ea typeface="Arial Unicode MS" pitchFamily="34" charset="-128"/>
-                <a:cs typeface="Arial Unicode MS" pitchFamily="34" charset="-128"/>
-              </a:rPr>
-              <a:t>direcotry</a:t>
-            </a:r>
-            <a:endParaRPr kumimoji="0" lang="en-US" sz="1800" b="0" i="0" u="none" strike="noStrike" kern="0" cap="none" spc="0" normalizeH="0" baseline="0" noProof="0" dirty="0">
-              <a:ln>
-                <a:noFill/>
-              </a:ln>
-              <a:effectLst/>
-              <a:uLnTx/>
-              <a:uFillTx/>
-              <a:ea typeface="Arial Unicode MS" pitchFamily="34" charset="-128"/>
-              <a:cs typeface="Arial Unicode MS" pitchFamily="34" charset="-128"/>
-            </a:endParaRPr>
+              <a:t>” together with the templates.</a:t>
+            </a:r>
           </a:p>
         </p:txBody>
       </p:sp>
@@ -16754,7 +18453,7 @@
         </p:nvSpPr>
         <p:spPr bwMode="gray">
           <a:xfrm>
-            <a:off x="7157149" y="3049536"/>
+            <a:off x="7432452" y="3053646"/>
             <a:ext cx="4101737" cy="1217392"/>
           </a:xfrm>
           <a:prstGeom prst="wedgeRectCallout">
@@ -16803,50 +18502,11 @@
               <a:tabLst/>
             </a:pPr>
             <a:r>
-              <a:rPr kumimoji="0" lang="en-US" sz="1800" b="0" i="0" u="none" strike="noStrike" kern="0" cap="none" spc="0" normalizeH="0" baseline="0" noProof="0" dirty="0">
-                <a:ln>
-                  <a:noFill/>
-                </a:ln>
-                <a:effectLst/>
-                <a:uLnTx/>
-                <a:uFillTx/>
-                <a:ea typeface="Arial Unicode MS" pitchFamily="34" charset="-128"/>
-                <a:cs typeface="Arial Unicode MS" pitchFamily="34" charset="-128"/>
-              </a:rPr>
-              <a:t>Values follow the usual </a:t>
-            </a:r>
-            <a:r>
-              <a:rPr kumimoji="0" lang="en-US" sz="1800" b="0" i="0" u="none" strike="noStrike" kern="0" cap="none" spc="0" normalizeH="0" baseline="0" noProof="0" dirty="0" err="1">
-                <a:ln>
-                  <a:noFill/>
-                </a:ln>
-                <a:effectLst/>
-                <a:uLnTx/>
-                <a:uFillTx/>
-                <a:ea typeface="Arial Unicode MS" pitchFamily="34" charset="-128"/>
-                <a:cs typeface="Arial Unicode MS" pitchFamily="34" charset="-128"/>
-              </a:rPr>
-              <a:t>yaml</a:t>
-            </a:r>
-            <a:r>
-              <a:rPr kumimoji="0" lang="en-US" sz="1800" b="0" i="0" u="none" strike="noStrike" kern="0" cap="none" spc="0" normalizeH="0" baseline="0" noProof="0" dirty="0">
-                <a:ln>
-                  <a:noFill/>
-                </a:ln>
-                <a:effectLst/>
-                <a:uLnTx/>
-                <a:uFillTx/>
-                <a:ea typeface="Arial Unicode MS" pitchFamily="34" charset="-128"/>
-                <a:cs typeface="Arial Unicode MS" pitchFamily="34" charset="-128"/>
-              </a:rPr>
-              <a:t> structure (indented</a:t>
-            </a:r>
-            <a:r>
               <a:rPr lang="en-US" sz="1800" kern="0" dirty="0">
                 <a:ea typeface="Arial Unicode MS" pitchFamily="34" charset="-128"/>
                 <a:cs typeface="Arial Unicode MS" pitchFamily="34" charset="-128"/>
               </a:rPr>
-              <a:t>, maps, lists)</a:t>
+              <a:t>Values can be organized in key-value pairs, but also in maps and arrays.</a:t>
             </a:r>
             <a:endParaRPr kumimoji="0" lang="en-US" sz="1800" b="0" i="0" u="none" strike="noStrike" kern="0" cap="none" spc="0" normalizeH="0" baseline="0" noProof="0" dirty="0">
               <a:ln>
@@ -16858,110 +18518,6 @@
               <a:ea typeface="Arial Unicode MS" pitchFamily="34" charset="-128"/>
               <a:cs typeface="Arial Unicode MS" pitchFamily="34" charset="-128"/>
             </a:endParaRPr>
-          </a:p>
-        </p:txBody>
-      </p:sp>
-      <p:sp>
-        <p:nvSpPr>
-          <p:cNvPr id="8" name="Speech Bubble: Rectangle 7">
-            <a:extLst>
-              <a:ext uri="{FF2B5EF4-FFF2-40B4-BE49-F238E27FC236}">
-                <a16:creationId xmlns:a16="http://schemas.microsoft.com/office/drawing/2014/main" id="{33632052-3C24-4B78-BE91-D81A3475BFBD}"/>
-              </a:ext>
-            </a:extLst>
-          </p:cNvPr>
-          <p:cNvSpPr/>
-          <p:nvPr/>
-        </p:nvSpPr>
-        <p:spPr bwMode="gray">
-          <a:xfrm>
-            <a:off x="2666568" y="4261373"/>
-            <a:ext cx="4101737" cy="1217392"/>
-          </a:xfrm>
-          <a:prstGeom prst="wedgeRectCallout">
-            <a:avLst>
-              <a:gd name="adj1" fmla="val -50679"/>
-              <a:gd name="adj2" fmla="val -138614"/>
-            </a:avLst>
-          </a:prstGeom>
-          <a:ln>
-            <a:headEnd/>
-            <a:tailEnd/>
-          </a:ln>
-        </p:spPr>
-        <p:style>
-          <a:lnRef idx="2">
-            <a:schemeClr val="accent5"/>
-          </a:lnRef>
-          <a:fillRef idx="1">
-            <a:schemeClr val="lt1"/>
-          </a:fillRef>
-          <a:effectRef idx="0">
-            <a:schemeClr val="accent5"/>
-          </a:effectRef>
-          <a:fontRef idx="minor">
-            <a:schemeClr val="dk1"/>
-          </a:fontRef>
-        </p:style>
-        <p:txBody>
-          <a:bodyPr lIns="90000" tIns="72000" rIns="90000" bIns="72000" rtlCol="0" anchor="ctr"/>
-          <a:lstStyle/>
-          <a:p>
-            <a:pPr marR="0" algn="ctr" defTabSz="914400" eaLnBrk="1" fontAlgn="base" latinLnBrk="0" hangingPunct="1">
-              <a:lnSpc>
-                <a:spcPct val="100000"/>
-              </a:lnSpc>
-              <a:spcBef>
-                <a:spcPct val="50000"/>
-              </a:spcBef>
-              <a:spcAft>
-                <a:spcPct val="0"/>
-              </a:spcAft>
-              <a:buClr>
-                <a:srgbClr val="F0AB00"/>
-              </a:buClr>
-              <a:buSzPct val="80000"/>
-              <a:tabLst/>
-            </a:pPr>
-            <a:r>
-              <a:rPr kumimoji="0" lang="en-US" sz="1800" b="0" i="0" u="none" strike="noStrike" kern="0" cap="none" spc="0" normalizeH="0" baseline="0" noProof="0" dirty="0">
-                <a:ln>
-                  <a:noFill/>
-                </a:ln>
-                <a:effectLst/>
-                <a:uLnTx/>
-                <a:uFillTx/>
-                <a:ea typeface="Arial Unicode MS" pitchFamily="34" charset="-128"/>
-                <a:cs typeface="Arial Unicode MS" pitchFamily="34" charset="-128"/>
-              </a:rPr>
-              <a:t>Overwrite default values by specifying the with --set or send a custom values </a:t>
-            </a:r>
-            <a:r>
-              <a:rPr kumimoji="0" lang="en-US" sz="1800" b="0" i="0" u="none" strike="noStrike" kern="0" cap="none" spc="0" normalizeH="0" baseline="0" noProof="0" dirty="0" err="1">
-                <a:ln>
-                  <a:noFill/>
-                </a:ln>
-                <a:effectLst/>
-                <a:uLnTx/>
-                <a:uFillTx/>
-                <a:ea typeface="Arial Unicode MS" pitchFamily="34" charset="-128"/>
-                <a:cs typeface="Arial Unicode MS" pitchFamily="34" charset="-128"/>
-              </a:rPr>
-              <a:t>yaml</a:t>
-            </a:r>
-            <a:r>
-              <a:rPr kumimoji="0" lang="en-US" sz="1800" b="0" i="0" u="none" strike="noStrike" kern="0" cap="none" spc="0" normalizeH="0" baseline="0" noProof="0" dirty="0">
-                <a:ln>
-                  <a:noFill/>
-                </a:ln>
-                <a:effectLst/>
-                <a:uLnTx/>
-                <a:uFillTx/>
-                <a:ea typeface="Arial Unicode MS" pitchFamily="34" charset="-128"/>
-                <a:cs typeface="Arial Unicode MS" pitchFamily="34" charset="-128"/>
-              </a:rPr>
-              <a:t> file</a:t>
-            </a:r>
           </a:p>
         </p:txBody>
       </p:sp>
@@ -17072,6 +18628,246 @@
           </a:p>
         </p:txBody>
       </p:sp>
+      <p:pic>
+        <p:nvPicPr>
+          <p:cNvPr id="13" name="Grafik 12" descr="Zauberstab (automatisch) mit einfarbiger Füllung">
+            <a:extLst>
+              <a:ext uri="{FF2B5EF4-FFF2-40B4-BE49-F238E27FC236}">
+                <a16:creationId xmlns:a16="http://schemas.microsoft.com/office/drawing/2014/main" id="{3AA27561-89CA-EE4D-9D0A-14A7AFF9CF59}"/>
+              </a:ext>
+            </a:extLst>
+          </p:cNvPr>
+          <p:cNvPicPr>
+            <a:picLocks noChangeAspect="1"/>
+          </p:cNvPicPr>
+          <p:nvPr/>
+        </p:nvPicPr>
+        <p:blipFill>
+          <a:blip r:embed="rId4">
+            <a:extLst>
+              <a:ext uri="{96DAC541-7B7A-43D3-8B79-37D633B846F1}">
+                <asvg:svgBlip xmlns:asvg="http://schemas.microsoft.com/office/drawing/2016/SVG/main" r:embed="rId5"/>
+              </a:ext>
+            </a:extLst>
+          </a:blip>
+          <a:stretch>
+            <a:fillRect/>
+          </a:stretch>
+        </p:blipFill>
+        <p:spPr>
+          <a:xfrm>
+            <a:off x="504001" y="3839392"/>
+            <a:ext cx="1217393" cy="1217393"/>
+          </a:xfrm>
+          <a:prstGeom prst="rect">
+            <a:avLst/>
+          </a:prstGeom>
+        </p:spPr>
+      </p:pic>
+      <p:pic>
+        <p:nvPicPr>
+          <p:cNvPr id="14" name="Grafik 13" descr="Zaubererhut mit einfarbiger Füllung">
+            <a:extLst>
+              <a:ext uri="{FF2B5EF4-FFF2-40B4-BE49-F238E27FC236}">
+                <a16:creationId xmlns:a16="http://schemas.microsoft.com/office/drawing/2014/main" id="{BDB69412-7810-3645-BCA9-7C1B263E8DF1}"/>
+              </a:ext>
+            </a:extLst>
+          </p:cNvPr>
+          <p:cNvPicPr>
+            <a:picLocks noChangeAspect="1"/>
+          </p:cNvPicPr>
+          <p:nvPr/>
+        </p:nvPicPr>
+        <p:blipFill>
+          <a:blip r:embed="rId6">
+            <a:extLst>
+              <a:ext uri="{96DAC541-7B7A-43D3-8B79-37D633B846F1}">
+                <asvg:svgBlip xmlns:asvg="http://schemas.microsoft.com/office/drawing/2016/SVG/main" r:embed="rId7"/>
+              </a:ext>
+            </a:extLst>
+          </a:blip>
+          <a:stretch>
+            <a:fillRect/>
+          </a:stretch>
+        </p:blipFill>
+        <p:spPr>
+          <a:xfrm>
+            <a:off x="1038360" y="4674161"/>
+            <a:ext cx="1553708" cy="1553708"/>
+          </a:xfrm>
+          <a:prstGeom prst="rect">
+            <a:avLst/>
+          </a:prstGeom>
+        </p:spPr>
+      </p:pic>
+      <p:sp>
+        <p:nvSpPr>
+          <p:cNvPr id="5" name="Textfeld 4">
+            <a:extLst>
+              <a:ext uri="{FF2B5EF4-FFF2-40B4-BE49-F238E27FC236}">
+                <a16:creationId xmlns:a16="http://schemas.microsoft.com/office/drawing/2014/main" id="{3431126F-4FAB-8747-A010-6892795392BF}"/>
+              </a:ext>
+            </a:extLst>
+          </p:cNvPr>
+          <p:cNvSpPr txBox="1"/>
+          <p:nvPr/>
+        </p:nvSpPr>
+        <p:spPr>
+          <a:xfrm>
+            <a:off x="1815214" y="4139653"/>
+            <a:ext cx="4239943" cy="369332"/>
+          </a:xfrm>
+          <a:prstGeom prst="rect">
+            <a:avLst/>
+          </a:prstGeom>
+          <a:noFill/>
+        </p:spPr>
+        <p:txBody>
+          <a:bodyPr wrap="none" lIns="0" tIns="0" rIns="0" bIns="0" rtlCol="0">
+            <a:spAutoFit/>
+          </a:bodyPr>
+          <a:lstStyle/>
+          <a:p>
+            <a:pPr fontAlgn="base">
+              <a:spcBef>
+                <a:spcPct val="50000"/>
+              </a:spcBef>
+              <a:spcAft>
+                <a:spcPct val="0"/>
+              </a:spcAft>
+              <a:buClr>
+                <a:srgbClr val="F0AB00"/>
+              </a:buClr>
+              <a:buSzPct val="80000"/>
+            </a:pPr>
+            <a:r>
+              <a:rPr lang="de-DE" sz="2400" b="1" kern="0" dirty="0">
+                <a:latin typeface="Courier" pitchFamily="2" charset="0"/>
+                <a:ea typeface="Arial Unicode MS" pitchFamily="34" charset="-128"/>
+                <a:cs typeface="Arial Unicode MS" pitchFamily="34" charset="-128"/>
+              </a:rPr>
+              <a:t>{{ .</a:t>
+            </a:r>
+            <a:r>
+              <a:rPr lang="de-DE" sz="2400" b="1" kern="0" dirty="0" err="1">
+                <a:latin typeface="Courier" pitchFamily="2" charset="0"/>
+                <a:ea typeface="Arial Unicode MS" pitchFamily="34" charset="-128"/>
+                <a:cs typeface="Arial Unicode MS" pitchFamily="34" charset="-128"/>
+              </a:rPr>
+              <a:t>Values.myMessage</a:t>
+            </a:r>
+            <a:r>
+              <a:rPr lang="de-DE" sz="2400" b="1" kern="0" dirty="0">
+                <a:latin typeface="Courier" pitchFamily="2" charset="0"/>
+                <a:ea typeface="Arial Unicode MS" pitchFamily="34" charset="-128"/>
+                <a:cs typeface="Arial Unicode MS" pitchFamily="34" charset="-128"/>
+              </a:rPr>
+              <a:t> }}</a:t>
+            </a:r>
+          </a:p>
+        </p:txBody>
+      </p:sp>
+      <p:sp>
+        <p:nvSpPr>
+          <p:cNvPr id="15" name="Speech Bubble: Rectangle 6">
+            <a:extLst>
+              <a:ext uri="{FF2B5EF4-FFF2-40B4-BE49-F238E27FC236}">
+                <a16:creationId xmlns:a16="http://schemas.microsoft.com/office/drawing/2014/main" id="{67881191-0CCA-1E45-A181-B37946C7E540}"/>
+              </a:ext>
+            </a:extLst>
+          </p:cNvPr>
+          <p:cNvSpPr/>
+          <p:nvPr/>
+        </p:nvSpPr>
+        <p:spPr bwMode="gray">
+          <a:xfrm>
+            <a:off x="5808763" y="4969732"/>
+            <a:ext cx="4101737" cy="1217392"/>
+          </a:xfrm>
+          <a:prstGeom prst="wedgeRectCallout">
+            <a:avLst>
+              <a:gd name="adj1" fmla="val -86403"/>
+              <a:gd name="adj2" fmla="val -50503"/>
+            </a:avLst>
+          </a:prstGeom>
+          <a:ln>
+            <a:headEnd/>
+            <a:tailEnd/>
+          </a:ln>
+        </p:spPr>
+        <p:style>
+          <a:lnRef idx="2">
+            <a:schemeClr val="accent5"/>
+          </a:lnRef>
+          <a:fillRef idx="1">
+            <a:schemeClr val="lt1"/>
+          </a:fillRef>
+          <a:effectRef idx="0">
+            <a:schemeClr val="accent5"/>
+          </a:effectRef>
+          <a:fontRef idx="minor">
+            <a:schemeClr val="dk1"/>
+          </a:fontRef>
+        </p:style>
+        <p:txBody>
+          <a:bodyPr lIns="90000" tIns="72000" rIns="90000" bIns="72000" rtlCol="0" anchor="ctr"/>
+          <a:lstStyle/>
+          <a:p>
+            <a:pPr marR="0" algn="ctr" defTabSz="914400" eaLnBrk="1" fontAlgn="base" latinLnBrk="0" hangingPunct="1">
+              <a:lnSpc>
+                <a:spcPct val="100000"/>
+              </a:lnSpc>
+              <a:spcBef>
+                <a:spcPct val="50000"/>
+              </a:spcBef>
+              <a:spcAft>
+                <a:spcPct val="0"/>
+              </a:spcAft>
+              <a:buClr>
+                <a:srgbClr val="F0AB00"/>
+              </a:buClr>
+              <a:buSzPct val="80000"/>
+              <a:tabLst/>
+            </a:pPr>
+            <a:r>
+              <a:rPr kumimoji="0" lang="en-US" sz="1800" b="0" i="0" u="none" strike="noStrike" kern="0" cap="none" spc="0" normalizeH="0" baseline="0" noProof="0" dirty="0">
+                <a:ln>
+                  <a:noFill/>
+                </a:ln>
+                <a:effectLst/>
+                <a:uLnTx/>
+                <a:uFillTx/>
+                <a:ea typeface="Arial Unicode MS" pitchFamily="34" charset="-128"/>
+                <a:cs typeface="Arial Unicode MS" pitchFamily="34" charset="-128"/>
+              </a:rPr>
+              <a:t>The</a:t>
+            </a:r>
+            <a:r>
+              <a:rPr kumimoji="0" lang="en-US" sz="1800" b="0" i="0" u="none" strike="noStrike" kern="0" cap="none" spc="0" normalizeH="0" noProof="0" dirty="0">
+                <a:ln>
+                  <a:noFill/>
+                </a:ln>
+                <a:effectLst/>
+                <a:uLnTx/>
+                <a:uFillTx/>
+                <a:ea typeface="Arial Unicode MS" pitchFamily="34" charset="-128"/>
+                <a:cs typeface="Arial Unicode MS" pitchFamily="34" charset="-128"/>
+              </a:rPr>
+              <a:t> template engine substitutes placeholder with actual values.</a:t>
+            </a:r>
+            <a:endParaRPr kumimoji="0" lang="en-US" sz="1800" b="0" i="0" u="none" strike="noStrike" kern="0" cap="none" spc="0" normalizeH="0" baseline="0" noProof="0" dirty="0">
+              <a:ln>
+                <a:noFill/>
+              </a:ln>
+              <a:effectLst/>
+              <a:uLnTx/>
+              <a:uFillTx/>
+              <a:ea typeface="Arial Unicode MS" pitchFamily="34" charset="-128"/>
+              <a:cs typeface="Arial Unicode MS" pitchFamily="34" charset="-128"/>
+            </a:endParaRPr>
+          </a:p>
+        </p:txBody>
+      </p:sp>
     </p:spTree>
     <p:extLst>
       <p:ext uri="{BB962C8B-B14F-4D97-AF65-F5344CB8AC3E}">
@@ -17082,10 +18878,737 @@
   <p:clrMapOvr>
     <a:masterClrMapping/>
   </p:clrMapOvr>
+  <p:timing>
+    <p:tnLst>
+      <p:par>
+        <p:cTn id="1" dur="indefinite" restart="never" nodeType="tmRoot">
+          <p:childTnLst>
+            <p:seq concurrent="1" nextAc="seek">
+              <p:cTn id="2" dur="indefinite" nodeType="mainSeq">
+                <p:childTnLst>
+                  <p:par>
+                    <p:cTn id="3" fill="hold">
+                      <p:stCondLst>
+                        <p:cond delay="indefinite"/>
+                      </p:stCondLst>
+                      <p:childTnLst>
+                        <p:par>
+                          <p:cTn id="4" fill="hold">
+                            <p:stCondLst>
+                              <p:cond delay="0"/>
+                            </p:stCondLst>
+                            <p:childTnLst>
+                              <p:par>
+                                <p:cTn id="5" presetID="1" presetClass="entr" presetSubtype="0" fill="hold" nodeType="clickEffect">
+                                  <p:stCondLst>
+                                    <p:cond delay="0"/>
+                                  </p:stCondLst>
+                                  <p:childTnLst>
+                                    <p:set>
+                                      <p:cBhvr>
+                                        <p:cTn id="6" dur="1" fill="hold">
+                                          <p:stCondLst>
+                                            <p:cond delay="0"/>
+                                          </p:stCondLst>
+                                        </p:cTn>
+                                        <p:tgtEl>
+                                          <p:spTgt spid="2"/>
+                                        </p:tgtEl>
+                                        <p:attrNameLst>
+                                          <p:attrName>style.visibility</p:attrName>
+                                        </p:attrNameLst>
+                                      </p:cBhvr>
+                                      <p:to>
+                                        <p:strVal val="visible"/>
+                                      </p:to>
+                                    </p:set>
+                                  </p:childTnLst>
+                                </p:cTn>
+                              </p:par>
+                              <p:par>
+                                <p:cTn id="7" presetID="1" presetClass="entr" presetSubtype="0" fill="hold" grpId="0" nodeType="withEffect">
+                                  <p:stCondLst>
+                                    <p:cond delay="0"/>
+                                  </p:stCondLst>
+                                  <p:childTnLst>
+                                    <p:set>
+                                      <p:cBhvr>
+                                        <p:cTn id="8" dur="1" fill="hold">
+                                          <p:stCondLst>
+                                            <p:cond delay="0"/>
+                                          </p:stCondLst>
+                                        </p:cTn>
+                                        <p:tgtEl>
+                                          <p:spTgt spid="7"/>
+                                        </p:tgtEl>
+                                        <p:attrNameLst>
+                                          <p:attrName>style.visibility</p:attrName>
+                                        </p:attrNameLst>
+                                      </p:cBhvr>
+                                      <p:to>
+                                        <p:strVal val="visible"/>
+                                      </p:to>
+                                    </p:set>
+                                  </p:childTnLst>
+                                </p:cTn>
+                              </p:par>
+                            </p:childTnLst>
+                          </p:cTn>
+                        </p:par>
+                      </p:childTnLst>
+                    </p:cTn>
+                  </p:par>
+                  <p:par>
+                    <p:cTn id="9" fill="hold">
+                      <p:stCondLst>
+                        <p:cond delay="indefinite"/>
+                      </p:stCondLst>
+                      <p:childTnLst>
+                        <p:par>
+                          <p:cTn id="10" fill="hold">
+                            <p:stCondLst>
+                              <p:cond delay="0"/>
+                            </p:stCondLst>
+                            <p:childTnLst>
+                              <p:par>
+                                <p:cTn id="11" presetID="1" presetClass="entr" presetSubtype="0" fill="hold" nodeType="clickEffect">
+                                  <p:stCondLst>
+                                    <p:cond delay="0"/>
+                                  </p:stCondLst>
+                                  <p:childTnLst>
+                                    <p:set>
+                                      <p:cBhvr>
+                                        <p:cTn id="12" dur="1" fill="hold">
+                                          <p:stCondLst>
+                                            <p:cond delay="0"/>
+                                          </p:stCondLst>
+                                        </p:cTn>
+                                        <p:tgtEl>
+                                          <p:spTgt spid="13"/>
+                                        </p:tgtEl>
+                                        <p:attrNameLst>
+                                          <p:attrName>style.visibility</p:attrName>
+                                        </p:attrNameLst>
+                                      </p:cBhvr>
+                                      <p:to>
+                                        <p:strVal val="visible"/>
+                                      </p:to>
+                                    </p:set>
+                                  </p:childTnLst>
+                                </p:cTn>
+                              </p:par>
+                              <p:par>
+                                <p:cTn id="13" presetID="1" presetClass="entr" presetSubtype="0" fill="hold" nodeType="withEffect">
+                                  <p:stCondLst>
+                                    <p:cond delay="0"/>
+                                  </p:stCondLst>
+                                  <p:childTnLst>
+                                    <p:set>
+                                      <p:cBhvr>
+                                        <p:cTn id="14" dur="1" fill="hold">
+                                          <p:stCondLst>
+                                            <p:cond delay="0"/>
+                                          </p:stCondLst>
+                                        </p:cTn>
+                                        <p:tgtEl>
+                                          <p:spTgt spid="14"/>
+                                        </p:tgtEl>
+                                        <p:attrNameLst>
+                                          <p:attrName>style.visibility</p:attrName>
+                                        </p:attrNameLst>
+                                      </p:cBhvr>
+                                      <p:to>
+                                        <p:strVal val="visible"/>
+                                      </p:to>
+                                    </p:set>
+                                  </p:childTnLst>
+                                </p:cTn>
+                              </p:par>
+                              <p:par>
+                                <p:cTn id="15" presetID="1" presetClass="entr" presetSubtype="0" fill="hold" grpId="0" nodeType="withEffect">
+                                  <p:stCondLst>
+                                    <p:cond delay="0"/>
+                                  </p:stCondLst>
+                                  <p:childTnLst>
+                                    <p:set>
+                                      <p:cBhvr>
+                                        <p:cTn id="16" dur="1" fill="hold">
+                                          <p:stCondLst>
+                                            <p:cond delay="0"/>
+                                          </p:stCondLst>
+                                        </p:cTn>
+                                        <p:tgtEl>
+                                          <p:spTgt spid="5"/>
+                                        </p:tgtEl>
+                                        <p:attrNameLst>
+                                          <p:attrName>style.visibility</p:attrName>
+                                        </p:attrNameLst>
+                                      </p:cBhvr>
+                                      <p:to>
+                                        <p:strVal val="visible"/>
+                                      </p:to>
+                                    </p:set>
+                                  </p:childTnLst>
+                                </p:cTn>
+                              </p:par>
+                              <p:par>
+                                <p:cTn id="17" presetID="1" presetClass="entr" presetSubtype="0" fill="hold" grpId="0" nodeType="withEffect">
+                                  <p:stCondLst>
+                                    <p:cond delay="0"/>
+                                  </p:stCondLst>
+                                  <p:childTnLst>
+                                    <p:set>
+                                      <p:cBhvr>
+                                        <p:cTn id="18" dur="1" fill="hold">
+                                          <p:stCondLst>
+                                            <p:cond delay="0"/>
+                                          </p:stCondLst>
+                                        </p:cTn>
+                                        <p:tgtEl>
+                                          <p:spTgt spid="15"/>
+                                        </p:tgtEl>
+                                        <p:attrNameLst>
+                                          <p:attrName>style.visibility</p:attrName>
+                                        </p:attrNameLst>
+                                      </p:cBhvr>
+                                      <p:to>
+                                        <p:strVal val="visible"/>
+                                      </p:to>
+                                    </p:set>
+                                  </p:childTnLst>
+                                </p:cTn>
+                              </p:par>
+                            </p:childTnLst>
+                          </p:cTn>
+                        </p:par>
+                      </p:childTnLst>
+                    </p:cTn>
+                  </p:par>
+                </p:childTnLst>
+              </p:cTn>
+              <p:prevCondLst>
+                <p:cond evt="onPrev" delay="0">
+                  <p:tgtEl>
+                    <p:sldTgt/>
+                  </p:tgtEl>
+                </p:cond>
+              </p:prevCondLst>
+              <p:nextCondLst>
+                <p:cond evt="onNext" delay="0">
+                  <p:tgtEl>
+                    <p:sldTgt/>
+                  </p:tgtEl>
+                </p:cond>
+              </p:nextCondLst>
+            </p:seq>
+          </p:childTnLst>
+        </p:cTn>
+      </p:par>
+    </p:tnLst>
+    <p:bldLst>
+      <p:bldP spid="7" grpId="0" animBg="1"/>
+      <p:bldP spid="5" grpId="0"/>
+      <p:bldP spid="15" grpId="0" animBg="1"/>
+    </p:bldLst>
+  </p:timing>
 </p:sld>
 </file>
 
-<file path=ppt/slides/slide11.xml><?xml version="1.0" encoding="utf-8"?>
+<file path=ppt/slides/slide4.xml><?xml version="1.0" encoding="utf-8"?>
+<p:sld xmlns:a="http://schemas.openxmlformats.org/drawingml/2006/main" xmlns:r="http://schemas.openxmlformats.org/officeDocument/2006/relationships" xmlns:p="http://schemas.openxmlformats.org/presentationml/2006/main">
+  <p:cSld>
+    <p:spTree>
+      <p:nvGrpSpPr>
+        <p:cNvPr id="1" name=""/>
+        <p:cNvGrpSpPr/>
+        <p:nvPr/>
+      </p:nvGrpSpPr>
+      <p:grpSpPr>
+        <a:xfrm>
+          <a:off x="0" y="0"/>
+          <a:ext cx="0" cy="0"/>
+          <a:chOff x="0" y="0"/>
+          <a:chExt cx="0" cy="0"/>
+        </a:xfrm>
+      </p:grpSpPr>
+      <p:pic>
+        <p:nvPicPr>
+          <p:cNvPr id="3" name="Picture 2">
+            <a:extLst>
+              <a:ext uri="{FF2B5EF4-FFF2-40B4-BE49-F238E27FC236}">
+                <a16:creationId xmlns:a16="http://schemas.microsoft.com/office/drawing/2014/main" id="{1C13F139-5E5D-419A-9BD5-92AD40237BBF}"/>
+              </a:ext>
+            </a:extLst>
+          </p:cNvPr>
+          <p:cNvPicPr>
+            <a:picLocks noChangeAspect="1"/>
+          </p:cNvPicPr>
+          <p:nvPr/>
+        </p:nvPicPr>
+        <p:blipFill>
+          <a:blip r:embed="rId3"/>
+          <a:stretch>
+            <a:fillRect/>
+          </a:stretch>
+        </p:blipFill>
+        <p:spPr>
+          <a:xfrm>
+            <a:off x="649620" y="1371857"/>
+            <a:ext cx="5447619" cy="4114286"/>
+          </a:xfrm>
+          <a:prstGeom prst="rect">
+            <a:avLst/>
+          </a:prstGeom>
+          <a:ln>
+            <a:solidFill>
+              <a:schemeClr val="tx1"/>
+            </a:solidFill>
+          </a:ln>
+        </p:spPr>
+      </p:pic>
+      <p:sp>
+        <p:nvSpPr>
+          <p:cNvPr id="4" name="Title 3">
+            <a:extLst>
+              <a:ext uri="{FF2B5EF4-FFF2-40B4-BE49-F238E27FC236}">
+                <a16:creationId xmlns:a16="http://schemas.microsoft.com/office/drawing/2014/main" id="{2C20A3A3-5BE1-4DB7-9A60-49901FC75E7B}"/>
+              </a:ext>
+            </a:extLst>
+          </p:cNvPr>
+          <p:cNvSpPr>
+            <a:spLocks noGrp="1"/>
+          </p:cNvSpPr>
+          <p:nvPr>
+            <p:ph type="title"/>
+          </p:nvPr>
+        </p:nvSpPr>
+        <p:spPr>
+          <a:xfrm>
+            <a:off x="504001" y="504000"/>
+            <a:ext cx="11186476" cy="369332"/>
+          </a:xfrm>
+        </p:spPr>
+        <p:txBody>
+          <a:bodyPr/>
+          <a:lstStyle/>
+          <a:p>
+            <a:r>
+              <a:rPr lang="en-US" dirty="0"/>
+              <a:t>About templates</a:t>
+            </a:r>
+          </a:p>
+        </p:txBody>
+      </p:sp>
+      <p:sp>
+        <p:nvSpPr>
+          <p:cNvPr id="16" name="Speech Bubble: Rectangle 15">
+            <a:extLst>
+              <a:ext uri="{FF2B5EF4-FFF2-40B4-BE49-F238E27FC236}">
+                <a16:creationId xmlns:a16="http://schemas.microsoft.com/office/drawing/2014/main" id="{78F9BA3B-EB94-4AC8-920D-A9ED83D0D2E2}"/>
+              </a:ext>
+            </a:extLst>
+          </p:cNvPr>
+          <p:cNvSpPr/>
+          <p:nvPr/>
+        </p:nvSpPr>
+        <p:spPr bwMode="gray">
+          <a:xfrm>
+            <a:off x="7149000" y="1208618"/>
+            <a:ext cx="4101737" cy="469551"/>
+          </a:xfrm>
+          <a:prstGeom prst="wedgeRectCallout">
+            <a:avLst>
+              <a:gd name="adj1" fmla="val -105768"/>
+              <a:gd name="adj2" fmla="val 206931"/>
+            </a:avLst>
+          </a:prstGeom>
+          <a:ln>
+            <a:headEnd/>
+            <a:tailEnd/>
+          </a:ln>
+        </p:spPr>
+        <p:style>
+          <a:lnRef idx="2">
+            <a:schemeClr val="accent5"/>
+          </a:lnRef>
+          <a:fillRef idx="1">
+            <a:schemeClr val="lt1"/>
+          </a:fillRef>
+          <a:effectRef idx="0">
+            <a:schemeClr val="accent5"/>
+          </a:effectRef>
+          <a:fontRef idx="minor">
+            <a:schemeClr val="dk1"/>
+          </a:fontRef>
+        </p:style>
+        <p:txBody>
+          <a:bodyPr lIns="90000" tIns="72000" rIns="90000" bIns="72000" rtlCol="0" anchor="ctr"/>
+          <a:lstStyle/>
+          <a:p>
+            <a:pPr marR="0" algn="ctr" defTabSz="914400" eaLnBrk="1" fontAlgn="base" latinLnBrk="0" hangingPunct="1">
+              <a:lnSpc>
+                <a:spcPct val="100000"/>
+              </a:lnSpc>
+              <a:spcBef>
+                <a:spcPct val="50000"/>
+              </a:spcBef>
+              <a:spcAft>
+                <a:spcPct val="0"/>
+              </a:spcAft>
+              <a:buClr>
+                <a:srgbClr val="F0AB00"/>
+              </a:buClr>
+              <a:buSzPct val="80000"/>
+              <a:tabLst/>
+            </a:pPr>
+            <a:r>
+              <a:rPr lang="en-US" sz="1800" kern="0" noProof="0" dirty="0">
+                <a:ea typeface="Arial Unicode MS" pitchFamily="34" charset="-128"/>
+                <a:cs typeface="Arial Unicode MS" pitchFamily="34" charset="-128"/>
+              </a:rPr>
+              <a:t>Simple </a:t>
+            </a:r>
+            <a:r>
+              <a:rPr lang="en-US" sz="1800" kern="0" noProof="0" dirty="0" err="1">
+                <a:ea typeface="Arial Unicode MS" pitchFamily="34" charset="-128"/>
+                <a:cs typeface="Arial Unicode MS" pitchFamily="34" charset="-128"/>
+              </a:rPr>
+              <a:t>ConfigMap</a:t>
+            </a:r>
+            <a:r>
+              <a:rPr lang="en-US" sz="1800" kern="0" noProof="0" dirty="0">
+                <a:ea typeface="Arial Unicode MS" pitchFamily="34" charset="-128"/>
+                <a:cs typeface="Arial Unicode MS" pitchFamily="34" charset="-128"/>
+              </a:rPr>
+              <a:t> with specific values </a:t>
+            </a:r>
+            <a:endParaRPr kumimoji="0" lang="en-US" sz="1800" b="0" i="0" u="none" strike="noStrike" kern="0" cap="none" spc="0" normalizeH="0" baseline="0" noProof="0" dirty="0">
+              <a:ln>
+                <a:noFill/>
+              </a:ln>
+              <a:effectLst/>
+              <a:uLnTx/>
+              <a:uFillTx/>
+              <a:ea typeface="Arial Unicode MS" pitchFamily="34" charset="-128"/>
+              <a:cs typeface="Arial Unicode MS" pitchFamily="34" charset="-128"/>
+            </a:endParaRPr>
+          </a:p>
+        </p:txBody>
+      </p:sp>
+      <p:sp>
+        <p:nvSpPr>
+          <p:cNvPr id="18" name="Speech Bubble: Rectangle 17">
+            <a:extLst>
+              <a:ext uri="{FF2B5EF4-FFF2-40B4-BE49-F238E27FC236}">
+                <a16:creationId xmlns:a16="http://schemas.microsoft.com/office/drawing/2014/main" id="{ECB57014-3931-4302-B65B-412F5B56F6DB}"/>
+              </a:ext>
+            </a:extLst>
+          </p:cNvPr>
+          <p:cNvSpPr/>
+          <p:nvPr/>
+        </p:nvSpPr>
+        <p:spPr bwMode="gray">
+          <a:xfrm>
+            <a:off x="7148999" y="2412670"/>
+            <a:ext cx="4101737" cy="770145"/>
+          </a:xfrm>
+          <a:prstGeom prst="wedgeRectCallout">
+            <a:avLst>
+              <a:gd name="adj1" fmla="val -107269"/>
+              <a:gd name="adj2" fmla="val 44120"/>
+            </a:avLst>
+          </a:prstGeom>
+          <a:ln>
+            <a:headEnd/>
+            <a:tailEnd/>
+          </a:ln>
+        </p:spPr>
+        <p:style>
+          <a:lnRef idx="2">
+            <a:schemeClr val="accent5"/>
+          </a:lnRef>
+          <a:fillRef idx="1">
+            <a:schemeClr val="lt1"/>
+          </a:fillRef>
+          <a:effectRef idx="0">
+            <a:schemeClr val="accent5"/>
+          </a:effectRef>
+          <a:fontRef idx="minor">
+            <a:schemeClr val="dk1"/>
+          </a:fontRef>
+        </p:style>
+        <p:txBody>
+          <a:bodyPr lIns="90000" tIns="72000" rIns="90000" bIns="72000" rtlCol="0" anchor="ctr"/>
+          <a:lstStyle/>
+          <a:p>
+            <a:pPr marR="0" algn="ctr" defTabSz="914400" eaLnBrk="1" fontAlgn="base" latinLnBrk="0" hangingPunct="1">
+              <a:lnSpc>
+                <a:spcPct val="100000"/>
+              </a:lnSpc>
+              <a:spcBef>
+                <a:spcPct val="50000"/>
+              </a:spcBef>
+              <a:spcAft>
+                <a:spcPct val="0"/>
+              </a:spcAft>
+              <a:buClr>
+                <a:srgbClr val="F0AB00"/>
+              </a:buClr>
+              <a:buSzPct val="80000"/>
+              <a:tabLst/>
+            </a:pPr>
+            <a:r>
+              <a:rPr lang="en-US" sz="1800" kern="0" noProof="0" dirty="0" err="1">
+                <a:ea typeface="Arial Unicode MS" pitchFamily="34" charset="-128"/>
+                <a:cs typeface="Arial Unicode MS" pitchFamily="34" charset="-128"/>
+              </a:rPr>
+              <a:t>Yaml</a:t>
+            </a:r>
+            <a:r>
+              <a:rPr lang="en-US" sz="1800" kern="0" noProof="0" dirty="0">
+                <a:ea typeface="Arial Unicode MS" pitchFamily="34" charset="-128"/>
+                <a:cs typeface="Arial Unicode MS" pitchFamily="34" charset="-128"/>
+              </a:rPr>
+              <a:t> file needs to be edited each time a </a:t>
+            </a:r>
+            <a:r>
+              <a:rPr lang="en-US" sz="1800" kern="0" dirty="0">
+                <a:ea typeface="Arial Unicode MS" pitchFamily="34" charset="-128"/>
+                <a:cs typeface="Arial Unicode MS" pitchFamily="34" charset="-128"/>
+              </a:rPr>
+              <a:t>change is required</a:t>
+            </a:r>
+            <a:endParaRPr kumimoji="0" lang="en-US" sz="1800" b="0" i="0" u="none" strike="noStrike" kern="0" cap="none" spc="0" normalizeH="0" baseline="0" noProof="0" dirty="0">
+              <a:ln>
+                <a:noFill/>
+              </a:ln>
+              <a:effectLst/>
+              <a:uLnTx/>
+              <a:uFillTx/>
+              <a:ea typeface="Arial Unicode MS" pitchFamily="34" charset="-128"/>
+              <a:cs typeface="Arial Unicode MS" pitchFamily="34" charset="-128"/>
+            </a:endParaRPr>
+          </a:p>
+        </p:txBody>
+      </p:sp>
+      <p:sp>
+        <p:nvSpPr>
+          <p:cNvPr id="19" name="Speech Bubble: Rectangle 18">
+            <a:extLst>
+              <a:ext uri="{FF2B5EF4-FFF2-40B4-BE49-F238E27FC236}">
+                <a16:creationId xmlns:a16="http://schemas.microsoft.com/office/drawing/2014/main" id="{1C8D7A34-3D93-4592-83AE-3BAA44551FC3}"/>
+              </a:ext>
+            </a:extLst>
+          </p:cNvPr>
+          <p:cNvSpPr/>
+          <p:nvPr/>
+        </p:nvSpPr>
+        <p:spPr bwMode="gray">
+          <a:xfrm>
+            <a:off x="7148999" y="3917316"/>
+            <a:ext cx="4101737" cy="742607"/>
+          </a:xfrm>
+          <a:prstGeom prst="wedgeRectCallout">
+            <a:avLst>
+              <a:gd name="adj1" fmla="val -85786"/>
+              <a:gd name="adj2" fmla="val 37609"/>
+            </a:avLst>
+          </a:prstGeom>
+          <a:ln>
+            <a:headEnd/>
+            <a:tailEnd/>
+          </a:ln>
+        </p:spPr>
+        <p:style>
+          <a:lnRef idx="2">
+            <a:schemeClr val="accent5"/>
+          </a:lnRef>
+          <a:fillRef idx="1">
+            <a:schemeClr val="lt1"/>
+          </a:fillRef>
+          <a:effectRef idx="0">
+            <a:schemeClr val="accent5"/>
+          </a:effectRef>
+          <a:fontRef idx="minor">
+            <a:schemeClr val="dk1"/>
+          </a:fontRef>
+        </p:style>
+        <p:txBody>
+          <a:bodyPr lIns="90000" tIns="72000" rIns="90000" bIns="72000" rtlCol="0" anchor="ctr"/>
+          <a:lstStyle/>
+          <a:p>
+            <a:pPr marR="0" algn="ctr" defTabSz="914400" eaLnBrk="1" fontAlgn="base" latinLnBrk="0" hangingPunct="1">
+              <a:lnSpc>
+                <a:spcPct val="100000"/>
+              </a:lnSpc>
+              <a:spcBef>
+                <a:spcPct val="50000"/>
+              </a:spcBef>
+              <a:spcAft>
+                <a:spcPct val="0"/>
+              </a:spcAft>
+              <a:buClr>
+                <a:srgbClr val="F0AB00"/>
+              </a:buClr>
+              <a:buSzPct val="80000"/>
+              <a:tabLst/>
+            </a:pPr>
+            <a:r>
+              <a:rPr lang="en-US" sz="1800" kern="0" dirty="0">
+                <a:ea typeface="Arial Unicode MS" pitchFamily="34" charset="-128"/>
+                <a:cs typeface="Arial Unicode MS" pitchFamily="34" charset="-128"/>
+              </a:rPr>
+              <a:t>Helm template of a </a:t>
+            </a:r>
+            <a:r>
+              <a:rPr kumimoji="0" lang="en-US" sz="1800" b="0" i="0" u="none" strike="noStrike" kern="0" cap="none" spc="0" normalizeH="0" baseline="0" dirty="0" err="1">
+                <a:ln>
+                  <a:noFill/>
+                </a:ln>
+                <a:effectLst/>
+                <a:uLnTx/>
+                <a:uFillTx/>
+                <a:ea typeface="Arial Unicode MS" pitchFamily="34" charset="-128"/>
+                <a:cs typeface="Arial Unicode MS" pitchFamily="34" charset="-128"/>
+              </a:rPr>
+              <a:t>Config</a:t>
+            </a:r>
+            <a:r>
+              <a:rPr lang="en-US" sz="1800" kern="0" dirty="0" err="1">
+                <a:ea typeface="Arial Unicode MS" pitchFamily="34" charset="-128"/>
+                <a:cs typeface="Arial Unicode MS" pitchFamily="34" charset="-128"/>
+              </a:rPr>
+              <a:t>Map</a:t>
+            </a:r>
+            <a:r>
+              <a:rPr lang="en-US" sz="1800" kern="0" dirty="0">
+                <a:ea typeface="Arial Unicode MS" pitchFamily="34" charset="-128"/>
+                <a:cs typeface="Arial Unicode MS" pitchFamily="34" charset="-128"/>
+              </a:rPr>
+              <a:t> with variables</a:t>
+            </a:r>
+            <a:endParaRPr kumimoji="0" lang="en-US" sz="1800" b="0" i="0" u="none" strike="noStrike" kern="0" cap="none" spc="0" normalizeH="0" baseline="0" noProof="0" dirty="0">
+              <a:ln>
+                <a:noFill/>
+              </a:ln>
+              <a:effectLst/>
+              <a:uLnTx/>
+              <a:uFillTx/>
+              <a:ea typeface="Arial Unicode MS" pitchFamily="34" charset="-128"/>
+              <a:cs typeface="Arial Unicode MS" pitchFamily="34" charset="-128"/>
+            </a:endParaRPr>
+          </a:p>
+        </p:txBody>
+      </p:sp>
+      <p:sp>
+        <p:nvSpPr>
+          <p:cNvPr id="20" name="Speech Bubble: Rectangle 19">
+            <a:extLst>
+              <a:ext uri="{FF2B5EF4-FFF2-40B4-BE49-F238E27FC236}">
+                <a16:creationId xmlns:a16="http://schemas.microsoft.com/office/drawing/2014/main" id="{EBBD1CF4-C76F-407F-8290-5B2B409BBB4C}"/>
+              </a:ext>
+            </a:extLst>
+          </p:cNvPr>
+          <p:cNvSpPr/>
+          <p:nvPr/>
+        </p:nvSpPr>
+        <p:spPr bwMode="gray">
+          <a:xfrm>
+            <a:off x="7148998" y="5009351"/>
+            <a:ext cx="4101737" cy="770145"/>
+          </a:xfrm>
+          <a:prstGeom prst="wedgeRectCallout">
+            <a:avLst>
+              <a:gd name="adj1" fmla="val -73385"/>
+              <a:gd name="adj2" fmla="val -19283"/>
+            </a:avLst>
+          </a:prstGeom>
+          <a:ln>
+            <a:headEnd/>
+            <a:tailEnd/>
+          </a:ln>
+        </p:spPr>
+        <p:style>
+          <a:lnRef idx="2">
+            <a:schemeClr val="accent5"/>
+          </a:lnRef>
+          <a:fillRef idx="1">
+            <a:schemeClr val="lt1"/>
+          </a:fillRef>
+          <a:effectRef idx="0">
+            <a:schemeClr val="accent5"/>
+          </a:effectRef>
+          <a:fontRef idx="minor">
+            <a:schemeClr val="dk1"/>
+          </a:fontRef>
+        </p:style>
+        <p:txBody>
+          <a:bodyPr lIns="90000" tIns="72000" rIns="90000" bIns="72000" rtlCol="0" anchor="ctr"/>
+          <a:lstStyle/>
+          <a:p>
+            <a:pPr marR="0" algn="ctr" defTabSz="914400" eaLnBrk="1" fontAlgn="base" latinLnBrk="0" hangingPunct="1">
+              <a:lnSpc>
+                <a:spcPct val="100000"/>
+              </a:lnSpc>
+              <a:spcBef>
+                <a:spcPct val="50000"/>
+              </a:spcBef>
+              <a:spcAft>
+                <a:spcPct val="0"/>
+              </a:spcAft>
+              <a:buClr>
+                <a:srgbClr val="F0AB00"/>
+              </a:buClr>
+              <a:buSzPct val="80000"/>
+              <a:tabLst/>
+            </a:pPr>
+            <a:r>
+              <a:rPr kumimoji="0" lang="en-US" sz="1800" b="0" i="0" u="none" strike="noStrike" kern="0" cap="none" spc="0" normalizeH="0" baseline="0" dirty="0">
+                <a:ln>
+                  <a:noFill/>
+                </a:ln>
+                <a:effectLst/>
+                <a:uLnTx/>
+                <a:uFillTx/>
+                <a:ea typeface="Arial Unicode MS" pitchFamily="34" charset="-128"/>
+                <a:cs typeface="Arial Unicode MS" pitchFamily="34" charset="-128"/>
+              </a:rPr>
+              <a:t>Variables are </a:t>
+            </a:r>
+            <a:r>
+              <a:rPr lang="en-US" sz="1800" kern="0" dirty="0">
+                <a:ea typeface="Arial Unicode MS" pitchFamily="34" charset="-128"/>
+                <a:cs typeface="Arial Unicode MS" pitchFamily="34" charset="-128"/>
+              </a:rPr>
+              <a:t>converted to specific values upon installation of the chart</a:t>
+            </a:r>
+            <a:endParaRPr kumimoji="0" lang="en-US" sz="1800" b="0" i="0" u="none" strike="noStrike" kern="0" cap="none" spc="0" normalizeH="0" baseline="0" noProof="0" dirty="0">
+              <a:ln>
+                <a:noFill/>
+              </a:ln>
+              <a:effectLst/>
+              <a:uLnTx/>
+              <a:uFillTx/>
+              <a:ea typeface="Arial Unicode MS" pitchFamily="34" charset="-128"/>
+              <a:cs typeface="Arial Unicode MS" pitchFamily="34" charset="-128"/>
+            </a:endParaRPr>
+          </a:p>
+        </p:txBody>
+      </p:sp>
+    </p:spTree>
+    <p:extLst>
+      <p:ext uri="{BB962C8B-B14F-4D97-AF65-F5344CB8AC3E}">
+        <p14:creationId xmlns:p14="http://schemas.microsoft.com/office/powerpoint/2010/main" val="1378125413"/>
+      </p:ext>
+    </p:extLst>
+  </p:cSld>
+  <p:clrMapOvr>
+    <a:masterClrMapping/>
+  </p:clrMapOvr>
+</p:sld>
+</file>
+
+<file path=ppt/slides/slide5.xml><?xml version="1.0" encoding="utf-8"?>
 <p:sld xmlns:a="http://schemas.openxmlformats.org/drawingml/2006/main" xmlns:r="http://schemas.openxmlformats.org/officeDocument/2006/relationships" xmlns:p="http://schemas.openxmlformats.org/presentationml/2006/main">
   <p:cSld>
     <p:spTree>
@@ -17755,7 +20278,7 @@
 </p:sld>
 </file>
 
-<file path=ppt/slides/slide12.xml><?xml version="1.0" encoding="utf-8"?>
+<file path=ppt/slides/slide6.xml><?xml version="1.0" encoding="utf-8"?>
 <p:sld xmlns:a="http://schemas.openxmlformats.org/drawingml/2006/main" xmlns:r="http://schemas.openxmlformats.org/officeDocument/2006/relationships" xmlns:p="http://schemas.openxmlformats.org/presentationml/2006/main">
   <p:cSld>
     <p:spTree>
@@ -17774,10 +20297,10 @@
       </p:grpSpPr>
       <p:sp>
         <p:nvSpPr>
-          <p:cNvPr id="2" name="Title 1">
+          <p:cNvPr id="2" name="Titel 1">
             <a:extLst>
               <a:ext uri="{FF2B5EF4-FFF2-40B4-BE49-F238E27FC236}">
-                <a16:creationId xmlns:a16="http://schemas.microsoft.com/office/drawing/2014/main" id="{2D4BD4BF-5C0E-4BE1-A99C-25DBDC85D9CD}"/>
+                <a16:creationId xmlns:a16="http://schemas.microsoft.com/office/drawing/2014/main" id="{D40DE558-195D-024F-B7CC-254BC4F33034}"/>
               </a:ext>
             </a:extLst>
           </p:cNvPr>
@@ -17794,18 +20317,23 @@
           <a:lstStyle/>
           <a:p>
             <a:r>
-              <a:rPr lang="en-US" dirty="0"/>
-              <a:t>Demo</a:t>
-            </a:r>
+              <a:rPr lang="de-DE" dirty="0"/>
+              <a:t>Helm Chart </a:t>
+            </a:r>
+            <a:r>
+              <a:rPr lang="de-DE" dirty="0" err="1"/>
+              <a:t>Repositories</a:t>
+            </a:r>
+            <a:endParaRPr lang="de-DE" dirty="0"/>
           </a:p>
         </p:txBody>
       </p:sp>
       <p:pic>
         <p:nvPicPr>
-          <p:cNvPr id="4" name="Picture 3">
+          <p:cNvPr id="4" name="Grafik 3">
             <a:extLst>
               <a:ext uri="{FF2B5EF4-FFF2-40B4-BE49-F238E27FC236}">
-                <a16:creationId xmlns:a16="http://schemas.microsoft.com/office/drawing/2014/main" id="{A8308372-79D0-4D3E-A653-A42050822646}"/>
+                <a16:creationId xmlns:a16="http://schemas.microsoft.com/office/drawing/2014/main" id="{DF14ADED-E781-A54B-9683-E6B1B824B88F}"/>
               </a:ext>
             </a:extLst>
           </p:cNvPr>
@@ -17822,87 +20350,25 @@
         </p:blipFill>
         <p:spPr>
           <a:xfrm>
-            <a:off x="3645157" y="976918"/>
-            <a:ext cx="4904163" cy="4904163"/>
+            <a:off x="504001" y="4431186"/>
+            <a:ext cx="5967618" cy="1922814"/>
           </a:xfrm>
           <a:prstGeom prst="rect">
             <a:avLst/>
           </a:prstGeom>
+          <a:ln>
+            <a:solidFill>
+              <a:schemeClr val="tx1"/>
+            </a:solidFill>
+          </a:ln>
         </p:spPr>
       </p:pic>
-    </p:spTree>
-    <p:extLst>
-      <p:ext uri="{BB962C8B-B14F-4D97-AF65-F5344CB8AC3E}">
-        <p14:creationId xmlns:p14="http://schemas.microsoft.com/office/powerpoint/2010/main" val="2718354247"/>
-      </p:ext>
-    </p:extLst>
-  </p:cSld>
-  <p:clrMapOvr>
-    <a:masterClrMapping/>
-  </p:clrMapOvr>
-</p:sld>
-</file>
-
-<file path=ppt/slides/slide13.xml><?xml version="1.0" encoding="utf-8"?>
-<p:sld xmlns:a="http://schemas.openxmlformats.org/drawingml/2006/main" xmlns:r="http://schemas.openxmlformats.org/officeDocument/2006/relationships" xmlns:p="http://schemas.openxmlformats.org/presentationml/2006/main">
-  <p:cSld>
-    <p:spTree>
-      <p:nvGrpSpPr>
-        <p:cNvPr id="1" name=""/>
-        <p:cNvGrpSpPr/>
-        <p:nvPr/>
-      </p:nvGrpSpPr>
-      <p:grpSpPr>
-        <a:xfrm>
-          <a:off x="0" y="0"/>
-          <a:ext cx="0" cy="0"/>
-          <a:chOff x="0" y="0"/>
-          <a:chExt cx="0" cy="0"/>
-        </a:xfrm>
-      </p:grpSpPr>
-      <p:sp>
-        <p:nvSpPr>
-          <p:cNvPr id="3" name="Title 2">
+      <p:pic>
+        <p:nvPicPr>
+          <p:cNvPr id="6" name="Grafik 5" descr="Warnung mit einfarbiger Füllung">
             <a:extLst>
               <a:ext uri="{FF2B5EF4-FFF2-40B4-BE49-F238E27FC236}">
-                <a16:creationId xmlns:a16="http://schemas.microsoft.com/office/drawing/2014/main" id="{B4B6938A-7A0C-4712-A9B8-41F25B66C8A4}"/>
-              </a:ext>
-            </a:extLst>
-          </p:cNvPr>
-          <p:cNvSpPr>
-            <a:spLocks noGrp="1"/>
-          </p:cNvSpPr>
-          <p:nvPr>
-            <p:ph type="title"/>
-          </p:nvPr>
-        </p:nvSpPr>
-        <p:spPr/>
-        <p:txBody>
-          <a:bodyPr/>
-          <a:lstStyle/>
-          <a:p>
-            <a:r>
-              <a:rPr lang="en-US"/>
-              <a:t>Exercises #10 </a:t>
-            </a:r>
-            <a:r>
-              <a:rPr lang="en-US" dirty="0"/>
-              <a:t>&amp; </a:t>
-            </a:r>
-            <a:r>
-              <a:rPr lang="en-US"/>
-              <a:t>#11</a:t>
-            </a:r>
-            <a:endParaRPr lang="en-US" dirty="0"/>
-          </a:p>
-        </p:txBody>
-      </p:sp>
-      <p:pic>
-        <p:nvPicPr>
-          <p:cNvPr id="4" name="Picture 3">
-            <a:extLst>
-              <a:ext uri="{FF2B5EF4-FFF2-40B4-BE49-F238E27FC236}">
-                <a16:creationId xmlns:a16="http://schemas.microsoft.com/office/drawing/2014/main" id="{F6BA3838-694C-42C5-AEEE-A53AE996E7BE}"/>
+                <a16:creationId xmlns:a16="http://schemas.microsoft.com/office/drawing/2014/main" id="{16F7CA59-B65C-6F4D-B34E-18361467ED94}"/>
               </a:ext>
             </a:extLst>
           </p:cNvPr>
@@ -17912,278 +20378,43 @@
           <p:nvPr/>
         </p:nvPicPr>
         <p:blipFill>
-          <a:blip r:embed="rId3"/>
+          <a:blip r:embed="rId4">
+            <a:extLst>
+              <a:ext uri="{96DAC541-7B7A-43D3-8B79-37D633B846F1}">
+                <asvg:svgBlip xmlns:asvg="http://schemas.microsoft.com/office/drawing/2016/SVG/main" r:embed="rId5"/>
+              </a:ext>
+            </a:extLst>
+          </a:blip>
           <a:stretch>
             <a:fillRect/>
           </a:stretch>
         </p:blipFill>
         <p:spPr>
           <a:xfrm>
-            <a:off x="4011439" y="1343200"/>
-            <a:ext cx="4171599" cy="4171599"/>
+            <a:off x="6879250" y="4832410"/>
+            <a:ext cx="1212697" cy="1212697"/>
           </a:xfrm>
           <a:prstGeom prst="rect">
             <a:avLst/>
           </a:prstGeom>
         </p:spPr>
       </p:pic>
-    </p:spTree>
-    <p:extLst>
-      <p:ext uri="{BB962C8B-B14F-4D97-AF65-F5344CB8AC3E}">
-        <p14:creationId xmlns:p14="http://schemas.microsoft.com/office/powerpoint/2010/main" val="2757824260"/>
-      </p:ext>
-    </p:extLst>
-  </p:cSld>
-  <p:clrMapOvr>
-    <a:masterClrMapping/>
-  </p:clrMapOvr>
-</p:sld>
-</file>
-
-<file path=ppt/slides/slide14.xml><?xml version="1.0" encoding="utf-8"?>
-<p:sld xmlns:a="http://schemas.openxmlformats.org/drawingml/2006/main" xmlns:r="http://schemas.openxmlformats.org/officeDocument/2006/relationships" xmlns:p="http://schemas.openxmlformats.org/presentationml/2006/main" show="0">
-  <p:cSld>
-    <p:spTree>
-      <p:nvGrpSpPr>
-        <p:cNvPr id="1" name=""/>
-        <p:cNvGrpSpPr/>
-        <p:nvPr/>
-      </p:nvGrpSpPr>
-      <p:grpSpPr>
-        <a:xfrm>
-          <a:off x="0" y="0"/>
-          <a:ext cx="0" cy="0"/>
-          <a:chOff x="0" y="0"/>
-          <a:chExt cx="0" cy="0"/>
-        </a:xfrm>
-      </p:grpSpPr>
-    </p:spTree>
-  </p:cSld>
-  <p:clrMapOvr>
-    <a:masterClrMapping/>
-  </p:clrMapOvr>
-  <p:transition spd="med"/>
-</p:sld>
-</file>
-
-<file path=ppt/slides/slide2.xml><?xml version="1.0" encoding="utf-8"?>
-<p:sld xmlns:a="http://schemas.openxmlformats.org/drawingml/2006/main" xmlns:r="http://schemas.openxmlformats.org/officeDocument/2006/relationships" xmlns:p="http://schemas.openxmlformats.org/presentationml/2006/main">
-  <p:cSld>
-    <p:spTree>
-      <p:nvGrpSpPr>
-        <p:cNvPr id="1" name=""/>
-        <p:cNvGrpSpPr/>
-        <p:nvPr/>
-      </p:nvGrpSpPr>
-      <p:grpSpPr>
-        <a:xfrm>
-          <a:off x="0" y="0"/>
-          <a:ext cx="0" cy="0"/>
-          <a:chOff x="0" y="0"/>
-          <a:chExt cx="0" cy="0"/>
-        </a:xfrm>
-      </p:grpSpPr>
       <p:sp>
         <p:nvSpPr>
-          <p:cNvPr id="8" name="Rectangle 7"/>
-          <p:cNvSpPr/>
-          <p:nvPr/>
-        </p:nvSpPr>
-        <p:spPr>
-          <a:xfrm>
-            <a:off x="435420" y="4329049"/>
-            <a:ext cx="10918380" cy="2031325"/>
-          </a:xfrm>
-          <a:prstGeom prst="rect">
-            <a:avLst/>
-          </a:prstGeom>
-        </p:spPr>
-        <p:txBody>
-          <a:bodyPr wrap="square">
-            <a:spAutoFit/>
-          </a:bodyPr>
-          <a:lstStyle/>
-          <a:p>
-            <a:pPr marL="342900" indent="-342900">
-              <a:buFont typeface="Wingdings" panose="05000000000000000000" pitchFamily="2" charset="2"/>
-              <a:buChar char="§"/>
-            </a:pPr>
-            <a:r>
-              <a:rPr lang="en-US" dirty="0"/>
-              <a:t>Helm is the “apt-get” for Kubernetes</a:t>
-            </a:r>
-          </a:p>
-          <a:p>
-            <a:pPr marL="342900" indent="-342900">
-              <a:buFont typeface="Wingdings" panose="05000000000000000000" pitchFamily="2" charset="2"/>
-              <a:buChar char="§"/>
-            </a:pPr>
-            <a:r>
-              <a:rPr lang="en-US" dirty="0"/>
-              <a:t>Preconfigured &amp; parameterized packages of Kubernetes resources</a:t>
-            </a:r>
-          </a:p>
-          <a:p>
-            <a:pPr marL="342900" indent="-342900">
-              <a:buFont typeface="Wingdings" panose="05000000000000000000" pitchFamily="2" charset="2"/>
-              <a:buChar char="§"/>
-            </a:pPr>
-            <a:r>
-              <a:rPr lang="en-US" dirty="0"/>
-              <a:t>Designed to manage applications with several isolated components</a:t>
-            </a:r>
-          </a:p>
-          <a:p>
-            <a:pPr marL="342900" indent="-342900">
-              <a:buFont typeface="Wingdings" panose="05000000000000000000" pitchFamily="2" charset="2"/>
-              <a:buChar char="§"/>
-            </a:pPr>
-            <a:r>
-              <a:rPr lang="en-US" dirty="0"/>
-              <a:t>Supports “release management” with updates &amp; roll-backs</a:t>
-            </a:r>
-          </a:p>
-          <a:p>
-            <a:pPr marL="342900" indent="-342900">
-              <a:buFont typeface="Wingdings" panose="05000000000000000000" pitchFamily="2" charset="2"/>
-              <a:buChar char="§"/>
-            </a:pPr>
-            <a:r>
-              <a:rPr lang="en-US" dirty="0"/>
-              <a:t>Initially built by </a:t>
-            </a:r>
-            <a:r>
-              <a:rPr lang="en-US" dirty="0" err="1"/>
-              <a:t>Deis</a:t>
-            </a:r>
-            <a:r>
-              <a:rPr lang="en-US" dirty="0"/>
-              <a:t> (a Microsoft company), handed over to CNCF by now</a:t>
-            </a:r>
-          </a:p>
-          <a:p>
-            <a:pPr marL="342900" indent="-342900">
-              <a:buFont typeface="Wingdings" panose="05000000000000000000" pitchFamily="2" charset="2"/>
-              <a:buChar char="§"/>
-            </a:pPr>
-            <a:endParaRPr lang="en-US" dirty="0"/>
-          </a:p>
-        </p:txBody>
-      </p:sp>
-      <p:sp>
-        <p:nvSpPr>
-          <p:cNvPr id="4" name="Title 3"/>
-          <p:cNvSpPr>
-            <a:spLocks noGrp="1"/>
-          </p:cNvSpPr>
-          <p:nvPr>
-            <p:ph type="title"/>
-          </p:nvPr>
-        </p:nvSpPr>
-        <p:spPr/>
-        <p:txBody>
-          <a:bodyPr/>
-          <a:lstStyle/>
-          <a:p>
-            <a:r>
-              <a:rPr lang="en-US" dirty="0"/>
-              <a:t>What’s this “helm”?</a:t>
-            </a:r>
-          </a:p>
-        </p:txBody>
-      </p:sp>
-      <p:pic>
-        <p:nvPicPr>
-          <p:cNvPr id="1030" name="Picture 6" descr="Related image"/>
-          <p:cNvPicPr>
-            <a:picLocks noChangeAspect="1" noChangeArrowheads="1"/>
-          </p:cNvPicPr>
-          <p:nvPr/>
-        </p:nvPicPr>
-        <p:blipFill>
-          <a:blip r:embed="rId3">
+          <p:cNvPr id="7" name="Textfeld 6">
             <a:extLst>
-              <a:ext uri="{28A0092B-C50C-407E-A947-70E740481C1C}">
-                <a14:useLocalDpi xmlns:a14="http://schemas.microsoft.com/office/drawing/2010/main" val="0"/>
+              <a:ext uri="{FF2B5EF4-FFF2-40B4-BE49-F238E27FC236}">
+                <a16:creationId xmlns:a16="http://schemas.microsoft.com/office/drawing/2014/main" id="{3A744EAD-AF0F-0449-B2C7-001BFFFCE68A}"/>
               </a:ext>
             </a:extLst>
-          </a:blip>
-          <a:srcRect/>
-          <a:stretch>
-            <a:fillRect/>
-          </a:stretch>
-        </p:blipFill>
-        <p:spPr bwMode="auto">
-          <a:xfrm>
-            <a:off x="7971916" y="1332023"/>
-            <a:ext cx="2438400" cy="2438400"/>
-          </a:xfrm>
-          <a:prstGeom prst="rect">
-            <a:avLst/>
-          </a:prstGeom>
-          <a:noFill/>
-          <a:extLst>
-            <a:ext uri="{909E8E84-426E-40DD-AFC4-6F175D3DCCD1}">
-              <a14:hiddenFill xmlns:a14="http://schemas.microsoft.com/office/drawing/2010/main">
-                <a:solidFill>
-                  <a:srgbClr val="FFFFFF"/>
-                </a:solidFill>
-              </a14:hiddenFill>
-            </a:ext>
-          </a:extLst>
-        </p:spPr>
-      </p:pic>
-      <p:pic>
-        <p:nvPicPr>
-          <p:cNvPr id="1036" name="Picture 12" descr="Related image"/>
-          <p:cNvPicPr>
-            <a:picLocks noChangeAspect="1" noChangeArrowheads="1"/>
-          </p:cNvPicPr>
-          <p:nvPr/>
-        </p:nvPicPr>
-        <p:blipFill>
-          <a:blip r:embed="rId4">
-            <a:extLst>
-              <a:ext uri="{28A0092B-C50C-407E-A947-70E740481C1C}">
-                <a14:useLocalDpi xmlns:a14="http://schemas.microsoft.com/office/drawing/2010/main" val="0"/>
-              </a:ext>
-            </a:extLst>
-          </a:blip>
-          <a:srcRect/>
-          <a:stretch>
-            <a:fillRect/>
-          </a:stretch>
-        </p:blipFill>
-        <p:spPr bwMode="auto">
-          <a:xfrm>
-            <a:off x="504001" y="1036748"/>
-            <a:ext cx="2438400" cy="3028950"/>
-          </a:xfrm>
-          <a:prstGeom prst="rect">
-            <a:avLst/>
-          </a:prstGeom>
-          <a:noFill/>
-          <a:extLst>
-            <a:ext uri="{909E8E84-426E-40DD-AFC4-6F175D3DCCD1}">
-              <a14:hiddenFill xmlns:a14="http://schemas.microsoft.com/office/drawing/2010/main">
-                <a:solidFill>
-                  <a:srgbClr val="FFFFFF"/>
-                </a:solidFill>
-              </a14:hiddenFill>
-            </a:ext>
-          </a:extLst>
-        </p:spPr>
-      </p:pic>
-      <p:sp>
-        <p:nvSpPr>
-          <p:cNvPr id="10" name="TextBox 9"/>
+          </p:cNvPr>
           <p:cNvSpPr txBox="1"/>
           <p:nvPr/>
         </p:nvSpPr>
         <p:spPr>
           <a:xfrm>
-            <a:off x="3596640" y="388902"/>
-            <a:ext cx="1546860" cy="3677930"/>
+            <a:off x="8214138" y="5254093"/>
+            <a:ext cx="1643079" cy="369332"/>
           </a:xfrm>
           <a:prstGeom prst="rect">
             <a:avLst/>
@@ -18191,7 +20422,7 @@
           <a:noFill/>
         </p:spPr>
         <p:txBody>
-          <a:bodyPr wrap="square" lIns="0" tIns="0" rIns="0" bIns="0" rtlCol="0">
+          <a:bodyPr wrap="none" lIns="0" tIns="0" rIns="0" bIns="0" rtlCol="0">
             <a:spAutoFit/>
           </a:bodyPr>
           <a:lstStyle/>
@@ -18209,223 +20440,99 @@
               <a:buSzPct val="80000"/>
             </a:pPr>
             <a:r>
-              <a:rPr lang="en-US" sz="23900" b="1" kern="0" dirty="0">
+              <a:rPr lang="en-US" sz="2400" b="1" kern="0" dirty="0">
                 <a:ea typeface="Arial Unicode MS" pitchFamily="34" charset="-128"/>
                 <a:cs typeface="Arial Unicode MS" pitchFamily="34" charset="-128"/>
               </a:rPr>
-              <a:t>?</a:t>
-            </a:r>
-            <a:endParaRPr lang="en-US" sz="2400" b="1" kern="0" dirty="0">
-              <a:ea typeface="Arial Unicode MS" pitchFamily="34" charset="-128"/>
-              <a:cs typeface="Arial Unicode MS" pitchFamily="34" charset="-128"/>
-            </a:endParaRPr>
+              <a:t>deprecated</a:t>
+            </a:r>
           </a:p>
         </p:txBody>
       </p:sp>
       <p:sp>
         <p:nvSpPr>
-          <p:cNvPr id="11" name="Arrow: Right 10"/>
+          <p:cNvPr id="11" name="Rechteck 10">
+            <a:extLst>
+              <a:ext uri="{FF2B5EF4-FFF2-40B4-BE49-F238E27FC236}">
+                <a16:creationId xmlns:a16="http://schemas.microsoft.com/office/drawing/2014/main" id="{050C18DD-B62D-6E46-8BDF-B0038B68514E}"/>
+              </a:ext>
+            </a:extLst>
+          </p:cNvPr>
           <p:cNvSpPr/>
           <p:nvPr/>
         </p:nvSpPr>
-        <p:spPr bwMode="gray">
+        <p:spPr>
           <a:xfrm>
-            <a:off x="5708078" y="1949243"/>
-            <a:ext cx="1859280" cy="1203960"/>
+            <a:off x="7018489" y="2652258"/>
+            <a:ext cx="2683748" cy="415498"/>
           </a:xfrm>
-          <a:prstGeom prst="rightArrow">
+          <a:prstGeom prst="rect">
             <a:avLst/>
           </a:prstGeom>
-          <a:solidFill>
-            <a:schemeClr val="tx1"/>
-          </a:solidFill>
-          <a:ln w="6350" algn="ctr">
-            <a:noFill/>
-            <a:miter lim="800000"/>
-            <a:headEnd/>
-            <a:tailEnd/>
-          </a:ln>
         </p:spPr>
         <p:txBody>
-          <a:bodyPr lIns="90000" tIns="72000" rIns="90000" bIns="72000" rtlCol="0" anchor="ctr"/>
+          <a:bodyPr wrap="none">
+            <a:spAutoFit/>
+          </a:bodyPr>
           <a:lstStyle/>
           <a:p>
-            <a:pPr marR="0" algn="ctr" defTabSz="914400" eaLnBrk="1" fontAlgn="base" latinLnBrk="0" hangingPunct="1">
-              <a:lnSpc>
-                <a:spcPct val="100000"/>
-              </a:lnSpc>
-              <a:spcBef>
-                <a:spcPct val="50000"/>
-              </a:spcBef>
-              <a:spcAft>
-                <a:spcPct val="0"/>
-              </a:spcAft>
-              <a:buClr>
-                <a:srgbClr val="F0AB00"/>
-              </a:buClr>
-              <a:buSzPct val="80000"/>
-              <a:tabLst/>
-            </a:pPr>
-            <a:endParaRPr kumimoji="0" lang="en-US" sz="1800" b="0" i="0" u="none" strike="noStrike" kern="0" cap="none" spc="0" normalizeH="0" baseline="0" noProof="0" dirty="0" err="1">
-              <a:ln>
-                <a:noFill/>
-              </a:ln>
-              <a:effectLst/>
-              <a:uLnTx/>
-              <a:uFillTx/>
-              <a:ea typeface="Arial Unicode MS" pitchFamily="34" charset="-128"/>
-              <a:cs typeface="Arial Unicode MS" pitchFamily="34" charset="-128"/>
-            </a:endParaRPr>
+            <a:r>
+              <a:rPr lang="de-DE" dirty="0">
+                <a:hlinkClick r:id="rId6"/>
+              </a:rPr>
+              <a:t>https://artifacthub.io/</a:t>
+            </a:r>
+            <a:r>
+              <a:rPr lang="de-DE" dirty="0"/>
+              <a:t> </a:t>
+            </a:r>
           </a:p>
         </p:txBody>
       </p:sp>
+      <p:pic>
+        <p:nvPicPr>
+          <p:cNvPr id="12" name="Grafik 11">
+            <a:extLst>
+              <a:ext uri="{FF2B5EF4-FFF2-40B4-BE49-F238E27FC236}">
+                <a16:creationId xmlns:a16="http://schemas.microsoft.com/office/drawing/2014/main" id="{EC530566-408D-F54E-A546-DAEBB9F675C3}"/>
+              </a:ext>
+            </a:extLst>
+          </p:cNvPr>
+          <p:cNvPicPr>
+            <a:picLocks noChangeAspect="1"/>
+          </p:cNvPicPr>
+          <p:nvPr/>
+        </p:nvPicPr>
+        <p:blipFill>
+          <a:blip r:embed="rId7"/>
+          <a:stretch>
+            <a:fillRect/>
+          </a:stretch>
+        </p:blipFill>
+        <p:spPr>
+          <a:xfrm>
+            <a:off x="504001" y="1102312"/>
+            <a:ext cx="4943070" cy="3099891"/>
+          </a:xfrm>
+          <a:prstGeom prst="rect">
+            <a:avLst/>
+          </a:prstGeom>
+        </p:spPr>
+      </p:pic>
     </p:spTree>
     <p:extLst>
       <p:ext uri="{BB962C8B-B14F-4D97-AF65-F5344CB8AC3E}">
-        <p14:creationId xmlns:p14="http://schemas.microsoft.com/office/powerpoint/2010/main" val="864191870"/>
+        <p14:creationId xmlns:p14="http://schemas.microsoft.com/office/powerpoint/2010/main" val="1893390812"/>
       </p:ext>
     </p:extLst>
   </p:cSld>
   <p:clrMapOvr>
     <a:masterClrMapping/>
   </p:clrMapOvr>
-  <p:timing>
-    <p:tnLst>
-      <p:par>
-        <p:cTn id="1" dur="indefinite" restart="never" nodeType="tmRoot">
-          <p:childTnLst>
-            <p:seq concurrent="1" nextAc="seek">
-              <p:cTn id="2" dur="indefinite" nodeType="mainSeq">
-                <p:childTnLst>
-                  <p:par>
-                    <p:cTn id="3" fill="hold">
-                      <p:stCondLst>
-                        <p:cond delay="indefinite"/>
-                      </p:stCondLst>
-                      <p:childTnLst>
-                        <p:par>
-                          <p:cTn id="4" fill="hold">
-                            <p:stCondLst>
-                              <p:cond delay="0"/>
-                            </p:stCondLst>
-                            <p:childTnLst>
-                              <p:par>
-                                <p:cTn id="5" presetID="1" presetClass="entr" presetSubtype="0" fill="hold" grpId="0" nodeType="clickEffect">
-                                  <p:stCondLst>
-                                    <p:cond delay="0"/>
-                                  </p:stCondLst>
-                                  <p:childTnLst>
-                                    <p:set>
-                                      <p:cBhvr>
-                                        <p:cTn id="6" dur="1" fill="hold">
-                                          <p:stCondLst>
-                                            <p:cond delay="0"/>
-                                          </p:stCondLst>
-                                        </p:cTn>
-                                        <p:tgtEl>
-                                          <p:spTgt spid="11"/>
-                                        </p:tgtEl>
-                                        <p:attrNameLst>
-                                          <p:attrName>style.visibility</p:attrName>
-                                        </p:attrNameLst>
-                                      </p:cBhvr>
-                                      <p:to>
-                                        <p:strVal val="visible"/>
-                                      </p:to>
-                                    </p:set>
-                                  </p:childTnLst>
-                                </p:cTn>
-                              </p:par>
-                              <p:par>
-                                <p:cTn id="7" presetID="1" presetClass="entr" presetSubtype="0" fill="hold" nodeType="withEffect">
-                                  <p:stCondLst>
-                                    <p:cond delay="0"/>
-                                  </p:stCondLst>
-                                  <p:childTnLst>
-                                    <p:set>
-                                      <p:cBhvr>
-                                        <p:cTn id="8" dur="1" fill="hold">
-                                          <p:stCondLst>
-                                            <p:cond delay="0"/>
-                                          </p:stCondLst>
-                                        </p:cTn>
-                                        <p:tgtEl>
-                                          <p:spTgt spid="1030"/>
-                                        </p:tgtEl>
-                                        <p:attrNameLst>
-                                          <p:attrName>style.visibility</p:attrName>
-                                        </p:attrNameLst>
-                                      </p:cBhvr>
-                                      <p:to>
-                                        <p:strVal val="visible"/>
-                                      </p:to>
-                                    </p:set>
-                                  </p:childTnLst>
-                                </p:cTn>
-                              </p:par>
-                              <p:par>
-                                <p:cTn id="9" presetID="1" presetClass="entr" presetSubtype="0" fill="hold" grpId="0" nodeType="withEffect">
-                                  <p:stCondLst>
-                                    <p:cond delay="0"/>
-                                  </p:stCondLst>
-                                  <p:childTnLst>
-                                    <p:set>
-                                      <p:cBhvr>
-                                        <p:cTn id="10" dur="1" fill="hold">
-                                          <p:stCondLst>
-                                            <p:cond delay="0"/>
-                                          </p:stCondLst>
-                                        </p:cTn>
-                                        <p:tgtEl>
-                                          <p:spTgt spid="8"/>
-                                        </p:tgtEl>
-                                        <p:attrNameLst>
-                                          <p:attrName>style.visibility</p:attrName>
-                                        </p:attrNameLst>
-                                      </p:cBhvr>
-                                      <p:to>
-                                        <p:strVal val="visible"/>
-                                      </p:to>
-                                    </p:set>
-                                  </p:childTnLst>
-                                </p:cTn>
-                              </p:par>
-                            </p:childTnLst>
-                          </p:cTn>
-                        </p:par>
-                      </p:childTnLst>
-                    </p:cTn>
-                  </p:par>
-                </p:childTnLst>
-              </p:cTn>
-              <p:prevCondLst>
-                <p:cond evt="onPrev" delay="0">
-                  <p:tgtEl>
-                    <p:sldTgt/>
-                  </p:tgtEl>
-                </p:cond>
-              </p:prevCondLst>
-              <p:nextCondLst>
-                <p:cond evt="onNext" delay="0">
-                  <p:tgtEl>
-                    <p:sldTgt/>
-                  </p:tgtEl>
-                </p:cond>
-              </p:nextCondLst>
-            </p:seq>
-          </p:childTnLst>
-        </p:cTn>
-      </p:par>
-    </p:tnLst>
-    <p:bldLst>
-      <p:bldP spid="8" grpId="0"/>
-      <p:bldP spid="11" grpId="0" animBg="1"/>
-    </p:bldLst>
-  </p:timing>
 </p:sld>
 </file>
 
-<file path=ppt/slides/slide3.xml><?xml version="1.0" encoding="utf-8"?>
+<file path=ppt/slides/slide7.xml><?xml version="1.0" encoding="utf-8"?>
 <p:sld xmlns:a="http://schemas.openxmlformats.org/drawingml/2006/main" xmlns:r="http://schemas.openxmlformats.org/officeDocument/2006/relationships" xmlns:p="http://schemas.openxmlformats.org/presentationml/2006/main">
   <p:cSld>
     <p:spTree>
@@ -19579,7 +21686,7 @@
 </p:sld>
 </file>
 
-<file path=ppt/slides/slide4.xml><?xml version="1.0" encoding="utf-8"?>
+<file path=ppt/slides/slide8.xml><?xml version="1.0" encoding="utf-8"?>
 <p:sld xmlns:a="http://schemas.openxmlformats.org/drawingml/2006/main" xmlns:r="http://schemas.openxmlformats.org/officeDocument/2006/relationships" xmlns:p="http://schemas.openxmlformats.org/presentationml/2006/main">
   <p:cSld>
     <p:spTree>
@@ -20884,7 +22991,7 @@
 </p:sld>
 </file>
 
-<file path=ppt/slides/slide5.xml><?xml version="1.0" encoding="utf-8"?>
+<file path=ppt/slides/slide9.xml><?xml version="1.0" encoding="utf-8"?>
 <p:sld xmlns:a="http://schemas.openxmlformats.org/drawingml/2006/main" xmlns:r="http://schemas.openxmlformats.org/officeDocument/2006/relationships" xmlns:p="http://schemas.openxmlformats.org/presentationml/2006/main">
   <p:cSld>
     <p:spTree>
@@ -22229,983 +24336,6 @@
     <p:extLst>
       <p:ext uri="{BB962C8B-B14F-4D97-AF65-F5344CB8AC3E}">
         <p14:creationId xmlns:p14="http://schemas.microsoft.com/office/powerpoint/2010/main" val="3626371362"/>
-      </p:ext>
-    </p:extLst>
-  </p:cSld>
-  <p:clrMapOvr>
-    <a:masterClrMapping/>
-  </p:clrMapOvr>
-</p:sld>
-</file>
-
-<file path=ppt/slides/slide6.xml><?xml version="1.0" encoding="utf-8"?>
-<p:sld xmlns:a="http://schemas.openxmlformats.org/drawingml/2006/main" xmlns:r="http://schemas.openxmlformats.org/officeDocument/2006/relationships" xmlns:p="http://schemas.openxmlformats.org/presentationml/2006/main">
-  <p:cSld>
-    <p:spTree>
-      <p:nvGrpSpPr>
-        <p:cNvPr id="1" name=""/>
-        <p:cNvGrpSpPr/>
-        <p:nvPr/>
-      </p:nvGrpSpPr>
-      <p:grpSpPr>
-        <a:xfrm>
-          <a:off x="0" y="0"/>
-          <a:ext cx="0" cy="0"/>
-          <a:chOff x="0" y="0"/>
-          <a:chExt cx="0" cy="0"/>
-        </a:xfrm>
-      </p:grpSpPr>
-      <p:sp>
-        <p:nvSpPr>
-          <p:cNvPr id="2" name="Title 1">
-            <a:extLst>
-              <a:ext uri="{FF2B5EF4-FFF2-40B4-BE49-F238E27FC236}">
-                <a16:creationId xmlns:a16="http://schemas.microsoft.com/office/drawing/2014/main" id="{2D4BD4BF-5C0E-4BE1-A99C-25DBDC85D9CD}"/>
-              </a:ext>
-            </a:extLst>
-          </p:cNvPr>
-          <p:cNvSpPr>
-            <a:spLocks noGrp="1"/>
-          </p:cNvSpPr>
-          <p:nvPr>
-            <p:ph type="title"/>
-          </p:nvPr>
-        </p:nvSpPr>
-        <p:spPr/>
-        <p:txBody>
-          <a:bodyPr/>
-          <a:lstStyle/>
-          <a:p>
-            <a:r>
-              <a:rPr lang="en-US" dirty="0"/>
-              <a:t>Demo</a:t>
-            </a:r>
-          </a:p>
-        </p:txBody>
-      </p:sp>
-      <p:pic>
-        <p:nvPicPr>
-          <p:cNvPr id="4" name="Picture 3">
-            <a:extLst>
-              <a:ext uri="{FF2B5EF4-FFF2-40B4-BE49-F238E27FC236}">
-                <a16:creationId xmlns:a16="http://schemas.microsoft.com/office/drawing/2014/main" id="{8F8AF56A-873C-4A73-B1BB-DD1CD39FA262}"/>
-              </a:ext>
-            </a:extLst>
-          </p:cNvPr>
-          <p:cNvPicPr>
-            <a:picLocks noChangeAspect="1"/>
-          </p:cNvPicPr>
-          <p:nvPr/>
-        </p:nvPicPr>
-        <p:blipFill>
-          <a:blip r:embed="rId3"/>
-          <a:stretch>
-            <a:fillRect/>
-          </a:stretch>
-        </p:blipFill>
-        <p:spPr>
-          <a:xfrm>
-            <a:off x="3645157" y="976918"/>
-            <a:ext cx="4904163" cy="4904163"/>
-          </a:xfrm>
-          <a:prstGeom prst="rect">
-            <a:avLst/>
-          </a:prstGeom>
-        </p:spPr>
-      </p:pic>
-    </p:spTree>
-    <p:extLst>
-      <p:ext uri="{BB962C8B-B14F-4D97-AF65-F5344CB8AC3E}">
-        <p14:creationId xmlns:p14="http://schemas.microsoft.com/office/powerpoint/2010/main" val="247635095"/>
-      </p:ext>
-    </p:extLst>
-  </p:cSld>
-  <p:clrMapOvr>
-    <a:masterClrMapping/>
-  </p:clrMapOvr>
-</p:sld>
-</file>
-
-<file path=ppt/slides/slide7.xml><?xml version="1.0" encoding="utf-8"?>
-<p:sld xmlns:a="http://schemas.openxmlformats.org/drawingml/2006/main" xmlns:r="http://schemas.openxmlformats.org/officeDocument/2006/relationships" xmlns:p="http://schemas.openxmlformats.org/presentationml/2006/main">
-  <p:cSld>
-    <p:spTree>
-      <p:nvGrpSpPr>
-        <p:cNvPr id="1" name=""/>
-        <p:cNvGrpSpPr/>
-        <p:nvPr/>
-      </p:nvGrpSpPr>
-      <p:grpSpPr>
-        <a:xfrm>
-          <a:off x="0" y="0"/>
-          <a:ext cx="0" cy="0"/>
-          <a:chOff x="0" y="0"/>
-          <a:chExt cx="0" cy="0"/>
-        </a:xfrm>
-      </p:grpSpPr>
-      <p:sp>
-        <p:nvSpPr>
-          <p:cNvPr id="2" name="Title 1"/>
-          <p:cNvSpPr>
-            <a:spLocks noGrp="1"/>
-          </p:cNvSpPr>
-          <p:nvPr>
-            <p:ph type="title"/>
-          </p:nvPr>
-        </p:nvSpPr>
-        <p:spPr/>
-        <p:txBody>
-          <a:bodyPr/>
-          <a:lstStyle/>
-          <a:p>
-            <a:r>
-              <a:rPr lang="en-US" dirty="0"/>
-              <a:t>Authoring helm charts</a:t>
-            </a:r>
-          </a:p>
-        </p:txBody>
-      </p:sp>
-      <p:pic>
-        <p:nvPicPr>
-          <p:cNvPr id="4" name="Picture 3">
-            <a:extLst>
-              <a:ext uri="{FF2B5EF4-FFF2-40B4-BE49-F238E27FC236}">
-                <a16:creationId xmlns:a16="http://schemas.microsoft.com/office/drawing/2014/main" id="{BD625C01-15F0-497E-B1CD-8AB18852298E}"/>
-              </a:ext>
-            </a:extLst>
-          </p:cNvPr>
-          <p:cNvPicPr>
-            <a:picLocks noChangeAspect="1"/>
-          </p:cNvPicPr>
-          <p:nvPr/>
-        </p:nvPicPr>
-        <p:blipFill>
-          <a:blip r:embed="rId2"/>
-          <a:stretch>
-            <a:fillRect/>
-          </a:stretch>
-        </p:blipFill>
-        <p:spPr>
-          <a:xfrm>
-            <a:off x="6664690" y="688666"/>
-            <a:ext cx="4121394" cy="5495192"/>
-          </a:xfrm>
-          <a:prstGeom prst="rect">
-            <a:avLst/>
-          </a:prstGeom>
-        </p:spPr>
-      </p:pic>
-      <p:sp>
-        <p:nvSpPr>
-          <p:cNvPr id="6" name="Rectangle 5">
-            <a:extLst>
-              <a:ext uri="{FF2B5EF4-FFF2-40B4-BE49-F238E27FC236}">
-                <a16:creationId xmlns:a16="http://schemas.microsoft.com/office/drawing/2014/main" id="{31A48861-B72C-49CA-BB50-789DAEC7F1C4}"/>
-              </a:ext>
-            </a:extLst>
-          </p:cNvPr>
-          <p:cNvSpPr/>
-          <p:nvPr/>
-        </p:nvSpPr>
-        <p:spPr>
-          <a:xfrm>
-            <a:off x="504001" y="1390244"/>
-            <a:ext cx="5975930" cy="3970318"/>
-          </a:xfrm>
-          <a:prstGeom prst="rect">
-            <a:avLst/>
-          </a:prstGeom>
-        </p:spPr>
-        <p:txBody>
-          <a:bodyPr wrap="square">
-            <a:spAutoFit/>
-          </a:bodyPr>
-          <a:lstStyle/>
-          <a:p>
-            <a:pPr marL="342900" indent="-342900">
-              <a:buFont typeface="Wingdings" panose="05000000000000000000" pitchFamily="2" charset="2"/>
-              <a:buChar char="§"/>
-            </a:pPr>
-            <a:r>
-              <a:rPr lang="en-US" dirty="0"/>
-              <a:t>Packages in the helm eco system are called “charts”</a:t>
-            </a:r>
-          </a:p>
-          <a:p>
-            <a:pPr marL="342900" indent="-342900">
-              <a:buFont typeface="Wingdings" panose="05000000000000000000" pitchFamily="2" charset="2"/>
-              <a:buChar char="§"/>
-            </a:pPr>
-            <a:endParaRPr lang="en-US" dirty="0"/>
-          </a:p>
-          <a:p>
-            <a:r>
-              <a:rPr lang="en-US" dirty="0" err="1"/>
-              <a:t>wordpress</a:t>
-            </a:r>
-            <a:r>
-              <a:rPr lang="en-US" dirty="0"/>
-              <a:t>/</a:t>
-            </a:r>
-          </a:p>
-          <a:p>
-            <a:pPr marL="342900" indent="-342900">
-              <a:buFont typeface="Wingdings" panose="05000000000000000000" pitchFamily="2" charset="2"/>
-              <a:buChar char="§"/>
-            </a:pPr>
-            <a:r>
-              <a:rPr lang="en-US" dirty="0" err="1"/>
-              <a:t>Chart.yaml</a:t>
-            </a:r>
-            <a:r>
-              <a:rPr lang="en-US" dirty="0"/>
-              <a:t> </a:t>
-            </a:r>
-          </a:p>
-          <a:p>
-            <a:pPr marL="342900" indent="-342900">
-              <a:buFont typeface="Wingdings" panose="05000000000000000000" pitchFamily="2" charset="2"/>
-              <a:buChar char="§"/>
-            </a:pPr>
-            <a:r>
-              <a:rPr lang="en-US" dirty="0" err="1"/>
-              <a:t>values.yaml</a:t>
-            </a:r>
-            <a:endParaRPr lang="en-US" dirty="0"/>
-          </a:p>
-          <a:p>
-            <a:pPr marL="342900" indent="-342900">
-              <a:buFont typeface="Wingdings" panose="05000000000000000000" pitchFamily="2" charset="2"/>
-              <a:buChar char="§"/>
-            </a:pPr>
-            <a:r>
-              <a:rPr lang="en-US" dirty="0"/>
-              <a:t>charts/ </a:t>
-            </a:r>
-          </a:p>
-          <a:p>
-            <a:pPr marL="342900" indent="-342900">
-              <a:buFont typeface="Wingdings" panose="05000000000000000000" pitchFamily="2" charset="2"/>
-              <a:buChar char="§"/>
-            </a:pPr>
-            <a:r>
-              <a:rPr lang="en-US" dirty="0"/>
-              <a:t>templates/</a:t>
-            </a:r>
-          </a:p>
-          <a:p>
-            <a:pPr marL="342900" indent="-342900">
-              <a:buFont typeface="Wingdings" panose="05000000000000000000" pitchFamily="2" charset="2"/>
-              <a:buChar char="§"/>
-            </a:pPr>
-            <a:endParaRPr lang="en-US" dirty="0"/>
-          </a:p>
-          <a:p>
-            <a:pPr marL="342900" indent="-342900">
-              <a:buFont typeface="Wingdings" panose="05000000000000000000" pitchFamily="2" charset="2"/>
-              <a:buChar char="§"/>
-            </a:pPr>
-            <a:r>
-              <a:rPr lang="en-US" dirty="0"/>
-              <a:t>Templates contain variables</a:t>
-            </a:r>
-          </a:p>
-          <a:p>
-            <a:pPr marL="342900" indent="-342900">
-              <a:buFont typeface="Wingdings" panose="05000000000000000000" pitchFamily="2" charset="2"/>
-              <a:buChar char="§"/>
-            </a:pPr>
-            <a:r>
-              <a:rPr lang="en-US" dirty="0"/>
-              <a:t>Helm renders charts during deployment and substitutes variables with values</a:t>
-            </a:r>
-          </a:p>
-        </p:txBody>
-      </p:sp>
-      <p:sp>
-        <p:nvSpPr>
-          <p:cNvPr id="3" name="Rectangle 2">
-            <a:extLst>
-              <a:ext uri="{FF2B5EF4-FFF2-40B4-BE49-F238E27FC236}">
-                <a16:creationId xmlns:a16="http://schemas.microsoft.com/office/drawing/2014/main" id="{222CCE3A-F039-4FB6-8429-51160EFDB169}"/>
-              </a:ext>
-            </a:extLst>
-          </p:cNvPr>
-          <p:cNvSpPr/>
-          <p:nvPr/>
-        </p:nvSpPr>
-        <p:spPr>
-          <a:xfrm>
-            <a:off x="504001" y="5600466"/>
-            <a:ext cx="4238661" cy="415498"/>
-          </a:xfrm>
-          <a:prstGeom prst="rect">
-            <a:avLst/>
-          </a:prstGeom>
-        </p:spPr>
-        <p:txBody>
-          <a:bodyPr wrap="none">
-            <a:spAutoFit/>
-          </a:bodyPr>
-          <a:lstStyle/>
-          <a:p>
-            <a:r>
-              <a:rPr lang="de-DE" dirty="0">
-                <a:hlinkClick r:id="rId3"/>
-              </a:rPr>
-              <a:t>https://helm.sh/docs/topics/charts/</a:t>
-            </a:r>
-            <a:endParaRPr lang="en-US" dirty="0"/>
-          </a:p>
-        </p:txBody>
-      </p:sp>
-    </p:spTree>
-    <p:extLst>
-      <p:ext uri="{BB962C8B-B14F-4D97-AF65-F5344CB8AC3E}">
-        <p14:creationId xmlns:p14="http://schemas.microsoft.com/office/powerpoint/2010/main" val="3255370888"/>
-      </p:ext>
-    </p:extLst>
-  </p:cSld>
-  <p:clrMapOvr>
-    <a:masterClrMapping/>
-  </p:clrMapOvr>
-</p:sld>
-</file>
-
-<file path=ppt/slides/slide8.xml><?xml version="1.0" encoding="utf-8"?>
-<p:sld xmlns:a="http://schemas.openxmlformats.org/drawingml/2006/main" xmlns:r="http://schemas.openxmlformats.org/officeDocument/2006/relationships" xmlns:p="http://schemas.openxmlformats.org/presentationml/2006/main" show="0">
-  <p:cSld>
-    <p:spTree>
-      <p:nvGrpSpPr>
-        <p:cNvPr id="1" name=""/>
-        <p:cNvGrpSpPr/>
-        <p:nvPr/>
-      </p:nvGrpSpPr>
-      <p:grpSpPr>
-        <a:xfrm>
-          <a:off x="0" y="0"/>
-          <a:ext cx="0" cy="0"/>
-          <a:chOff x="0" y="0"/>
-          <a:chExt cx="0" cy="0"/>
-        </a:xfrm>
-      </p:grpSpPr>
-      <p:sp>
-        <p:nvSpPr>
-          <p:cNvPr id="2" name="Title 1"/>
-          <p:cNvSpPr>
-            <a:spLocks noGrp="1"/>
-          </p:cNvSpPr>
-          <p:nvPr>
-            <p:ph type="title"/>
-          </p:nvPr>
-        </p:nvSpPr>
-        <p:spPr/>
-        <p:txBody>
-          <a:bodyPr/>
-          <a:lstStyle/>
-          <a:p>
-            <a:r>
-              <a:rPr lang="en-US" dirty="0"/>
-              <a:t>Helm charts</a:t>
-            </a:r>
-          </a:p>
-        </p:txBody>
-      </p:sp>
-      <p:sp>
-        <p:nvSpPr>
-          <p:cNvPr id="3" name="Rectangle 2"/>
-          <p:cNvSpPr/>
-          <p:nvPr/>
-        </p:nvSpPr>
-        <p:spPr>
-          <a:xfrm>
-            <a:off x="504000" y="1223190"/>
-            <a:ext cx="10842180" cy="2677656"/>
-          </a:xfrm>
-          <a:prstGeom prst="rect">
-            <a:avLst/>
-          </a:prstGeom>
-        </p:spPr>
-        <p:txBody>
-          <a:bodyPr wrap="square">
-            <a:spAutoFit/>
-          </a:bodyPr>
-          <a:lstStyle/>
-          <a:p>
-            <a:pPr marL="342900" indent="-342900">
-              <a:buFont typeface="Wingdings" panose="05000000000000000000" pitchFamily="2" charset="2"/>
-              <a:buChar char="§"/>
-            </a:pPr>
-            <a:r>
-              <a:rPr lang="en-US" dirty="0"/>
-              <a:t>Packages of predefined, parameterized K8s resources are called “charts”</a:t>
-            </a:r>
-          </a:p>
-          <a:p>
-            <a:pPr marL="342900" indent="-342900">
-              <a:buFont typeface="Wingdings" panose="05000000000000000000" pitchFamily="2" charset="2"/>
-              <a:buChar char="§"/>
-            </a:pPr>
-            <a:endParaRPr lang="en-US" dirty="0"/>
-          </a:p>
-          <a:p>
-            <a:r>
-              <a:rPr lang="en-US" dirty="0" err="1"/>
-              <a:t>wordpress</a:t>
-            </a:r>
-            <a:r>
-              <a:rPr lang="en-US" dirty="0"/>
-              <a:t>/</a:t>
-            </a:r>
-          </a:p>
-          <a:p>
-            <a:pPr marL="342900" indent="-342900">
-              <a:buFont typeface="Wingdings" panose="05000000000000000000" pitchFamily="2" charset="2"/>
-              <a:buChar char="§"/>
-            </a:pPr>
-            <a:r>
-              <a:rPr lang="en-US" dirty="0" err="1"/>
-              <a:t>Chart.yaml</a:t>
-            </a:r>
-            <a:r>
-              <a:rPr lang="en-US" dirty="0"/>
-              <a:t> - A file containing information about the chart, incl. dependencies</a:t>
-            </a:r>
-          </a:p>
-          <a:p>
-            <a:pPr marL="342900" indent="-342900">
-              <a:buFont typeface="Wingdings" panose="05000000000000000000" pitchFamily="2" charset="2"/>
-              <a:buChar char="§"/>
-            </a:pPr>
-            <a:r>
-              <a:rPr lang="en-US" dirty="0" err="1"/>
-              <a:t>values.yaml</a:t>
-            </a:r>
-            <a:r>
-              <a:rPr lang="en-US" dirty="0"/>
-              <a:t> - The default configuration values for this chart</a:t>
-            </a:r>
-          </a:p>
-          <a:p>
-            <a:pPr marL="342900" indent="-342900">
-              <a:buFont typeface="Wingdings" panose="05000000000000000000" pitchFamily="2" charset="2"/>
-              <a:buChar char="§"/>
-            </a:pPr>
-            <a:r>
-              <a:rPr lang="en-US" dirty="0"/>
-              <a:t>charts/ - A directory containing any charts upon which this chart depends.</a:t>
-            </a:r>
-          </a:p>
-          <a:p>
-            <a:pPr marL="342900" indent="-342900">
-              <a:buFont typeface="Wingdings" panose="05000000000000000000" pitchFamily="2" charset="2"/>
-              <a:buChar char="§"/>
-            </a:pPr>
-            <a:r>
-              <a:rPr lang="en-US" dirty="0"/>
-              <a:t>templates/ - A directory of templates that, when combined with values, will generate valid Kubernetes manifest files.</a:t>
-            </a:r>
-          </a:p>
-        </p:txBody>
-      </p:sp>
-    </p:spTree>
-    <p:extLst>
-      <p:ext uri="{BB962C8B-B14F-4D97-AF65-F5344CB8AC3E}">
-        <p14:creationId xmlns:p14="http://schemas.microsoft.com/office/powerpoint/2010/main" val="764019977"/>
-      </p:ext>
-    </p:extLst>
-  </p:cSld>
-  <p:clrMapOvr>
-    <a:masterClrMapping/>
-  </p:clrMapOvr>
-</p:sld>
-</file>
-
-<file path=ppt/slides/slide9.xml><?xml version="1.0" encoding="utf-8"?>
-<p:sld xmlns:a="http://schemas.openxmlformats.org/drawingml/2006/main" xmlns:r="http://schemas.openxmlformats.org/officeDocument/2006/relationships" xmlns:p="http://schemas.openxmlformats.org/presentationml/2006/main">
-  <p:cSld>
-    <p:spTree>
-      <p:nvGrpSpPr>
-        <p:cNvPr id="1" name=""/>
-        <p:cNvGrpSpPr/>
-        <p:nvPr/>
-      </p:nvGrpSpPr>
-      <p:grpSpPr>
-        <a:xfrm>
-          <a:off x="0" y="0"/>
-          <a:ext cx="0" cy="0"/>
-          <a:chOff x="0" y="0"/>
-          <a:chExt cx="0" cy="0"/>
-        </a:xfrm>
-      </p:grpSpPr>
-      <p:pic>
-        <p:nvPicPr>
-          <p:cNvPr id="3" name="Picture 2">
-            <a:extLst>
-              <a:ext uri="{FF2B5EF4-FFF2-40B4-BE49-F238E27FC236}">
-                <a16:creationId xmlns:a16="http://schemas.microsoft.com/office/drawing/2014/main" id="{1C13F139-5E5D-419A-9BD5-92AD40237BBF}"/>
-              </a:ext>
-            </a:extLst>
-          </p:cNvPr>
-          <p:cNvPicPr>
-            <a:picLocks noChangeAspect="1"/>
-          </p:cNvPicPr>
-          <p:nvPr/>
-        </p:nvPicPr>
-        <p:blipFill>
-          <a:blip r:embed="rId3"/>
-          <a:stretch>
-            <a:fillRect/>
-          </a:stretch>
-        </p:blipFill>
-        <p:spPr>
-          <a:xfrm>
-            <a:off x="649620" y="1371857"/>
-            <a:ext cx="5447619" cy="4114286"/>
-          </a:xfrm>
-          <a:prstGeom prst="rect">
-            <a:avLst/>
-          </a:prstGeom>
-          <a:ln>
-            <a:solidFill>
-              <a:schemeClr val="tx1"/>
-            </a:solidFill>
-          </a:ln>
-        </p:spPr>
-      </p:pic>
-      <p:sp>
-        <p:nvSpPr>
-          <p:cNvPr id="4" name="Title 3">
-            <a:extLst>
-              <a:ext uri="{FF2B5EF4-FFF2-40B4-BE49-F238E27FC236}">
-                <a16:creationId xmlns:a16="http://schemas.microsoft.com/office/drawing/2014/main" id="{2C20A3A3-5BE1-4DB7-9A60-49901FC75E7B}"/>
-              </a:ext>
-            </a:extLst>
-          </p:cNvPr>
-          <p:cNvSpPr>
-            <a:spLocks noGrp="1"/>
-          </p:cNvSpPr>
-          <p:nvPr>
-            <p:ph type="title"/>
-          </p:nvPr>
-        </p:nvSpPr>
-        <p:spPr>
-          <a:xfrm>
-            <a:off x="504001" y="504000"/>
-            <a:ext cx="11186476" cy="369332"/>
-          </a:xfrm>
-        </p:spPr>
-        <p:txBody>
-          <a:bodyPr/>
-          <a:lstStyle/>
-          <a:p>
-            <a:r>
-              <a:rPr lang="en-US" dirty="0"/>
-              <a:t>About templates</a:t>
-            </a:r>
-          </a:p>
-        </p:txBody>
-      </p:sp>
-      <p:sp>
-        <p:nvSpPr>
-          <p:cNvPr id="16" name="Speech Bubble: Rectangle 15">
-            <a:extLst>
-              <a:ext uri="{FF2B5EF4-FFF2-40B4-BE49-F238E27FC236}">
-                <a16:creationId xmlns:a16="http://schemas.microsoft.com/office/drawing/2014/main" id="{78F9BA3B-EB94-4AC8-920D-A9ED83D0D2E2}"/>
-              </a:ext>
-            </a:extLst>
-          </p:cNvPr>
-          <p:cNvSpPr/>
-          <p:nvPr/>
-        </p:nvSpPr>
-        <p:spPr bwMode="gray">
-          <a:xfrm>
-            <a:off x="7149000" y="1208618"/>
-            <a:ext cx="4101737" cy="469551"/>
-          </a:xfrm>
-          <a:prstGeom prst="wedgeRectCallout">
-            <a:avLst>
-              <a:gd name="adj1" fmla="val -105768"/>
-              <a:gd name="adj2" fmla="val 206931"/>
-            </a:avLst>
-          </a:prstGeom>
-          <a:ln>
-            <a:headEnd/>
-            <a:tailEnd/>
-          </a:ln>
-        </p:spPr>
-        <p:style>
-          <a:lnRef idx="2">
-            <a:schemeClr val="accent5"/>
-          </a:lnRef>
-          <a:fillRef idx="1">
-            <a:schemeClr val="lt1"/>
-          </a:fillRef>
-          <a:effectRef idx="0">
-            <a:schemeClr val="accent5"/>
-          </a:effectRef>
-          <a:fontRef idx="minor">
-            <a:schemeClr val="dk1"/>
-          </a:fontRef>
-        </p:style>
-        <p:txBody>
-          <a:bodyPr lIns="90000" tIns="72000" rIns="90000" bIns="72000" rtlCol="0" anchor="ctr"/>
-          <a:lstStyle/>
-          <a:p>
-            <a:pPr marR="0" algn="ctr" defTabSz="914400" eaLnBrk="1" fontAlgn="base" latinLnBrk="0" hangingPunct="1">
-              <a:lnSpc>
-                <a:spcPct val="100000"/>
-              </a:lnSpc>
-              <a:spcBef>
-                <a:spcPct val="50000"/>
-              </a:spcBef>
-              <a:spcAft>
-                <a:spcPct val="0"/>
-              </a:spcAft>
-              <a:buClr>
-                <a:srgbClr val="F0AB00"/>
-              </a:buClr>
-              <a:buSzPct val="80000"/>
-              <a:tabLst/>
-            </a:pPr>
-            <a:r>
-              <a:rPr lang="en-US" sz="1800" kern="0" noProof="0" dirty="0">
-                <a:ea typeface="Arial Unicode MS" pitchFamily="34" charset="-128"/>
-                <a:cs typeface="Arial Unicode MS" pitchFamily="34" charset="-128"/>
-              </a:rPr>
-              <a:t>Simple </a:t>
-            </a:r>
-            <a:r>
-              <a:rPr lang="en-US" sz="1800" kern="0" noProof="0" dirty="0" err="1">
-                <a:ea typeface="Arial Unicode MS" pitchFamily="34" charset="-128"/>
-                <a:cs typeface="Arial Unicode MS" pitchFamily="34" charset="-128"/>
-              </a:rPr>
-              <a:t>ConfigMap</a:t>
-            </a:r>
-            <a:r>
-              <a:rPr lang="en-US" sz="1800" kern="0" noProof="0" dirty="0">
-                <a:ea typeface="Arial Unicode MS" pitchFamily="34" charset="-128"/>
-                <a:cs typeface="Arial Unicode MS" pitchFamily="34" charset="-128"/>
-              </a:rPr>
-              <a:t> with specific values </a:t>
-            </a:r>
-            <a:endParaRPr kumimoji="0" lang="en-US" sz="1800" b="0" i="0" u="none" strike="noStrike" kern="0" cap="none" spc="0" normalizeH="0" baseline="0" noProof="0" dirty="0">
-              <a:ln>
-                <a:noFill/>
-              </a:ln>
-              <a:effectLst/>
-              <a:uLnTx/>
-              <a:uFillTx/>
-              <a:ea typeface="Arial Unicode MS" pitchFamily="34" charset="-128"/>
-              <a:cs typeface="Arial Unicode MS" pitchFamily="34" charset="-128"/>
-            </a:endParaRPr>
-          </a:p>
-        </p:txBody>
-      </p:sp>
-      <p:sp>
-        <p:nvSpPr>
-          <p:cNvPr id="18" name="Speech Bubble: Rectangle 17">
-            <a:extLst>
-              <a:ext uri="{FF2B5EF4-FFF2-40B4-BE49-F238E27FC236}">
-                <a16:creationId xmlns:a16="http://schemas.microsoft.com/office/drawing/2014/main" id="{ECB57014-3931-4302-B65B-412F5B56F6DB}"/>
-              </a:ext>
-            </a:extLst>
-          </p:cNvPr>
-          <p:cNvSpPr/>
-          <p:nvPr/>
-        </p:nvSpPr>
-        <p:spPr bwMode="gray">
-          <a:xfrm>
-            <a:off x="7148999" y="2412670"/>
-            <a:ext cx="4101737" cy="770145"/>
-          </a:xfrm>
-          <a:prstGeom prst="wedgeRectCallout">
-            <a:avLst>
-              <a:gd name="adj1" fmla="val -107269"/>
-              <a:gd name="adj2" fmla="val 44120"/>
-            </a:avLst>
-          </a:prstGeom>
-          <a:ln>
-            <a:headEnd/>
-            <a:tailEnd/>
-          </a:ln>
-        </p:spPr>
-        <p:style>
-          <a:lnRef idx="2">
-            <a:schemeClr val="accent5"/>
-          </a:lnRef>
-          <a:fillRef idx="1">
-            <a:schemeClr val="lt1"/>
-          </a:fillRef>
-          <a:effectRef idx="0">
-            <a:schemeClr val="accent5"/>
-          </a:effectRef>
-          <a:fontRef idx="minor">
-            <a:schemeClr val="dk1"/>
-          </a:fontRef>
-        </p:style>
-        <p:txBody>
-          <a:bodyPr lIns="90000" tIns="72000" rIns="90000" bIns="72000" rtlCol="0" anchor="ctr"/>
-          <a:lstStyle/>
-          <a:p>
-            <a:pPr marR="0" algn="ctr" defTabSz="914400" eaLnBrk="1" fontAlgn="base" latinLnBrk="0" hangingPunct="1">
-              <a:lnSpc>
-                <a:spcPct val="100000"/>
-              </a:lnSpc>
-              <a:spcBef>
-                <a:spcPct val="50000"/>
-              </a:spcBef>
-              <a:spcAft>
-                <a:spcPct val="0"/>
-              </a:spcAft>
-              <a:buClr>
-                <a:srgbClr val="F0AB00"/>
-              </a:buClr>
-              <a:buSzPct val="80000"/>
-              <a:tabLst/>
-            </a:pPr>
-            <a:r>
-              <a:rPr lang="en-US" sz="1800" kern="0" noProof="0" dirty="0" err="1">
-                <a:ea typeface="Arial Unicode MS" pitchFamily="34" charset="-128"/>
-                <a:cs typeface="Arial Unicode MS" pitchFamily="34" charset="-128"/>
-              </a:rPr>
-              <a:t>Yaml</a:t>
-            </a:r>
-            <a:r>
-              <a:rPr lang="en-US" sz="1800" kern="0" noProof="0" dirty="0">
-                <a:ea typeface="Arial Unicode MS" pitchFamily="34" charset="-128"/>
-                <a:cs typeface="Arial Unicode MS" pitchFamily="34" charset="-128"/>
-              </a:rPr>
-              <a:t> file needs to be edited each time a </a:t>
-            </a:r>
-            <a:r>
-              <a:rPr lang="en-US" sz="1800" kern="0" dirty="0">
-                <a:ea typeface="Arial Unicode MS" pitchFamily="34" charset="-128"/>
-                <a:cs typeface="Arial Unicode MS" pitchFamily="34" charset="-128"/>
-              </a:rPr>
-              <a:t>change is required</a:t>
-            </a:r>
-            <a:endParaRPr kumimoji="0" lang="en-US" sz="1800" b="0" i="0" u="none" strike="noStrike" kern="0" cap="none" spc="0" normalizeH="0" baseline="0" noProof="0" dirty="0">
-              <a:ln>
-                <a:noFill/>
-              </a:ln>
-              <a:effectLst/>
-              <a:uLnTx/>
-              <a:uFillTx/>
-              <a:ea typeface="Arial Unicode MS" pitchFamily="34" charset="-128"/>
-              <a:cs typeface="Arial Unicode MS" pitchFamily="34" charset="-128"/>
-            </a:endParaRPr>
-          </a:p>
-        </p:txBody>
-      </p:sp>
-      <p:sp>
-        <p:nvSpPr>
-          <p:cNvPr id="19" name="Speech Bubble: Rectangle 18">
-            <a:extLst>
-              <a:ext uri="{FF2B5EF4-FFF2-40B4-BE49-F238E27FC236}">
-                <a16:creationId xmlns:a16="http://schemas.microsoft.com/office/drawing/2014/main" id="{1C8D7A34-3D93-4592-83AE-3BAA44551FC3}"/>
-              </a:ext>
-            </a:extLst>
-          </p:cNvPr>
-          <p:cNvSpPr/>
-          <p:nvPr/>
-        </p:nvSpPr>
-        <p:spPr bwMode="gray">
-          <a:xfrm>
-            <a:off x="7148999" y="3917316"/>
-            <a:ext cx="4101737" cy="742607"/>
-          </a:xfrm>
-          <a:prstGeom prst="wedgeRectCallout">
-            <a:avLst>
-              <a:gd name="adj1" fmla="val -85786"/>
-              <a:gd name="adj2" fmla="val 37609"/>
-            </a:avLst>
-          </a:prstGeom>
-          <a:ln>
-            <a:headEnd/>
-            <a:tailEnd/>
-          </a:ln>
-        </p:spPr>
-        <p:style>
-          <a:lnRef idx="2">
-            <a:schemeClr val="accent5"/>
-          </a:lnRef>
-          <a:fillRef idx="1">
-            <a:schemeClr val="lt1"/>
-          </a:fillRef>
-          <a:effectRef idx="0">
-            <a:schemeClr val="accent5"/>
-          </a:effectRef>
-          <a:fontRef idx="minor">
-            <a:schemeClr val="dk1"/>
-          </a:fontRef>
-        </p:style>
-        <p:txBody>
-          <a:bodyPr lIns="90000" tIns="72000" rIns="90000" bIns="72000" rtlCol="0" anchor="ctr"/>
-          <a:lstStyle/>
-          <a:p>
-            <a:pPr marR="0" algn="ctr" defTabSz="914400" eaLnBrk="1" fontAlgn="base" latinLnBrk="0" hangingPunct="1">
-              <a:lnSpc>
-                <a:spcPct val="100000"/>
-              </a:lnSpc>
-              <a:spcBef>
-                <a:spcPct val="50000"/>
-              </a:spcBef>
-              <a:spcAft>
-                <a:spcPct val="0"/>
-              </a:spcAft>
-              <a:buClr>
-                <a:srgbClr val="F0AB00"/>
-              </a:buClr>
-              <a:buSzPct val="80000"/>
-              <a:tabLst/>
-            </a:pPr>
-            <a:r>
-              <a:rPr lang="en-US" sz="1800" kern="0" dirty="0">
-                <a:ea typeface="Arial Unicode MS" pitchFamily="34" charset="-128"/>
-                <a:cs typeface="Arial Unicode MS" pitchFamily="34" charset="-128"/>
-              </a:rPr>
-              <a:t>Helm template of a </a:t>
-            </a:r>
-            <a:r>
-              <a:rPr kumimoji="0" lang="en-US" sz="1800" b="0" i="0" u="none" strike="noStrike" kern="0" cap="none" spc="0" normalizeH="0" baseline="0" dirty="0" err="1">
-                <a:ln>
-                  <a:noFill/>
-                </a:ln>
-                <a:effectLst/>
-                <a:uLnTx/>
-                <a:uFillTx/>
-                <a:ea typeface="Arial Unicode MS" pitchFamily="34" charset="-128"/>
-                <a:cs typeface="Arial Unicode MS" pitchFamily="34" charset="-128"/>
-              </a:rPr>
-              <a:t>Config</a:t>
-            </a:r>
-            <a:r>
-              <a:rPr lang="en-US" sz="1800" kern="0" dirty="0" err="1">
-                <a:ea typeface="Arial Unicode MS" pitchFamily="34" charset="-128"/>
-                <a:cs typeface="Arial Unicode MS" pitchFamily="34" charset="-128"/>
-              </a:rPr>
-              <a:t>Map</a:t>
-            </a:r>
-            <a:r>
-              <a:rPr lang="en-US" sz="1800" kern="0" dirty="0">
-                <a:ea typeface="Arial Unicode MS" pitchFamily="34" charset="-128"/>
-                <a:cs typeface="Arial Unicode MS" pitchFamily="34" charset="-128"/>
-              </a:rPr>
-              <a:t> with variables</a:t>
-            </a:r>
-            <a:endParaRPr kumimoji="0" lang="en-US" sz="1800" b="0" i="0" u="none" strike="noStrike" kern="0" cap="none" spc="0" normalizeH="0" baseline="0" noProof="0" dirty="0">
-              <a:ln>
-                <a:noFill/>
-              </a:ln>
-              <a:effectLst/>
-              <a:uLnTx/>
-              <a:uFillTx/>
-              <a:ea typeface="Arial Unicode MS" pitchFamily="34" charset="-128"/>
-              <a:cs typeface="Arial Unicode MS" pitchFamily="34" charset="-128"/>
-            </a:endParaRPr>
-          </a:p>
-        </p:txBody>
-      </p:sp>
-      <p:sp>
-        <p:nvSpPr>
-          <p:cNvPr id="20" name="Speech Bubble: Rectangle 19">
-            <a:extLst>
-              <a:ext uri="{FF2B5EF4-FFF2-40B4-BE49-F238E27FC236}">
-                <a16:creationId xmlns:a16="http://schemas.microsoft.com/office/drawing/2014/main" id="{EBBD1CF4-C76F-407F-8290-5B2B409BBB4C}"/>
-              </a:ext>
-            </a:extLst>
-          </p:cNvPr>
-          <p:cNvSpPr/>
-          <p:nvPr/>
-        </p:nvSpPr>
-        <p:spPr bwMode="gray">
-          <a:xfrm>
-            <a:off x="7148998" y="5009351"/>
-            <a:ext cx="4101737" cy="770145"/>
-          </a:xfrm>
-          <a:prstGeom prst="wedgeRectCallout">
-            <a:avLst>
-              <a:gd name="adj1" fmla="val -73385"/>
-              <a:gd name="adj2" fmla="val -19283"/>
-            </a:avLst>
-          </a:prstGeom>
-          <a:ln>
-            <a:headEnd/>
-            <a:tailEnd/>
-          </a:ln>
-        </p:spPr>
-        <p:style>
-          <a:lnRef idx="2">
-            <a:schemeClr val="accent5"/>
-          </a:lnRef>
-          <a:fillRef idx="1">
-            <a:schemeClr val="lt1"/>
-          </a:fillRef>
-          <a:effectRef idx="0">
-            <a:schemeClr val="accent5"/>
-          </a:effectRef>
-          <a:fontRef idx="minor">
-            <a:schemeClr val="dk1"/>
-          </a:fontRef>
-        </p:style>
-        <p:txBody>
-          <a:bodyPr lIns="90000" tIns="72000" rIns="90000" bIns="72000" rtlCol="0" anchor="ctr"/>
-          <a:lstStyle/>
-          <a:p>
-            <a:pPr marR="0" algn="ctr" defTabSz="914400" eaLnBrk="1" fontAlgn="base" latinLnBrk="0" hangingPunct="1">
-              <a:lnSpc>
-                <a:spcPct val="100000"/>
-              </a:lnSpc>
-              <a:spcBef>
-                <a:spcPct val="50000"/>
-              </a:spcBef>
-              <a:spcAft>
-                <a:spcPct val="0"/>
-              </a:spcAft>
-              <a:buClr>
-                <a:srgbClr val="F0AB00"/>
-              </a:buClr>
-              <a:buSzPct val="80000"/>
-              <a:tabLst/>
-            </a:pPr>
-            <a:r>
-              <a:rPr kumimoji="0" lang="en-US" sz="1800" b="0" i="0" u="none" strike="noStrike" kern="0" cap="none" spc="0" normalizeH="0" baseline="0" dirty="0">
-                <a:ln>
-                  <a:noFill/>
-                </a:ln>
-                <a:effectLst/>
-                <a:uLnTx/>
-                <a:uFillTx/>
-                <a:ea typeface="Arial Unicode MS" pitchFamily="34" charset="-128"/>
-                <a:cs typeface="Arial Unicode MS" pitchFamily="34" charset="-128"/>
-              </a:rPr>
-              <a:t>Variables are </a:t>
-            </a:r>
-            <a:r>
-              <a:rPr lang="en-US" sz="1800" kern="0" dirty="0">
-                <a:ea typeface="Arial Unicode MS" pitchFamily="34" charset="-128"/>
-                <a:cs typeface="Arial Unicode MS" pitchFamily="34" charset="-128"/>
-              </a:rPr>
-              <a:t>converted to specific values upon installation of the chart</a:t>
-            </a:r>
-            <a:endParaRPr kumimoji="0" lang="en-US" sz="1800" b="0" i="0" u="none" strike="noStrike" kern="0" cap="none" spc="0" normalizeH="0" baseline="0" noProof="0" dirty="0">
-              <a:ln>
-                <a:noFill/>
-              </a:ln>
-              <a:effectLst/>
-              <a:uLnTx/>
-              <a:uFillTx/>
-              <a:ea typeface="Arial Unicode MS" pitchFamily="34" charset="-128"/>
-              <a:cs typeface="Arial Unicode MS" pitchFamily="34" charset="-128"/>
-            </a:endParaRPr>
-          </a:p>
-        </p:txBody>
-      </p:sp>
-    </p:spTree>
-    <p:extLst>
-      <p:ext uri="{BB962C8B-B14F-4D97-AF65-F5344CB8AC3E}">
-        <p14:creationId xmlns:p14="http://schemas.microsoft.com/office/powerpoint/2010/main" val="1378125413"/>
       </p:ext>
     </p:extLst>
   </p:cSld>
